--- a/output/wordlabs-er-suffix-3day.pptx
+++ b/output/wordlabs-er-suffix-3day.pptx
@@ -6057,7 +6057,7 @@
                 <a:ea typeface="Calibri" pitchFamily="34" charset="-122"/>
                 <a:cs typeface="Calibri" pitchFamily="34" charset="-120"/>
               </a:rPr>
-              <a:t>reporter</a:t>
+              <a:t>builder</a:t>
             </a:r>
             <a:pPr algn="l" indent="0" marL="0">
               <a:buNone/>
@@ -6071,7 +6071,7 @@
                 <a:ea typeface="Calibri" pitchFamily="34" charset="-122"/>
                 <a:cs typeface="Calibri" pitchFamily="34" charset="-120"/>
               </a:rPr>
-              <a:t> interviewed the </a:t>
+              <a:t> worked </a:t>
             </a:r>
             <a:pPr algn="l" indent="0" marL="0">
               <a:buNone/>
@@ -6088,7 +6088,7 @@
                 <a:ea typeface="Calibri" pitchFamily="34" charset="-122"/>
                 <a:cs typeface="Calibri" pitchFamily="34" charset="-120"/>
               </a:rPr>
-              <a:t>farmer</a:t>
+              <a:t>harder</a:t>
             </a:r>
             <a:pPr algn="l" indent="0" marL="0">
               <a:buNone/>
@@ -6102,7 +6102,7 @@
                 <a:ea typeface="Calibri" pitchFamily="34" charset="-122"/>
                 <a:cs typeface="Calibri" pitchFamily="34" charset="-120"/>
               </a:rPr>
-              <a:t> about the dry summer season.</a:t>
+              <a:t> than ever to finish the new school hall on time.</a:t>
             </a:r>
             <a:endParaRPr lang="en-US" sz="1800" dirty="0"/>
           </a:p>
@@ -6257,7 +6257,7 @@
                 <a:ea typeface="Trebuchet MS" pitchFamily="34" charset="-122"/>
                 <a:cs typeface="Trebuchet MS" pitchFamily="34" charset="-120"/>
               </a:rPr>
-              <a:t>reporter</a:t>
+              <a:t>builder</a:t>
             </a:r>
             <a:endParaRPr lang="en-US" sz="1400" dirty="0"/>
           </a:p>
@@ -6385,7 +6385,7 @@
                 <a:ea typeface="Trebuchet MS" pitchFamily="34" charset="-122"/>
                 <a:cs typeface="Trebuchet MS" pitchFamily="34" charset="-120"/>
               </a:rPr>
-              <a:t>farmer</a:t>
+              <a:t>harder</a:t>
             </a:r>
             <a:endParaRPr lang="en-US" sz="1400" dirty="0"/>
           </a:p>
@@ -6855,7 +6855,7 @@
                 <a:ea typeface="Trebuchet MS" pitchFamily="34" charset="-122"/>
                 <a:cs typeface="Trebuchet MS" pitchFamily="34" charset="-120"/>
               </a:rPr>
-              <a:t>reporter</a:t>
+              <a:t>builder</a:t>
             </a:r>
             <a:endParaRPr lang="en-US" sz="2800" dirty="0"/>
           </a:p>
@@ -7682,7 +7682,7 @@
                 <a:ea typeface="Trebuchet MS" pitchFamily="34" charset="-122"/>
                 <a:cs typeface="Trebuchet MS" pitchFamily="34" charset="-120"/>
               </a:rPr>
-              <a:t>reporter</a:t>
+              <a:t>builder</a:t>
             </a:r>
             <a:endParaRPr lang="en-US" sz="2800" dirty="0"/>
           </a:p>
@@ -7762,7 +7762,7 @@
         </p:nvSpPr>
         <p:spPr>
           <a:xfrm>
-            <a:off x="2221992" y="2258568"/>
+            <a:off x="2938272" y="2258568"/>
             <a:ext cx="1828800" cy="292608"/>
           </a:xfrm>
           <a:prstGeom prst="rect">
@@ -7796,7 +7796,7 @@
         </p:nvSpPr>
         <p:spPr>
           <a:xfrm>
-            <a:off x="2221992" y="2258568"/>
+            <a:off x="2938272" y="2258568"/>
             <a:ext cx="1828800" cy="292608"/>
           </a:xfrm>
           <a:prstGeom prst="rect">
@@ -7821,7 +7821,7 @@
                 <a:ea typeface="Trebuchet MS" pitchFamily="34" charset="-122"/>
                 <a:cs typeface="Trebuchet MS" pitchFamily="34" charset="-120"/>
               </a:rPr>
-              <a:t>re</a:t>
+              <a:t>build</a:t>
             </a:r>
             <a:endParaRPr lang="en-US" sz="1300" dirty="0"/>
           </a:p>
@@ -7835,7 +7835,7 @@
         </p:nvSpPr>
         <p:spPr>
           <a:xfrm>
-            <a:off x="2221992" y="2569464"/>
+            <a:off x="2938272" y="2569464"/>
             <a:ext cx="1828800" cy="201168"/>
           </a:xfrm>
           <a:prstGeom prst="rect">
@@ -7860,7 +7860,7 @@
                 <a:ea typeface="Calibri" pitchFamily="34" charset="-122"/>
                 <a:cs typeface="Calibri" pitchFamily="34" charset="-120"/>
               </a:rPr>
-              <a:t>again</a:t>
+              <a:t>to construct</a:t>
             </a:r>
             <a:endParaRPr lang="en-US" sz="850" dirty="0"/>
           </a:p>
@@ -7874,7 +7874,7 @@
         </p:nvSpPr>
         <p:spPr>
           <a:xfrm>
-            <a:off x="4370832" y="2258568"/>
+            <a:off x="5803392" y="2258568"/>
             <a:ext cx="1828800" cy="292608"/>
           </a:xfrm>
           <a:prstGeom prst="rect">
@@ -7883,11 +7883,11 @@
             </a:avLst>
           </a:prstGeom>
           <a:solidFill>
-            <a:srgbClr val="FCE7F3"/>
+            <a:srgbClr val="CCFBF1"/>
           </a:solidFill>
           <a:ln w="19050">
             <a:solidFill>
-              <a:srgbClr val="DB2777"/>
+              <a:srgbClr val="0D9488"/>
             </a:solidFill>
             <a:prstDash val="solid"/>
           </a:ln>
@@ -7908,7 +7908,7 @@
         </p:nvSpPr>
         <p:spPr>
           <a:xfrm>
-            <a:off x="4370832" y="2258568"/>
+            <a:off x="5803392" y="2258568"/>
             <a:ext cx="1828800" cy="292608"/>
           </a:xfrm>
           <a:prstGeom prst="rect">
@@ -7927,13 +7927,13 @@
             <a:r>
               <a:rPr lang="en-US" sz="1300" b="1" dirty="0">
                 <a:solidFill>
-                  <a:srgbClr val="9D174D"/>
+                  <a:srgbClr val="0F766E"/>
                 </a:solidFill>
                 <a:latin typeface="Trebuchet MS" pitchFamily="34" charset="0"/>
                 <a:ea typeface="Trebuchet MS" pitchFamily="34" charset="-122"/>
                 <a:cs typeface="Trebuchet MS" pitchFamily="34" charset="-120"/>
               </a:rPr>
-              <a:t>port</a:t>
+              <a:t>er</a:t>
             </a:r>
             <a:endParaRPr lang="en-US" sz="1300" dirty="0"/>
           </a:p>
@@ -7947,7 +7947,7 @@
         </p:nvSpPr>
         <p:spPr>
           <a:xfrm>
-            <a:off x="4370832" y="2569464"/>
+            <a:off x="5803392" y="2569464"/>
             <a:ext cx="1828800" cy="201168"/>
           </a:xfrm>
           <a:prstGeom prst="rect">
@@ -7972,7 +7972,7 @@
                 <a:ea typeface="Calibri" pitchFamily="34" charset="-122"/>
                 <a:cs typeface="Calibri" pitchFamily="34" charset="-120"/>
               </a:rPr>
-              <a:t>carry</a:t>
+              <a:t>one who does</a:t>
             </a:r>
             <a:endParaRPr lang="en-US" sz="850" dirty="0"/>
           </a:p>
@@ -7986,30 +7986,23 @@
         </p:nvSpPr>
         <p:spPr>
           <a:xfrm>
-            <a:off x="6519672" y="2258568"/>
-            <a:ext cx="1828800" cy="292608"/>
+            <a:off x="365760" y="3273552"/>
+            <a:ext cx="1371600" cy="658368"/>
           </a:xfrm>
           <a:prstGeom prst="rect">
             <a:avLst>
-              <a:gd name="adj" fmla="val 25000"/>
+              <a:gd name="adj" fmla="val 8333"/>
             </a:avLst>
           </a:prstGeom>
           <a:solidFill>
-            <a:srgbClr val="CCFBF1"/>
-          </a:solidFill>
-          <a:ln w="19050">
-            <a:solidFill>
-              <a:srgbClr val="0D9488"/>
-            </a:solidFill>
-            <a:prstDash val="solid"/>
-          </a:ln>
-          <a:effectLst>
-            <a:outerShdw sx="100000" sy="100000" kx="0" ky="0" algn="bl" rotWithShape="0" blurRad="101600" dist="38100" dir="8100000">
-              <a:srgbClr val="000000">
-                <a:alpha val="12000"/>
-              </a:srgbClr>
-            </a:outerShdw>
-          </a:effectLst>
+            <a:srgbClr val="E2E8F0"/>
+          </a:solidFill>
+          <a:ln w="12700">
+            <a:solidFill>
+              <a:srgbClr val="E2E8F0"/>
+            </a:solidFill>
+            <a:prstDash val="solid"/>
+          </a:ln>
         </p:spPr>
       </p:sp>
       <p:sp>
@@ -8020,8 +8013,8 @@
         </p:nvSpPr>
         <p:spPr>
           <a:xfrm>
-            <a:off x="6519672" y="2258568"/>
-            <a:ext cx="1828800" cy="292608"/>
+            <a:off x="365760" y="3273552"/>
+            <a:ext cx="1371600" cy="658368"/>
           </a:xfrm>
           <a:prstGeom prst="rect">
             <a:avLst/>
@@ -8037,73 +8030,100 @@
               <a:buNone/>
             </a:pPr>
             <a:r>
-              <a:rPr lang="en-US" sz="1300" b="1" dirty="0">
-                <a:solidFill>
-                  <a:srgbClr val="0F766E"/>
+              <a:rPr lang="en-US" sz="1100" b="1" dirty="0">
+                <a:solidFill>
+                  <a:srgbClr val="475569"/>
                 </a:solidFill>
                 <a:latin typeface="Trebuchet MS" pitchFamily="34" charset="0"/>
                 <a:ea typeface="Trebuchet MS" pitchFamily="34" charset="-122"/>
                 <a:cs typeface="Trebuchet MS" pitchFamily="34" charset="-120"/>
               </a:rPr>
-              <a:t>er</a:t>
-            </a:r>
-            <a:endParaRPr lang="en-US" sz="1300" dirty="0"/>
-          </a:p>
-        </p:txBody>
-      </p:sp>
-      <p:sp>
-        <p:nvSpPr>
-          <p:cNvPr id="24" name="Text 22"/>
-          <p:cNvSpPr/>
-          <p:nvPr/>
-        </p:nvSpPr>
-        <p:spPr>
-          <a:xfrm>
-            <a:off x="6519672" y="2569464"/>
-            <a:ext cx="1828800" cy="201168"/>
-          </a:xfrm>
-          <a:prstGeom prst="rect">
-            <a:avLst/>
-          </a:prstGeom>
-          <a:noFill/>
-          <a:ln/>
-        </p:spPr>
-        <p:txBody>
-          <a:bodyPr wrap="square" lIns="0" tIns="0" rIns="0" bIns="0" rtlCol="0" anchor="t"/>
-          <a:lstStyle/>
-          <a:p>
-            <a:pPr algn="ctr" indent="0" marL="0">
-              <a:buNone/>
-            </a:pPr>
-            <a:r>
-              <a:rPr lang="en-US" sz="850" dirty="0">
-                <a:solidFill>
-                  <a:srgbClr val="475569"/>
+              <a:t>Syllables</a:t>
+            </a:r>
+            <a:endParaRPr lang="en-US" sz="1100" dirty="0"/>
+          </a:p>
+        </p:txBody>
+      </p:sp>
+      <p:sp>
+        <p:nvSpPr>
+          <p:cNvPr id="24" name="Shape 22"/>
+          <p:cNvSpPr/>
+          <p:nvPr/>
+        </p:nvSpPr>
+        <p:spPr>
+          <a:xfrm>
+            <a:off x="1874520" y="3273552"/>
+            <a:ext cx="6903720" cy="658368"/>
+          </a:xfrm>
+          <a:prstGeom prst="rect">
+            <a:avLst>
+              <a:gd name="adj" fmla="val 8333"/>
+            </a:avLst>
+          </a:prstGeom>
+          <a:solidFill>
+            <a:srgbClr val="F8FAFC"/>
+          </a:solidFill>
+          <a:ln w="12700">
+            <a:solidFill>
+              <a:srgbClr val="E2E8F0"/>
+            </a:solidFill>
+            <a:prstDash val="dash"/>
+          </a:ln>
+        </p:spPr>
+      </p:sp>
+      <p:sp>
+        <p:nvSpPr>
+          <p:cNvPr id="25" name="Text 23"/>
+          <p:cNvSpPr/>
+          <p:nvPr/>
+        </p:nvSpPr>
+        <p:spPr>
+          <a:xfrm>
+            <a:off x="1874520" y="3273552"/>
+            <a:ext cx="6903720" cy="658368"/>
+          </a:xfrm>
+          <a:prstGeom prst="rect">
+            <a:avLst/>
+          </a:prstGeom>
+          <a:noFill/>
+          <a:ln/>
+        </p:spPr>
+        <p:txBody>
+          <a:bodyPr wrap="square" rtlCol="0" anchor="ctr"/>
+          <a:lstStyle/>
+          <a:p>
+            <a:pPr algn="ctr" indent="0" marL="0">
+              <a:buNone/>
+            </a:pPr>
+            <a:r>
+              <a:rPr lang="en-US" sz="1100" i="1" dirty="0">
+                <a:solidFill>
+                  <a:srgbClr val="CBD5E1"/>
                 </a:solidFill>
                 <a:latin typeface="Calibri" pitchFamily="34" charset="0"/>
                 <a:ea typeface="Calibri" pitchFamily="34" charset="-122"/>
                 <a:cs typeface="Calibri" pitchFamily="34" charset="-120"/>
               </a:rPr>
-              <a:t>one who does</a:t>
-            </a:r>
-            <a:endParaRPr lang="en-US" sz="850" dirty="0"/>
-          </a:p>
-        </p:txBody>
-      </p:sp>
-      <p:sp>
-        <p:nvSpPr>
-          <p:cNvPr id="25" name="Shape 23"/>
-          <p:cNvSpPr/>
-          <p:nvPr/>
-        </p:nvSpPr>
-        <p:spPr>
-          <a:xfrm>
-            <a:off x="365760" y="3273552"/>
-            <a:ext cx="1371600" cy="658368"/>
+              <a:t>Write here...</a:t>
+            </a:r>
+            <a:endParaRPr lang="en-US" sz="1100" dirty="0"/>
+          </a:p>
+        </p:txBody>
+      </p:sp>
+      <p:sp>
+        <p:nvSpPr>
+          <p:cNvPr id="26" name="Shape 24"/>
+          <p:cNvSpPr/>
+          <p:nvPr/>
+        </p:nvSpPr>
+        <p:spPr>
+          <a:xfrm>
+            <a:off x="365760" y="4096512"/>
+            <a:ext cx="1371600" cy="804672"/>
           </a:xfrm>
           <a:prstGeom prst="rect">
             <a:avLst>
-              <a:gd name="adj" fmla="val 8333"/>
+              <a:gd name="adj" fmla="val 6818"/>
             </a:avLst>
           </a:prstGeom>
           <a:solidFill>
@@ -8119,14 +8139,14 @@
       </p:sp>
       <p:sp>
         <p:nvSpPr>
-          <p:cNvPr id="26" name="Text 24"/>
-          <p:cNvSpPr/>
-          <p:nvPr/>
-        </p:nvSpPr>
-        <p:spPr>
-          <a:xfrm>
-            <a:off x="365760" y="3273552"/>
-            <a:ext cx="1371600" cy="658368"/>
+          <p:cNvPr id="27" name="Text 25"/>
+          <p:cNvSpPr/>
+          <p:nvPr/>
+        </p:nvSpPr>
+        <p:spPr>
+          <a:xfrm>
+            <a:off x="365760" y="4096512"/>
+            <a:ext cx="1371600" cy="804672"/>
           </a:xfrm>
           <a:prstGeom prst="rect">
             <a:avLst/>
@@ -8150,7 +8170,7 @@
                 <a:ea typeface="Trebuchet MS" pitchFamily="34" charset="-122"/>
                 <a:cs typeface="Trebuchet MS" pitchFamily="34" charset="-120"/>
               </a:rPr>
-              <a:t>Syllables</a:t>
+              <a:t>Phonemes</a:t>
             </a:r>
             <a:endParaRPr lang="en-US" sz="1100" dirty="0"/>
           </a:p>
@@ -8158,80 +8178,14 @@
       </p:sp>
       <p:sp>
         <p:nvSpPr>
-          <p:cNvPr id="27" name="Shape 25"/>
-          <p:cNvSpPr/>
-          <p:nvPr/>
-        </p:nvSpPr>
-        <p:spPr>
-          <a:xfrm>
-            <a:off x="1874520" y="3273552"/>
-            <a:ext cx="6903720" cy="658368"/>
-          </a:xfrm>
-          <a:prstGeom prst="rect">
-            <a:avLst>
-              <a:gd name="adj" fmla="val 8333"/>
-            </a:avLst>
-          </a:prstGeom>
-          <a:solidFill>
-            <a:srgbClr val="F8FAFC"/>
-          </a:solidFill>
-          <a:ln w="12700">
-            <a:solidFill>
-              <a:srgbClr val="E2E8F0"/>
-            </a:solidFill>
-            <a:prstDash val="dash"/>
-          </a:ln>
-        </p:spPr>
-      </p:sp>
-      <p:sp>
-        <p:nvSpPr>
-          <p:cNvPr id="28" name="Text 26"/>
-          <p:cNvSpPr/>
-          <p:nvPr/>
-        </p:nvSpPr>
-        <p:spPr>
-          <a:xfrm>
-            <a:off x="1874520" y="3273552"/>
-            <a:ext cx="6903720" cy="658368"/>
-          </a:xfrm>
-          <a:prstGeom prst="rect">
-            <a:avLst/>
-          </a:prstGeom>
-          <a:noFill/>
-          <a:ln/>
-        </p:spPr>
-        <p:txBody>
-          <a:bodyPr wrap="square" rtlCol="0" anchor="ctr"/>
-          <a:lstStyle/>
-          <a:p>
-            <a:pPr algn="ctr" indent="0" marL="0">
-              <a:buNone/>
-            </a:pPr>
-            <a:r>
-              <a:rPr lang="en-US" sz="1100" i="1" dirty="0">
-                <a:solidFill>
-                  <a:srgbClr val="CBD5E1"/>
-                </a:solidFill>
-                <a:latin typeface="Calibri" pitchFamily="34" charset="0"/>
-                <a:ea typeface="Calibri" pitchFamily="34" charset="-122"/>
-                <a:cs typeface="Calibri" pitchFamily="34" charset="-120"/>
-              </a:rPr>
-              <a:t>Write here...</a:t>
-            </a:r>
-            <a:endParaRPr lang="en-US" sz="1100" dirty="0"/>
-          </a:p>
-        </p:txBody>
-      </p:sp>
-      <p:sp>
-        <p:nvSpPr>
-          <p:cNvPr id="29" name="Shape 27"/>
-          <p:cNvSpPr/>
-          <p:nvPr/>
-        </p:nvSpPr>
-        <p:spPr>
-          <a:xfrm>
-            <a:off x="365760" y="4096512"/>
-            <a:ext cx="1371600" cy="804672"/>
+          <p:cNvPr id="28" name="Shape 26"/>
+          <p:cNvSpPr/>
+          <p:nvPr/>
+        </p:nvSpPr>
+        <p:spPr>
+          <a:xfrm>
+            <a:off x="1874520" y="4096512"/>
+            <a:ext cx="6903720" cy="804672"/>
           </a:xfrm>
           <a:prstGeom prst="rect">
             <a:avLst>
@@ -8239,85 +8193,19 @@
             </a:avLst>
           </a:prstGeom>
           <a:solidFill>
-            <a:srgbClr val="E2E8F0"/>
+            <a:srgbClr val="F8FAFC"/>
           </a:solidFill>
           <a:ln w="12700">
             <a:solidFill>
               <a:srgbClr val="E2E8F0"/>
             </a:solidFill>
-            <a:prstDash val="solid"/>
-          </a:ln>
-        </p:spPr>
-      </p:sp>
-      <p:sp>
-        <p:nvSpPr>
-          <p:cNvPr id="30" name="Text 28"/>
-          <p:cNvSpPr/>
-          <p:nvPr/>
-        </p:nvSpPr>
-        <p:spPr>
-          <a:xfrm>
-            <a:off x="365760" y="4096512"/>
-            <a:ext cx="1371600" cy="804672"/>
-          </a:xfrm>
-          <a:prstGeom prst="rect">
-            <a:avLst/>
-          </a:prstGeom>
-          <a:noFill/>
-          <a:ln/>
-        </p:spPr>
-        <p:txBody>
-          <a:bodyPr wrap="square" lIns="0" tIns="0" rIns="0" bIns="0" rtlCol="0" anchor="ctr"/>
-          <a:lstStyle/>
-          <a:p>
-            <a:pPr algn="ctr" indent="0" marL="0">
-              <a:buNone/>
-            </a:pPr>
-            <a:r>
-              <a:rPr lang="en-US" sz="1100" b="1" dirty="0">
-                <a:solidFill>
-                  <a:srgbClr val="475569"/>
-                </a:solidFill>
-                <a:latin typeface="Trebuchet MS" pitchFamily="34" charset="0"/>
-                <a:ea typeface="Trebuchet MS" pitchFamily="34" charset="-122"/>
-                <a:cs typeface="Trebuchet MS" pitchFamily="34" charset="-120"/>
-              </a:rPr>
-              <a:t>Phonemes</a:t>
-            </a:r>
-            <a:endParaRPr lang="en-US" sz="1100" dirty="0"/>
-          </a:p>
-        </p:txBody>
-      </p:sp>
-      <p:sp>
-        <p:nvSpPr>
-          <p:cNvPr id="31" name="Shape 29"/>
-          <p:cNvSpPr/>
-          <p:nvPr/>
-        </p:nvSpPr>
-        <p:spPr>
-          <a:xfrm>
-            <a:off x="1874520" y="4096512"/>
-            <a:ext cx="6903720" cy="804672"/>
-          </a:xfrm>
-          <a:prstGeom prst="rect">
-            <a:avLst>
-              <a:gd name="adj" fmla="val 6818"/>
-            </a:avLst>
-          </a:prstGeom>
-          <a:solidFill>
-            <a:srgbClr val="F8FAFC"/>
-          </a:solidFill>
-          <a:ln w="12700">
-            <a:solidFill>
-              <a:srgbClr val="E2E8F0"/>
-            </a:solidFill>
             <a:prstDash val="dash"/>
           </a:ln>
         </p:spPr>
       </p:sp>
       <p:sp>
         <p:nvSpPr>
-          <p:cNvPr id="32" name="Text 30"/>
+          <p:cNvPr id="29" name="Text 27"/>
           <p:cNvSpPr/>
           <p:nvPr/>
         </p:nvSpPr>
@@ -8779,7 +8667,7 @@
                 <a:ea typeface="Trebuchet MS" pitchFamily="34" charset="-122"/>
                 <a:cs typeface="Trebuchet MS" pitchFamily="34" charset="-120"/>
               </a:rPr>
-              <a:t>reporter</a:t>
+              <a:t>builder</a:t>
             </a:r>
             <a:endParaRPr lang="en-US" sz="2800" dirty="0"/>
           </a:p>
@@ -8859,7 +8747,7 @@
         </p:nvSpPr>
         <p:spPr>
           <a:xfrm>
-            <a:off x="2221992" y="2258568"/>
+            <a:off x="2938272" y="2258568"/>
             <a:ext cx="1828800" cy="292608"/>
           </a:xfrm>
           <a:prstGeom prst="rect">
@@ -8893,7 +8781,7 @@
         </p:nvSpPr>
         <p:spPr>
           <a:xfrm>
-            <a:off x="2221992" y="2258568"/>
+            <a:off x="2938272" y="2258568"/>
             <a:ext cx="1828800" cy="292608"/>
           </a:xfrm>
           <a:prstGeom prst="rect">
@@ -8918,7 +8806,7 @@
                 <a:ea typeface="Trebuchet MS" pitchFamily="34" charset="-122"/>
                 <a:cs typeface="Trebuchet MS" pitchFamily="34" charset="-120"/>
               </a:rPr>
-              <a:t>re</a:t>
+              <a:t>build</a:t>
             </a:r>
             <a:endParaRPr lang="en-US" sz="1300" dirty="0"/>
           </a:p>
@@ -8932,7 +8820,7 @@
         </p:nvSpPr>
         <p:spPr>
           <a:xfrm>
-            <a:off x="2221992" y="2569464"/>
+            <a:off x="2938272" y="2569464"/>
             <a:ext cx="1828800" cy="201168"/>
           </a:xfrm>
           <a:prstGeom prst="rect">
@@ -8957,7 +8845,7 @@
                 <a:ea typeface="Calibri" pitchFamily="34" charset="-122"/>
                 <a:cs typeface="Calibri" pitchFamily="34" charset="-120"/>
               </a:rPr>
-              <a:t>again</a:t>
+              <a:t>to construct</a:t>
             </a:r>
             <a:endParaRPr lang="en-US" sz="850" dirty="0"/>
           </a:p>
@@ -8971,7 +8859,7 @@
         </p:nvSpPr>
         <p:spPr>
           <a:xfrm>
-            <a:off x="4370832" y="2258568"/>
+            <a:off x="5803392" y="2258568"/>
             <a:ext cx="1828800" cy="292608"/>
           </a:xfrm>
           <a:prstGeom prst="rect">
@@ -8980,11 +8868,11 @@
             </a:avLst>
           </a:prstGeom>
           <a:solidFill>
-            <a:srgbClr val="FCE7F3"/>
+            <a:srgbClr val="CCFBF1"/>
           </a:solidFill>
           <a:ln w="19050">
             <a:solidFill>
-              <a:srgbClr val="DB2777"/>
+              <a:srgbClr val="0D9488"/>
             </a:solidFill>
             <a:prstDash val="solid"/>
           </a:ln>
@@ -9005,7 +8893,7 @@
         </p:nvSpPr>
         <p:spPr>
           <a:xfrm>
-            <a:off x="4370832" y="2258568"/>
+            <a:off x="5803392" y="2258568"/>
             <a:ext cx="1828800" cy="292608"/>
           </a:xfrm>
           <a:prstGeom prst="rect">
@@ -9024,13 +8912,13 @@
             <a:r>
               <a:rPr lang="en-US" sz="1300" b="1" dirty="0">
                 <a:solidFill>
-                  <a:srgbClr val="9D174D"/>
+                  <a:srgbClr val="0F766E"/>
                 </a:solidFill>
                 <a:latin typeface="Trebuchet MS" pitchFamily="34" charset="0"/>
                 <a:ea typeface="Trebuchet MS" pitchFamily="34" charset="-122"/>
                 <a:cs typeface="Trebuchet MS" pitchFamily="34" charset="-120"/>
               </a:rPr>
-              <a:t>port</a:t>
+              <a:t>er</a:t>
             </a:r>
             <a:endParaRPr lang="en-US" sz="1300" dirty="0"/>
           </a:p>
@@ -9044,7 +8932,7 @@
         </p:nvSpPr>
         <p:spPr>
           <a:xfrm>
-            <a:off x="4370832" y="2569464"/>
+            <a:off x="5803392" y="2569464"/>
             <a:ext cx="1828800" cy="201168"/>
           </a:xfrm>
           <a:prstGeom prst="rect">
@@ -9069,7 +8957,7 @@
                 <a:ea typeface="Calibri" pitchFamily="34" charset="-122"/>
                 <a:cs typeface="Calibri" pitchFamily="34" charset="-120"/>
               </a:rPr>
-              <a:t>carry</a:t>
+              <a:t>one who does</a:t>
             </a:r>
             <a:endParaRPr lang="en-US" sz="850" dirty="0"/>
           </a:p>
@@ -9083,30 +8971,23 @@
         </p:nvSpPr>
         <p:spPr>
           <a:xfrm>
-            <a:off x="6519672" y="2258568"/>
-            <a:ext cx="1828800" cy="292608"/>
+            <a:off x="365760" y="3273552"/>
+            <a:ext cx="1371600" cy="658368"/>
           </a:xfrm>
           <a:prstGeom prst="rect">
             <a:avLst>
-              <a:gd name="adj" fmla="val 25000"/>
+              <a:gd name="adj" fmla="val 8333"/>
             </a:avLst>
           </a:prstGeom>
           <a:solidFill>
-            <a:srgbClr val="CCFBF1"/>
-          </a:solidFill>
-          <a:ln w="19050">
-            <a:solidFill>
-              <a:srgbClr val="0D9488"/>
-            </a:solidFill>
-            <a:prstDash val="solid"/>
-          </a:ln>
-          <a:effectLst>
-            <a:outerShdw sx="100000" sy="100000" kx="0" ky="0" algn="bl" rotWithShape="0" blurRad="101600" dist="38100" dir="8100000">
-              <a:srgbClr val="000000">
-                <a:alpha val="12000"/>
-              </a:srgbClr>
-            </a:outerShdw>
-          </a:effectLst>
+            <a:srgbClr val="E2E8F0"/>
+          </a:solidFill>
+          <a:ln w="12700">
+            <a:solidFill>
+              <a:srgbClr val="E2E8F0"/>
+            </a:solidFill>
+            <a:prstDash val="solid"/>
+          </a:ln>
         </p:spPr>
       </p:sp>
       <p:sp>
@@ -9117,8 +8998,8 @@
         </p:nvSpPr>
         <p:spPr>
           <a:xfrm>
-            <a:off x="6519672" y="2258568"/>
-            <a:ext cx="1828800" cy="292608"/>
+            <a:off x="365760" y="3273552"/>
+            <a:ext cx="1371600" cy="658368"/>
           </a:xfrm>
           <a:prstGeom prst="rect">
             <a:avLst/>
@@ -9134,69 +9015,30 @@
               <a:buNone/>
             </a:pPr>
             <a:r>
-              <a:rPr lang="en-US" sz="1300" b="1" dirty="0">
-                <a:solidFill>
-                  <a:srgbClr val="0F766E"/>
+              <a:rPr lang="en-US" sz="1100" b="1" dirty="0">
+                <a:solidFill>
+                  <a:srgbClr val="475569"/>
                 </a:solidFill>
                 <a:latin typeface="Trebuchet MS" pitchFamily="34" charset="0"/>
                 <a:ea typeface="Trebuchet MS" pitchFamily="34" charset="-122"/>
                 <a:cs typeface="Trebuchet MS" pitchFamily="34" charset="-120"/>
               </a:rPr>
-              <a:t>er</a:t>
-            </a:r>
-            <a:endParaRPr lang="en-US" sz="1300" dirty="0"/>
-          </a:p>
-        </p:txBody>
-      </p:sp>
-      <p:sp>
-        <p:nvSpPr>
-          <p:cNvPr id="24" name="Text 22"/>
-          <p:cNvSpPr/>
-          <p:nvPr/>
-        </p:nvSpPr>
-        <p:spPr>
-          <a:xfrm>
-            <a:off x="6519672" y="2569464"/>
-            <a:ext cx="1828800" cy="201168"/>
-          </a:xfrm>
-          <a:prstGeom prst="rect">
-            <a:avLst/>
-          </a:prstGeom>
-          <a:noFill/>
-          <a:ln/>
-        </p:spPr>
-        <p:txBody>
-          <a:bodyPr wrap="square" lIns="0" tIns="0" rIns="0" bIns="0" rtlCol="0" anchor="t"/>
-          <a:lstStyle/>
-          <a:p>
-            <a:pPr algn="ctr" indent="0" marL="0">
-              <a:buNone/>
-            </a:pPr>
-            <a:r>
-              <a:rPr lang="en-US" sz="850" dirty="0">
-                <a:solidFill>
-                  <a:srgbClr val="475569"/>
-                </a:solidFill>
-                <a:latin typeface="Calibri" pitchFamily="34" charset="0"/>
-                <a:ea typeface="Calibri" pitchFamily="34" charset="-122"/>
-                <a:cs typeface="Calibri" pitchFamily="34" charset="-120"/>
-              </a:rPr>
-              <a:t>one who does</a:t>
-            </a:r>
-            <a:endParaRPr lang="en-US" sz="850" dirty="0"/>
-          </a:p>
-        </p:txBody>
-      </p:sp>
-      <p:sp>
-        <p:nvSpPr>
-          <p:cNvPr id="25" name="Shape 23"/>
-          <p:cNvSpPr/>
-          <p:nvPr/>
-        </p:nvSpPr>
-        <p:spPr>
-          <a:xfrm>
-            <a:off x="365760" y="3273552"/>
-            <a:ext cx="1371600" cy="658368"/>
+              <a:t>Syllables</a:t>
+            </a:r>
+            <a:endParaRPr lang="en-US" sz="1100" dirty="0"/>
+          </a:p>
+        </p:txBody>
+      </p:sp>
+      <p:sp>
+        <p:nvSpPr>
+          <p:cNvPr id="24" name="Shape 22"/>
+          <p:cNvSpPr/>
+          <p:nvPr/>
+        </p:nvSpPr>
+        <p:spPr>
+          <a:xfrm>
+            <a:off x="1874520" y="3273552"/>
+            <a:ext cx="6903720" cy="658368"/>
           </a:xfrm>
           <a:prstGeom prst="rect">
             <a:avLst>
@@ -9204,11 +9046,38 @@
             </a:avLst>
           </a:prstGeom>
           <a:solidFill>
-            <a:srgbClr val="E2E8F0"/>
-          </a:solidFill>
-          <a:ln w="12700">
-            <a:solidFill>
-              <a:srgbClr val="E2E8F0"/>
+            <a:srgbClr val="CCFBF1"/>
+          </a:solidFill>
+          <a:ln w="12700">
+            <a:solidFill>
+              <a:srgbClr val="0D9488"/>
+            </a:solidFill>
+            <a:prstDash val="solid"/>
+          </a:ln>
+        </p:spPr>
+      </p:sp>
+      <p:sp>
+        <p:nvSpPr>
+          <p:cNvPr id="25" name="Shape 23"/>
+          <p:cNvSpPr/>
+          <p:nvPr/>
+        </p:nvSpPr>
+        <p:spPr>
+          <a:xfrm>
+            <a:off x="2999232" y="3364992"/>
+            <a:ext cx="1645920" cy="475488"/>
+          </a:xfrm>
+          <a:prstGeom prst="rect">
+            <a:avLst>
+              <a:gd name="adj" fmla="val 9615"/>
+            </a:avLst>
+          </a:prstGeom>
+          <a:solidFill>
+            <a:srgbClr val="FFFFFF"/>
+          </a:solidFill>
+          <a:ln w="12700">
+            <a:solidFill>
+              <a:srgbClr val="0D9488"/>
             </a:solidFill>
             <a:prstDash val="solid"/>
           </a:ln>
@@ -9222,8 +9091,8 @@
         </p:nvSpPr>
         <p:spPr>
           <a:xfrm>
-            <a:off x="365760" y="3273552"/>
-            <a:ext cx="1371600" cy="658368"/>
+            <a:off x="2999232" y="3364992"/>
+            <a:ext cx="1645920" cy="475488"/>
           </a:xfrm>
           <a:prstGeom prst="rect">
             <a:avLst/>
@@ -9239,46 +9108,58 @@
               <a:buNone/>
             </a:pPr>
             <a:r>
-              <a:rPr lang="en-US" sz="1100" b="1" dirty="0">
-                <a:solidFill>
-                  <a:srgbClr val="475569"/>
+              <a:rPr lang="en-US" sz="1400" b="1" dirty="0">
+                <a:solidFill>
+                  <a:srgbClr val="0D9488"/>
                 </a:solidFill>
                 <a:latin typeface="Trebuchet MS" pitchFamily="34" charset="0"/>
                 <a:ea typeface="Trebuchet MS" pitchFamily="34" charset="-122"/>
                 <a:cs typeface="Trebuchet MS" pitchFamily="34" charset="-120"/>
               </a:rPr>
-              <a:t>Syllables</a:t>
-            </a:r>
-            <a:endParaRPr lang="en-US" sz="1100" dirty="0"/>
-          </a:p>
-        </p:txBody>
-      </p:sp>
-      <p:sp>
-        <p:nvSpPr>
-          <p:cNvPr id="27" name="Shape 25"/>
-          <p:cNvSpPr/>
-          <p:nvPr/>
-        </p:nvSpPr>
-        <p:spPr>
-          <a:xfrm>
-            <a:off x="1874520" y="3273552"/>
-            <a:ext cx="6903720" cy="658368"/>
-          </a:xfrm>
-          <a:prstGeom prst="rect">
-            <a:avLst>
-              <a:gd name="adj" fmla="val 8333"/>
-            </a:avLst>
-          </a:prstGeom>
-          <a:solidFill>
-            <a:srgbClr val="CCFBF1"/>
-          </a:solidFill>
-          <a:ln w="12700">
-            <a:solidFill>
-              <a:srgbClr val="0D9488"/>
-            </a:solidFill>
-            <a:prstDash val="solid"/>
-          </a:ln>
-        </p:spPr>
+              <a:t>buil</a:t>
+            </a:r>
+            <a:endParaRPr lang="en-US" sz="1400" dirty="0"/>
+          </a:p>
+        </p:txBody>
+      </p:sp>
+      <p:sp>
+        <p:nvSpPr>
+          <p:cNvPr id="27" name="Text 25"/>
+          <p:cNvSpPr/>
+          <p:nvPr/>
+        </p:nvSpPr>
+        <p:spPr>
+          <a:xfrm>
+            <a:off x="4645152" y="3364992"/>
+            <a:ext cx="1097280" cy="475488"/>
+          </a:xfrm>
+          <a:prstGeom prst="rect">
+            <a:avLst/>
+          </a:prstGeom>
+          <a:noFill/>
+          <a:ln/>
+        </p:spPr>
+        <p:txBody>
+          <a:bodyPr wrap="square" lIns="0" tIns="0" rIns="0" bIns="0" rtlCol="0" anchor="ctr"/>
+          <a:lstStyle/>
+          <a:p>
+            <a:pPr algn="ctr" indent="0" marL="0">
+              <a:buNone/>
+            </a:pPr>
+            <a:r>
+              <a:rPr lang="en-US" sz="1600" b="1" dirty="0">
+                <a:solidFill>
+                  <a:srgbClr val="0D9488"/>
+                </a:solidFill>
+                <a:latin typeface="Trebuchet MS" pitchFamily="34" charset="0"/>
+                <a:ea typeface="Trebuchet MS" pitchFamily="34" charset="-122"/>
+                <a:cs typeface="Trebuchet MS" pitchFamily="34" charset="-120"/>
+              </a:rPr>
+              <a:t>·</a:t>
+            </a:r>
+            <a:endParaRPr lang="en-US" sz="1600" dirty="0"/>
+          </a:p>
+        </p:txBody>
       </p:sp>
       <p:sp>
         <p:nvSpPr>
@@ -9288,7 +9169,7 @@
         </p:nvSpPr>
         <p:spPr>
           <a:xfrm>
-            <a:off x="2313432" y="3364992"/>
+            <a:off x="5742432" y="3364992"/>
             <a:ext cx="1645920" cy="475488"/>
           </a:xfrm>
           <a:prstGeom prst="rect">
@@ -9315,7 +9196,7 @@
         </p:nvSpPr>
         <p:spPr>
           <a:xfrm>
-            <a:off x="2313432" y="3364992"/>
+            <a:off x="5742432" y="3364992"/>
             <a:ext cx="1645920" cy="475488"/>
           </a:xfrm>
           <a:prstGeom prst="rect">
@@ -9340,7 +9221,7 @@
                 <a:ea typeface="Trebuchet MS" pitchFamily="34" charset="-122"/>
                 <a:cs typeface="Trebuchet MS" pitchFamily="34" charset="-120"/>
               </a:rPr>
-              <a:t>re</a:t>
+              <a:t>der</a:t>
             </a:r>
             <a:endParaRPr lang="en-US" sz="1400" dirty="0"/>
           </a:p>
@@ -9348,14 +9229,41 @@
       </p:sp>
       <p:sp>
         <p:nvSpPr>
-          <p:cNvPr id="30" name="Text 28"/>
-          <p:cNvSpPr/>
-          <p:nvPr/>
-        </p:nvSpPr>
-        <p:spPr>
-          <a:xfrm>
-            <a:off x="3959352" y="3364992"/>
-            <a:ext cx="411480" cy="475488"/>
+          <p:cNvPr id="30" name="Shape 28"/>
+          <p:cNvSpPr/>
+          <p:nvPr/>
+        </p:nvSpPr>
+        <p:spPr>
+          <a:xfrm>
+            <a:off x="365760" y="4096512"/>
+            <a:ext cx="1371600" cy="804672"/>
+          </a:xfrm>
+          <a:prstGeom prst="rect">
+            <a:avLst>
+              <a:gd name="adj" fmla="val 6818"/>
+            </a:avLst>
+          </a:prstGeom>
+          <a:solidFill>
+            <a:srgbClr val="E2E8F0"/>
+          </a:solidFill>
+          <a:ln w="12700">
+            <a:solidFill>
+              <a:srgbClr val="E2E8F0"/>
+            </a:solidFill>
+            <a:prstDash val="solid"/>
+          </a:ln>
+        </p:spPr>
+      </p:sp>
+      <p:sp>
+        <p:nvSpPr>
+          <p:cNvPr id="31" name="Text 29"/>
+          <p:cNvSpPr/>
+          <p:nvPr/>
+        </p:nvSpPr>
+        <p:spPr>
+          <a:xfrm>
+            <a:off x="365760" y="4096512"/>
+            <a:ext cx="1371600" cy="804672"/>
           </a:xfrm>
           <a:prstGeom prst="rect">
             <a:avLst/>
@@ -9371,201 +9279,30 @@
               <a:buNone/>
             </a:pPr>
             <a:r>
-              <a:rPr lang="en-US" sz="1600" b="1" dirty="0">
-                <a:solidFill>
-                  <a:srgbClr val="0D9488"/>
+              <a:rPr lang="en-US" sz="1100" b="1" dirty="0">
+                <a:solidFill>
+                  <a:srgbClr val="475569"/>
                 </a:solidFill>
                 <a:latin typeface="Trebuchet MS" pitchFamily="34" charset="0"/>
                 <a:ea typeface="Trebuchet MS" pitchFamily="34" charset="-122"/>
                 <a:cs typeface="Trebuchet MS" pitchFamily="34" charset="-120"/>
               </a:rPr>
-              <a:t>·</a:t>
-            </a:r>
-            <a:endParaRPr lang="en-US" sz="1600" dirty="0"/>
-          </a:p>
-        </p:txBody>
-      </p:sp>
-      <p:sp>
-        <p:nvSpPr>
-          <p:cNvPr id="31" name="Shape 29"/>
-          <p:cNvSpPr/>
-          <p:nvPr/>
-        </p:nvSpPr>
-        <p:spPr>
-          <a:xfrm>
-            <a:off x="4370832" y="3364992"/>
-            <a:ext cx="1645920" cy="475488"/>
-          </a:xfrm>
-          <a:prstGeom prst="rect">
-            <a:avLst>
-              <a:gd name="adj" fmla="val 9615"/>
-            </a:avLst>
-          </a:prstGeom>
-          <a:solidFill>
-            <a:srgbClr val="FFFFFF"/>
-          </a:solidFill>
-          <a:ln w="12700">
-            <a:solidFill>
-              <a:srgbClr val="0D9488"/>
-            </a:solidFill>
-            <a:prstDash val="solid"/>
-          </a:ln>
-        </p:spPr>
-      </p:sp>
-      <p:sp>
-        <p:nvSpPr>
-          <p:cNvPr id="32" name="Text 30"/>
-          <p:cNvSpPr/>
-          <p:nvPr/>
-        </p:nvSpPr>
-        <p:spPr>
-          <a:xfrm>
-            <a:off x="4370832" y="3364992"/>
-            <a:ext cx="1645920" cy="475488"/>
-          </a:xfrm>
-          <a:prstGeom prst="rect">
-            <a:avLst/>
-          </a:prstGeom>
-          <a:noFill/>
-          <a:ln/>
-        </p:spPr>
-        <p:txBody>
-          <a:bodyPr wrap="square" lIns="0" tIns="0" rIns="0" bIns="0" rtlCol="0" anchor="ctr"/>
-          <a:lstStyle/>
-          <a:p>
-            <a:pPr algn="ctr" indent="0" marL="0">
-              <a:buNone/>
-            </a:pPr>
-            <a:r>
-              <a:rPr lang="en-US" sz="1400" b="1" dirty="0">
-                <a:solidFill>
-                  <a:srgbClr val="0D9488"/>
-                </a:solidFill>
-                <a:latin typeface="Trebuchet MS" pitchFamily="34" charset="0"/>
-                <a:ea typeface="Trebuchet MS" pitchFamily="34" charset="-122"/>
-                <a:cs typeface="Trebuchet MS" pitchFamily="34" charset="-120"/>
-              </a:rPr>
-              <a:t>port</a:t>
-            </a:r>
-            <a:endParaRPr lang="en-US" sz="1400" dirty="0"/>
-          </a:p>
-        </p:txBody>
-      </p:sp>
-      <p:sp>
-        <p:nvSpPr>
-          <p:cNvPr id="33" name="Text 31"/>
-          <p:cNvSpPr/>
-          <p:nvPr/>
-        </p:nvSpPr>
-        <p:spPr>
-          <a:xfrm>
-            <a:off x="6016752" y="3364992"/>
-            <a:ext cx="411480" cy="475488"/>
-          </a:xfrm>
-          <a:prstGeom prst="rect">
-            <a:avLst/>
-          </a:prstGeom>
-          <a:noFill/>
-          <a:ln/>
-        </p:spPr>
-        <p:txBody>
-          <a:bodyPr wrap="square" lIns="0" tIns="0" rIns="0" bIns="0" rtlCol="0" anchor="ctr"/>
-          <a:lstStyle/>
-          <a:p>
-            <a:pPr algn="ctr" indent="0" marL="0">
-              <a:buNone/>
-            </a:pPr>
-            <a:r>
-              <a:rPr lang="en-US" sz="1600" b="1" dirty="0">
-                <a:solidFill>
-                  <a:srgbClr val="0D9488"/>
-                </a:solidFill>
-                <a:latin typeface="Trebuchet MS" pitchFamily="34" charset="0"/>
-                <a:ea typeface="Trebuchet MS" pitchFamily="34" charset="-122"/>
-                <a:cs typeface="Trebuchet MS" pitchFamily="34" charset="-120"/>
-              </a:rPr>
-              <a:t>·</a:t>
-            </a:r>
-            <a:endParaRPr lang="en-US" sz="1600" dirty="0"/>
-          </a:p>
-        </p:txBody>
-      </p:sp>
-      <p:sp>
-        <p:nvSpPr>
-          <p:cNvPr id="34" name="Shape 32"/>
-          <p:cNvSpPr/>
-          <p:nvPr/>
-        </p:nvSpPr>
-        <p:spPr>
-          <a:xfrm>
-            <a:off x="6428232" y="3364992"/>
-            <a:ext cx="1645920" cy="475488"/>
-          </a:xfrm>
-          <a:prstGeom prst="rect">
-            <a:avLst>
-              <a:gd name="adj" fmla="val 9615"/>
-            </a:avLst>
-          </a:prstGeom>
-          <a:solidFill>
-            <a:srgbClr val="FFFFFF"/>
-          </a:solidFill>
-          <a:ln w="12700">
-            <a:solidFill>
-              <a:srgbClr val="0D9488"/>
-            </a:solidFill>
-            <a:prstDash val="solid"/>
-          </a:ln>
-        </p:spPr>
-      </p:sp>
-      <p:sp>
-        <p:nvSpPr>
-          <p:cNvPr id="35" name="Text 33"/>
-          <p:cNvSpPr/>
-          <p:nvPr/>
-        </p:nvSpPr>
-        <p:spPr>
-          <a:xfrm>
-            <a:off x="6428232" y="3364992"/>
-            <a:ext cx="1645920" cy="475488"/>
-          </a:xfrm>
-          <a:prstGeom prst="rect">
-            <a:avLst/>
-          </a:prstGeom>
-          <a:noFill/>
-          <a:ln/>
-        </p:spPr>
-        <p:txBody>
-          <a:bodyPr wrap="square" lIns="0" tIns="0" rIns="0" bIns="0" rtlCol="0" anchor="ctr"/>
-          <a:lstStyle/>
-          <a:p>
-            <a:pPr algn="ctr" indent="0" marL="0">
-              <a:buNone/>
-            </a:pPr>
-            <a:r>
-              <a:rPr lang="en-US" sz="1400" b="1" dirty="0">
-                <a:solidFill>
-                  <a:srgbClr val="0D9488"/>
-                </a:solidFill>
-                <a:latin typeface="Trebuchet MS" pitchFamily="34" charset="0"/>
-                <a:ea typeface="Trebuchet MS" pitchFamily="34" charset="-122"/>
-                <a:cs typeface="Trebuchet MS" pitchFamily="34" charset="-120"/>
-              </a:rPr>
-              <a:t>er</a:t>
-            </a:r>
-            <a:endParaRPr lang="en-US" sz="1400" dirty="0"/>
-          </a:p>
-        </p:txBody>
-      </p:sp>
-      <p:sp>
-        <p:nvSpPr>
-          <p:cNvPr id="36" name="Shape 34"/>
-          <p:cNvSpPr/>
-          <p:nvPr/>
-        </p:nvSpPr>
-        <p:spPr>
-          <a:xfrm>
-            <a:off x="365760" y="4096512"/>
-            <a:ext cx="1371600" cy="804672"/>
+              <a:t>Phonemes</a:t>
+            </a:r>
+            <a:endParaRPr lang="en-US" sz="1100" dirty="0"/>
+          </a:p>
+        </p:txBody>
+      </p:sp>
+      <p:sp>
+        <p:nvSpPr>
+          <p:cNvPr id="32" name="Shape 30"/>
+          <p:cNvSpPr/>
+          <p:nvPr/>
+        </p:nvSpPr>
+        <p:spPr>
+          <a:xfrm>
+            <a:off x="1874520" y="4096512"/>
+            <a:ext cx="6903720" cy="804672"/>
           </a:xfrm>
           <a:prstGeom prst="rect">
             <a:avLst>
@@ -9573,85 +9310,19 @@
             </a:avLst>
           </a:prstGeom>
           <a:solidFill>
-            <a:srgbClr val="E2E8F0"/>
+            <a:srgbClr val="F8FAFC"/>
           </a:solidFill>
           <a:ln w="12700">
             <a:solidFill>
               <a:srgbClr val="E2E8F0"/>
             </a:solidFill>
-            <a:prstDash val="solid"/>
-          </a:ln>
-        </p:spPr>
-      </p:sp>
-      <p:sp>
-        <p:nvSpPr>
-          <p:cNvPr id="37" name="Text 35"/>
-          <p:cNvSpPr/>
-          <p:nvPr/>
-        </p:nvSpPr>
-        <p:spPr>
-          <a:xfrm>
-            <a:off x="365760" y="4096512"/>
-            <a:ext cx="1371600" cy="804672"/>
-          </a:xfrm>
-          <a:prstGeom prst="rect">
-            <a:avLst/>
-          </a:prstGeom>
-          <a:noFill/>
-          <a:ln/>
-        </p:spPr>
-        <p:txBody>
-          <a:bodyPr wrap="square" lIns="0" tIns="0" rIns="0" bIns="0" rtlCol="0" anchor="ctr"/>
-          <a:lstStyle/>
-          <a:p>
-            <a:pPr algn="ctr" indent="0" marL="0">
-              <a:buNone/>
-            </a:pPr>
-            <a:r>
-              <a:rPr lang="en-US" sz="1100" b="1" dirty="0">
-                <a:solidFill>
-                  <a:srgbClr val="475569"/>
-                </a:solidFill>
-                <a:latin typeface="Trebuchet MS" pitchFamily="34" charset="0"/>
-                <a:ea typeface="Trebuchet MS" pitchFamily="34" charset="-122"/>
-                <a:cs typeface="Trebuchet MS" pitchFamily="34" charset="-120"/>
-              </a:rPr>
-              <a:t>Phonemes</a:t>
-            </a:r>
-            <a:endParaRPr lang="en-US" sz="1100" dirty="0"/>
-          </a:p>
-        </p:txBody>
-      </p:sp>
-      <p:sp>
-        <p:nvSpPr>
-          <p:cNvPr id="38" name="Shape 36"/>
-          <p:cNvSpPr/>
-          <p:nvPr/>
-        </p:nvSpPr>
-        <p:spPr>
-          <a:xfrm>
-            <a:off x="1874520" y="4096512"/>
-            <a:ext cx="6903720" cy="804672"/>
-          </a:xfrm>
-          <a:prstGeom prst="rect">
-            <a:avLst>
-              <a:gd name="adj" fmla="val 6818"/>
-            </a:avLst>
-          </a:prstGeom>
-          <a:solidFill>
-            <a:srgbClr val="F8FAFC"/>
-          </a:solidFill>
-          <a:ln w="12700">
-            <a:solidFill>
-              <a:srgbClr val="E2E8F0"/>
-            </a:solidFill>
             <a:prstDash val="dash"/>
           </a:ln>
         </p:spPr>
       </p:sp>
       <p:sp>
         <p:nvSpPr>
-          <p:cNvPr id="39" name="Text 37"/>
+          <p:cNvPr id="33" name="Text 31"/>
           <p:cNvSpPr/>
           <p:nvPr/>
         </p:nvSpPr>
@@ -10113,7 +9784,7 @@
                 <a:ea typeface="Trebuchet MS" pitchFamily="34" charset="-122"/>
                 <a:cs typeface="Trebuchet MS" pitchFamily="34" charset="-120"/>
               </a:rPr>
-              <a:t>reporter</a:t>
+              <a:t>builder</a:t>
             </a:r>
             <a:endParaRPr lang="en-US" sz="2800" dirty="0"/>
           </a:p>
@@ -10193,7 +9864,7 @@
         </p:nvSpPr>
         <p:spPr>
           <a:xfrm>
-            <a:off x="2221992" y="2258568"/>
+            <a:off x="2938272" y="2258568"/>
             <a:ext cx="1828800" cy="292608"/>
           </a:xfrm>
           <a:prstGeom prst="rect">
@@ -10227,7 +9898,7 @@
         </p:nvSpPr>
         <p:spPr>
           <a:xfrm>
-            <a:off x="2221992" y="2258568"/>
+            <a:off x="2938272" y="2258568"/>
             <a:ext cx="1828800" cy="292608"/>
           </a:xfrm>
           <a:prstGeom prst="rect">
@@ -10252,7 +9923,7 @@
                 <a:ea typeface="Trebuchet MS" pitchFamily="34" charset="-122"/>
                 <a:cs typeface="Trebuchet MS" pitchFamily="34" charset="-120"/>
               </a:rPr>
-              <a:t>re</a:t>
+              <a:t>build</a:t>
             </a:r>
             <a:endParaRPr lang="en-US" sz="1300" dirty="0"/>
           </a:p>
@@ -10266,7 +9937,7 @@
         </p:nvSpPr>
         <p:spPr>
           <a:xfrm>
-            <a:off x="2221992" y="2569464"/>
+            <a:off x="2938272" y="2569464"/>
             <a:ext cx="1828800" cy="201168"/>
           </a:xfrm>
           <a:prstGeom prst="rect">
@@ -10291,7 +9962,7 @@
                 <a:ea typeface="Calibri" pitchFamily="34" charset="-122"/>
                 <a:cs typeface="Calibri" pitchFamily="34" charset="-120"/>
               </a:rPr>
-              <a:t>again</a:t>
+              <a:t>to construct</a:t>
             </a:r>
             <a:endParaRPr lang="en-US" sz="850" dirty="0"/>
           </a:p>
@@ -10305,7 +9976,7 @@
         </p:nvSpPr>
         <p:spPr>
           <a:xfrm>
-            <a:off x="4370832" y="2258568"/>
+            <a:off x="5803392" y="2258568"/>
             <a:ext cx="1828800" cy="292608"/>
           </a:xfrm>
           <a:prstGeom prst="rect">
@@ -10314,11 +9985,11 @@
             </a:avLst>
           </a:prstGeom>
           <a:solidFill>
-            <a:srgbClr val="FCE7F3"/>
+            <a:srgbClr val="CCFBF1"/>
           </a:solidFill>
           <a:ln w="19050">
             <a:solidFill>
-              <a:srgbClr val="DB2777"/>
+              <a:srgbClr val="0D9488"/>
             </a:solidFill>
             <a:prstDash val="solid"/>
           </a:ln>
@@ -10339,7 +10010,7 @@
         </p:nvSpPr>
         <p:spPr>
           <a:xfrm>
-            <a:off x="4370832" y="2258568"/>
+            <a:off x="5803392" y="2258568"/>
             <a:ext cx="1828800" cy="292608"/>
           </a:xfrm>
           <a:prstGeom prst="rect">
@@ -10358,13 +10029,13 @@
             <a:r>
               <a:rPr lang="en-US" sz="1300" b="1" dirty="0">
                 <a:solidFill>
-                  <a:srgbClr val="9D174D"/>
+                  <a:srgbClr val="0F766E"/>
                 </a:solidFill>
                 <a:latin typeface="Trebuchet MS" pitchFamily="34" charset="0"/>
                 <a:ea typeface="Trebuchet MS" pitchFamily="34" charset="-122"/>
                 <a:cs typeface="Trebuchet MS" pitchFamily="34" charset="-120"/>
               </a:rPr>
-              <a:t>port</a:t>
+              <a:t>er</a:t>
             </a:r>
             <a:endParaRPr lang="en-US" sz="1300" dirty="0"/>
           </a:p>
@@ -10378,7 +10049,7 @@
         </p:nvSpPr>
         <p:spPr>
           <a:xfrm>
-            <a:off x="4370832" y="2569464"/>
+            <a:off x="5803392" y="2569464"/>
             <a:ext cx="1828800" cy="201168"/>
           </a:xfrm>
           <a:prstGeom prst="rect">
@@ -10403,7 +10074,7 @@
                 <a:ea typeface="Calibri" pitchFamily="34" charset="-122"/>
                 <a:cs typeface="Calibri" pitchFamily="34" charset="-120"/>
               </a:rPr>
-              <a:t>carry</a:t>
+              <a:t>one who does</a:t>
             </a:r>
             <a:endParaRPr lang="en-US" sz="850" dirty="0"/>
           </a:p>
@@ -10417,30 +10088,23 @@
         </p:nvSpPr>
         <p:spPr>
           <a:xfrm>
-            <a:off x="6519672" y="2258568"/>
-            <a:ext cx="1828800" cy="292608"/>
+            <a:off x="365760" y="3273552"/>
+            <a:ext cx="1371600" cy="658368"/>
           </a:xfrm>
           <a:prstGeom prst="rect">
             <a:avLst>
-              <a:gd name="adj" fmla="val 25000"/>
+              <a:gd name="adj" fmla="val 8333"/>
             </a:avLst>
           </a:prstGeom>
           <a:solidFill>
-            <a:srgbClr val="CCFBF1"/>
-          </a:solidFill>
-          <a:ln w="19050">
-            <a:solidFill>
-              <a:srgbClr val="0D9488"/>
-            </a:solidFill>
-            <a:prstDash val="solid"/>
-          </a:ln>
-          <a:effectLst>
-            <a:outerShdw sx="100000" sy="100000" kx="0" ky="0" algn="bl" rotWithShape="0" blurRad="101600" dist="38100" dir="8100000">
-              <a:srgbClr val="000000">
-                <a:alpha val="12000"/>
-              </a:srgbClr>
-            </a:outerShdw>
-          </a:effectLst>
+            <a:srgbClr val="E2E8F0"/>
+          </a:solidFill>
+          <a:ln w="12700">
+            <a:solidFill>
+              <a:srgbClr val="E2E8F0"/>
+            </a:solidFill>
+            <a:prstDash val="solid"/>
+          </a:ln>
         </p:spPr>
       </p:sp>
       <p:sp>
@@ -10451,8 +10115,8 @@
         </p:nvSpPr>
         <p:spPr>
           <a:xfrm>
-            <a:off x="6519672" y="2258568"/>
-            <a:ext cx="1828800" cy="292608"/>
+            <a:off x="365760" y="3273552"/>
+            <a:ext cx="1371600" cy="658368"/>
           </a:xfrm>
           <a:prstGeom prst="rect">
             <a:avLst/>
@@ -10468,30 +10132,453 @@
               <a:buNone/>
             </a:pPr>
             <a:r>
-              <a:rPr lang="en-US" sz="1300" b="1" dirty="0">
-                <a:solidFill>
-                  <a:srgbClr val="0F766E"/>
+              <a:rPr lang="en-US" sz="1100" b="1" dirty="0">
+                <a:solidFill>
+                  <a:srgbClr val="475569"/>
                 </a:solidFill>
                 <a:latin typeface="Trebuchet MS" pitchFamily="34" charset="0"/>
                 <a:ea typeface="Trebuchet MS" pitchFamily="34" charset="-122"/>
                 <a:cs typeface="Trebuchet MS" pitchFamily="34" charset="-120"/>
               </a:rPr>
-              <a:t>er</a:t>
-            </a:r>
-            <a:endParaRPr lang="en-US" sz="1300" dirty="0"/>
-          </a:p>
-        </p:txBody>
-      </p:sp>
-      <p:sp>
-        <p:nvSpPr>
-          <p:cNvPr id="24" name="Text 22"/>
-          <p:cNvSpPr/>
-          <p:nvPr/>
-        </p:nvSpPr>
-        <p:spPr>
-          <a:xfrm>
-            <a:off x="6519672" y="2569464"/>
-            <a:ext cx="1828800" cy="201168"/>
+              <a:t>Syllables</a:t>
+            </a:r>
+            <a:endParaRPr lang="en-US" sz="1100" dirty="0"/>
+          </a:p>
+        </p:txBody>
+      </p:sp>
+      <p:sp>
+        <p:nvSpPr>
+          <p:cNvPr id="24" name="Shape 22"/>
+          <p:cNvSpPr/>
+          <p:nvPr/>
+        </p:nvSpPr>
+        <p:spPr>
+          <a:xfrm>
+            <a:off x="1874520" y="3273552"/>
+            <a:ext cx="6903720" cy="658368"/>
+          </a:xfrm>
+          <a:prstGeom prst="rect">
+            <a:avLst>
+              <a:gd name="adj" fmla="val 8333"/>
+            </a:avLst>
+          </a:prstGeom>
+          <a:solidFill>
+            <a:srgbClr val="CCFBF1"/>
+          </a:solidFill>
+          <a:ln w="12700">
+            <a:solidFill>
+              <a:srgbClr val="0D9488"/>
+            </a:solidFill>
+            <a:prstDash val="solid"/>
+          </a:ln>
+        </p:spPr>
+      </p:sp>
+      <p:sp>
+        <p:nvSpPr>
+          <p:cNvPr id="25" name="Shape 23"/>
+          <p:cNvSpPr/>
+          <p:nvPr/>
+        </p:nvSpPr>
+        <p:spPr>
+          <a:xfrm>
+            <a:off x="2999232" y="3364992"/>
+            <a:ext cx="1645920" cy="475488"/>
+          </a:xfrm>
+          <a:prstGeom prst="rect">
+            <a:avLst>
+              <a:gd name="adj" fmla="val 9615"/>
+            </a:avLst>
+          </a:prstGeom>
+          <a:solidFill>
+            <a:srgbClr val="FFFFFF"/>
+          </a:solidFill>
+          <a:ln w="12700">
+            <a:solidFill>
+              <a:srgbClr val="0D9488"/>
+            </a:solidFill>
+            <a:prstDash val="solid"/>
+          </a:ln>
+        </p:spPr>
+      </p:sp>
+      <p:sp>
+        <p:nvSpPr>
+          <p:cNvPr id="26" name="Text 24"/>
+          <p:cNvSpPr/>
+          <p:nvPr/>
+        </p:nvSpPr>
+        <p:spPr>
+          <a:xfrm>
+            <a:off x="2999232" y="3364992"/>
+            <a:ext cx="1645920" cy="475488"/>
+          </a:xfrm>
+          <a:prstGeom prst="rect">
+            <a:avLst/>
+          </a:prstGeom>
+          <a:noFill/>
+          <a:ln/>
+        </p:spPr>
+        <p:txBody>
+          <a:bodyPr wrap="square" lIns="0" tIns="0" rIns="0" bIns="0" rtlCol="0" anchor="ctr"/>
+          <a:lstStyle/>
+          <a:p>
+            <a:pPr algn="ctr" indent="0" marL="0">
+              <a:buNone/>
+            </a:pPr>
+            <a:r>
+              <a:rPr lang="en-US" sz="1400" b="1" dirty="0">
+                <a:solidFill>
+                  <a:srgbClr val="0D9488"/>
+                </a:solidFill>
+                <a:latin typeface="Trebuchet MS" pitchFamily="34" charset="0"/>
+                <a:ea typeface="Trebuchet MS" pitchFamily="34" charset="-122"/>
+                <a:cs typeface="Trebuchet MS" pitchFamily="34" charset="-120"/>
+              </a:rPr>
+              <a:t>buil</a:t>
+            </a:r>
+            <a:endParaRPr lang="en-US" sz="1400" dirty="0"/>
+          </a:p>
+        </p:txBody>
+      </p:sp>
+      <p:sp>
+        <p:nvSpPr>
+          <p:cNvPr id="27" name="Text 25"/>
+          <p:cNvSpPr/>
+          <p:nvPr/>
+        </p:nvSpPr>
+        <p:spPr>
+          <a:xfrm>
+            <a:off x="4645152" y="3364992"/>
+            <a:ext cx="1097280" cy="475488"/>
+          </a:xfrm>
+          <a:prstGeom prst="rect">
+            <a:avLst/>
+          </a:prstGeom>
+          <a:noFill/>
+          <a:ln/>
+        </p:spPr>
+        <p:txBody>
+          <a:bodyPr wrap="square" lIns="0" tIns="0" rIns="0" bIns="0" rtlCol="0" anchor="ctr"/>
+          <a:lstStyle/>
+          <a:p>
+            <a:pPr algn="ctr" indent="0" marL="0">
+              <a:buNone/>
+            </a:pPr>
+            <a:r>
+              <a:rPr lang="en-US" sz="1600" b="1" dirty="0">
+                <a:solidFill>
+                  <a:srgbClr val="0D9488"/>
+                </a:solidFill>
+                <a:latin typeface="Trebuchet MS" pitchFamily="34" charset="0"/>
+                <a:ea typeface="Trebuchet MS" pitchFamily="34" charset="-122"/>
+                <a:cs typeface="Trebuchet MS" pitchFamily="34" charset="-120"/>
+              </a:rPr>
+              <a:t>·</a:t>
+            </a:r>
+            <a:endParaRPr lang="en-US" sz="1600" dirty="0"/>
+          </a:p>
+        </p:txBody>
+      </p:sp>
+      <p:sp>
+        <p:nvSpPr>
+          <p:cNvPr id="28" name="Shape 26"/>
+          <p:cNvSpPr/>
+          <p:nvPr/>
+        </p:nvSpPr>
+        <p:spPr>
+          <a:xfrm>
+            <a:off x="5742432" y="3364992"/>
+            <a:ext cx="1645920" cy="475488"/>
+          </a:xfrm>
+          <a:prstGeom prst="rect">
+            <a:avLst>
+              <a:gd name="adj" fmla="val 9615"/>
+            </a:avLst>
+          </a:prstGeom>
+          <a:solidFill>
+            <a:srgbClr val="FFFFFF"/>
+          </a:solidFill>
+          <a:ln w="12700">
+            <a:solidFill>
+              <a:srgbClr val="0D9488"/>
+            </a:solidFill>
+            <a:prstDash val="solid"/>
+          </a:ln>
+        </p:spPr>
+      </p:sp>
+      <p:sp>
+        <p:nvSpPr>
+          <p:cNvPr id="29" name="Text 27"/>
+          <p:cNvSpPr/>
+          <p:nvPr/>
+        </p:nvSpPr>
+        <p:spPr>
+          <a:xfrm>
+            <a:off x="5742432" y="3364992"/>
+            <a:ext cx="1645920" cy="475488"/>
+          </a:xfrm>
+          <a:prstGeom prst="rect">
+            <a:avLst/>
+          </a:prstGeom>
+          <a:noFill/>
+          <a:ln/>
+        </p:spPr>
+        <p:txBody>
+          <a:bodyPr wrap="square" lIns="0" tIns="0" rIns="0" bIns="0" rtlCol="0" anchor="ctr"/>
+          <a:lstStyle/>
+          <a:p>
+            <a:pPr algn="ctr" indent="0" marL="0">
+              <a:buNone/>
+            </a:pPr>
+            <a:r>
+              <a:rPr lang="en-US" sz="1400" b="1" dirty="0">
+                <a:solidFill>
+                  <a:srgbClr val="0D9488"/>
+                </a:solidFill>
+                <a:latin typeface="Trebuchet MS" pitchFamily="34" charset="0"/>
+                <a:ea typeface="Trebuchet MS" pitchFamily="34" charset="-122"/>
+                <a:cs typeface="Trebuchet MS" pitchFamily="34" charset="-120"/>
+              </a:rPr>
+              <a:t>der</a:t>
+            </a:r>
+            <a:endParaRPr lang="en-US" sz="1400" dirty="0"/>
+          </a:p>
+        </p:txBody>
+      </p:sp>
+      <p:sp>
+        <p:nvSpPr>
+          <p:cNvPr id="30" name="Shape 28"/>
+          <p:cNvSpPr/>
+          <p:nvPr/>
+        </p:nvSpPr>
+        <p:spPr>
+          <a:xfrm>
+            <a:off x="365760" y="4096512"/>
+            <a:ext cx="1371600" cy="804672"/>
+          </a:xfrm>
+          <a:prstGeom prst="rect">
+            <a:avLst>
+              <a:gd name="adj" fmla="val 6818"/>
+            </a:avLst>
+          </a:prstGeom>
+          <a:solidFill>
+            <a:srgbClr val="E2E8F0"/>
+          </a:solidFill>
+          <a:ln w="12700">
+            <a:solidFill>
+              <a:srgbClr val="E2E8F0"/>
+            </a:solidFill>
+            <a:prstDash val="solid"/>
+          </a:ln>
+        </p:spPr>
+      </p:sp>
+      <p:sp>
+        <p:nvSpPr>
+          <p:cNvPr id="31" name="Text 29"/>
+          <p:cNvSpPr/>
+          <p:nvPr/>
+        </p:nvSpPr>
+        <p:spPr>
+          <a:xfrm>
+            <a:off x="365760" y="4096512"/>
+            <a:ext cx="1371600" cy="804672"/>
+          </a:xfrm>
+          <a:prstGeom prst="rect">
+            <a:avLst/>
+          </a:prstGeom>
+          <a:noFill/>
+          <a:ln/>
+        </p:spPr>
+        <p:txBody>
+          <a:bodyPr wrap="square" lIns="0" tIns="0" rIns="0" bIns="0" rtlCol="0" anchor="ctr"/>
+          <a:lstStyle/>
+          <a:p>
+            <a:pPr algn="ctr" indent="0" marL="0">
+              <a:buNone/>
+            </a:pPr>
+            <a:r>
+              <a:rPr lang="en-US" sz="1100" b="1" dirty="0">
+                <a:solidFill>
+                  <a:srgbClr val="475569"/>
+                </a:solidFill>
+                <a:latin typeface="Trebuchet MS" pitchFamily="34" charset="0"/>
+                <a:ea typeface="Trebuchet MS" pitchFamily="34" charset="-122"/>
+                <a:cs typeface="Trebuchet MS" pitchFamily="34" charset="-120"/>
+              </a:rPr>
+              <a:t>Phonemes</a:t>
+            </a:r>
+            <a:endParaRPr lang="en-US" sz="1100" dirty="0"/>
+          </a:p>
+        </p:txBody>
+      </p:sp>
+      <p:sp>
+        <p:nvSpPr>
+          <p:cNvPr id="32" name="Shape 30"/>
+          <p:cNvSpPr/>
+          <p:nvPr/>
+        </p:nvSpPr>
+        <p:spPr>
+          <a:xfrm>
+            <a:off x="1874520" y="4096512"/>
+            <a:ext cx="6903720" cy="804672"/>
+          </a:xfrm>
+          <a:prstGeom prst="rect">
+            <a:avLst>
+              <a:gd name="adj" fmla="val 6818"/>
+            </a:avLst>
+          </a:prstGeom>
+          <a:solidFill>
+            <a:srgbClr val="FCE7F3"/>
+          </a:solidFill>
+          <a:ln w="12700">
+            <a:solidFill>
+              <a:srgbClr val="DB2777"/>
+            </a:solidFill>
+            <a:prstDash val="solid"/>
+          </a:ln>
+        </p:spPr>
+      </p:sp>
+      <p:sp>
+        <p:nvSpPr>
+          <p:cNvPr id="33" name="Shape 31"/>
+          <p:cNvSpPr/>
+          <p:nvPr/>
+        </p:nvSpPr>
+        <p:spPr>
+          <a:xfrm>
+            <a:off x="2427732" y="4169664"/>
+            <a:ext cx="685800" cy="384048"/>
+          </a:xfrm>
+          <a:prstGeom prst="rect">
+            <a:avLst>
+              <a:gd name="adj" fmla="val 9524"/>
+            </a:avLst>
+          </a:prstGeom>
+          <a:solidFill>
+            <a:srgbClr val="FFFFFF"/>
+          </a:solidFill>
+          <a:ln w="12700">
+            <a:solidFill>
+              <a:srgbClr val="DB2777"/>
+            </a:solidFill>
+            <a:prstDash val="solid"/>
+          </a:ln>
+        </p:spPr>
+      </p:sp>
+      <p:sp>
+        <p:nvSpPr>
+          <p:cNvPr id="34" name="Text 32"/>
+          <p:cNvSpPr/>
+          <p:nvPr/>
+        </p:nvSpPr>
+        <p:spPr>
+          <a:xfrm>
+            <a:off x="2427732" y="4169664"/>
+            <a:ext cx="685800" cy="384048"/>
+          </a:xfrm>
+          <a:prstGeom prst="rect">
+            <a:avLst/>
+          </a:prstGeom>
+          <a:noFill/>
+          <a:ln/>
+        </p:spPr>
+        <p:txBody>
+          <a:bodyPr wrap="square" lIns="0" tIns="0" rIns="0" bIns="0" rtlCol="0" anchor="ctr"/>
+          <a:lstStyle/>
+          <a:p>
+            <a:pPr algn="ctr" indent="0" marL="0">
+              <a:buNone/>
+            </a:pPr>
+            <a:r>
+              <a:rPr lang="en-US" sz="900" b="1" dirty="0">
+                <a:solidFill>
+                  <a:srgbClr val="9D174D"/>
+                </a:solidFill>
+                <a:latin typeface="Trebuchet MS" pitchFamily="34" charset="0"/>
+                <a:ea typeface="Trebuchet MS" pitchFamily="34" charset="-122"/>
+                <a:cs typeface="Trebuchet MS" pitchFamily="34" charset="-120"/>
+              </a:rPr>
+              <a:t>b</a:t>
+            </a:r>
+            <a:endParaRPr lang="en-US" sz="900" dirty="0"/>
+          </a:p>
+        </p:txBody>
+      </p:sp>
+      <p:sp>
+        <p:nvSpPr>
+          <p:cNvPr id="35" name="Shape 33"/>
+          <p:cNvSpPr/>
+          <p:nvPr/>
+        </p:nvSpPr>
+        <p:spPr>
+          <a:xfrm>
+            <a:off x="3639312" y="4169664"/>
+            <a:ext cx="685800" cy="384048"/>
+          </a:xfrm>
+          <a:prstGeom prst="rect">
+            <a:avLst>
+              <a:gd name="adj" fmla="val 9524"/>
+            </a:avLst>
+          </a:prstGeom>
+          <a:solidFill>
+            <a:srgbClr val="FFFFFF"/>
+          </a:solidFill>
+          <a:ln w="12700">
+            <a:solidFill>
+              <a:srgbClr val="DB2777"/>
+            </a:solidFill>
+            <a:prstDash val="solid"/>
+          </a:ln>
+        </p:spPr>
+      </p:sp>
+      <p:sp>
+        <p:nvSpPr>
+          <p:cNvPr id="36" name="Text 34"/>
+          <p:cNvSpPr/>
+          <p:nvPr/>
+        </p:nvSpPr>
+        <p:spPr>
+          <a:xfrm>
+            <a:off x="3639312" y="4169664"/>
+            <a:ext cx="685800" cy="384048"/>
+          </a:xfrm>
+          <a:prstGeom prst="rect">
+            <a:avLst/>
+          </a:prstGeom>
+          <a:noFill/>
+          <a:ln/>
+        </p:spPr>
+        <p:txBody>
+          <a:bodyPr wrap="square" lIns="0" tIns="0" rIns="0" bIns="0" rtlCol="0" anchor="ctr"/>
+          <a:lstStyle/>
+          <a:p>
+            <a:pPr algn="ctr" indent="0" marL="0">
+              <a:buNone/>
+            </a:pPr>
+            <a:r>
+              <a:rPr lang="en-US" sz="900" b="1" dirty="0">
+                <a:solidFill>
+                  <a:srgbClr val="9D174D"/>
+                </a:solidFill>
+                <a:latin typeface="Trebuchet MS" pitchFamily="34" charset="0"/>
+                <a:ea typeface="Trebuchet MS" pitchFamily="34" charset="-122"/>
+                <a:cs typeface="Trebuchet MS" pitchFamily="34" charset="-120"/>
+              </a:rPr>
+              <a:t>ui</a:t>
+            </a:r>
+            <a:endParaRPr lang="en-US" sz="900" dirty="0"/>
+          </a:p>
+        </p:txBody>
+      </p:sp>
+      <p:sp>
+        <p:nvSpPr>
+          <p:cNvPr id="37" name="Text 35"/>
+          <p:cNvSpPr/>
+          <p:nvPr/>
+        </p:nvSpPr>
+        <p:spPr>
+          <a:xfrm>
+            <a:off x="3639312" y="4572000"/>
+            <a:ext cx="685800" cy="219456"/>
           </a:xfrm>
           <a:prstGeom prst="rect">
             <a:avLst/>
@@ -10507,57 +10594,57 @@
               <a:buNone/>
             </a:pPr>
             <a:r>
-              <a:rPr lang="en-US" sz="850" dirty="0">
-                <a:solidFill>
-                  <a:srgbClr val="475569"/>
+              <a:rPr lang="en-US" sz="750" i="1" dirty="0">
+                <a:solidFill>
+                  <a:srgbClr val="94A3B8"/>
                 </a:solidFill>
                 <a:latin typeface="Calibri" pitchFamily="34" charset="0"/>
                 <a:ea typeface="Calibri" pitchFamily="34" charset="-122"/>
                 <a:cs typeface="Calibri" pitchFamily="34" charset="-120"/>
               </a:rPr>
-              <a:t>one who does</a:t>
-            </a:r>
-            <a:endParaRPr lang="en-US" sz="850" dirty="0"/>
-          </a:p>
-        </p:txBody>
-      </p:sp>
-      <p:sp>
-        <p:nvSpPr>
-          <p:cNvPr id="25" name="Shape 23"/>
-          <p:cNvSpPr/>
-          <p:nvPr/>
-        </p:nvSpPr>
-        <p:spPr>
-          <a:xfrm>
-            <a:off x="365760" y="3273552"/>
-            <a:ext cx="1371600" cy="658368"/>
+              <a:t>/i/</a:t>
+            </a:r>
+            <a:endParaRPr lang="en-US" sz="750" dirty="0"/>
+          </a:p>
+        </p:txBody>
+      </p:sp>
+      <p:sp>
+        <p:nvSpPr>
+          <p:cNvPr id="38" name="Shape 36"/>
+          <p:cNvSpPr/>
+          <p:nvPr/>
+        </p:nvSpPr>
+        <p:spPr>
+          <a:xfrm>
+            <a:off x="4850892" y="4169664"/>
+            <a:ext cx="685800" cy="384048"/>
           </a:xfrm>
           <a:prstGeom prst="rect">
             <a:avLst>
-              <a:gd name="adj" fmla="val 8333"/>
+              <a:gd name="adj" fmla="val 9524"/>
             </a:avLst>
           </a:prstGeom>
           <a:solidFill>
-            <a:srgbClr val="E2E8F0"/>
-          </a:solidFill>
-          <a:ln w="12700">
-            <a:solidFill>
-              <a:srgbClr val="E2E8F0"/>
-            </a:solidFill>
-            <a:prstDash val="solid"/>
-          </a:ln>
-        </p:spPr>
-      </p:sp>
-      <p:sp>
-        <p:nvSpPr>
-          <p:cNvPr id="26" name="Text 24"/>
-          <p:cNvSpPr/>
-          <p:nvPr/>
-        </p:nvSpPr>
-        <p:spPr>
-          <a:xfrm>
-            <a:off x="365760" y="3273552"/>
-            <a:ext cx="1371600" cy="658368"/>
+            <a:srgbClr val="FFFFFF"/>
+          </a:solidFill>
+          <a:ln w="12700">
+            <a:solidFill>
+              <a:srgbClr val="DB2777"/>
+            </a:solidFill>
+            <a:prstDash val="solid"/>
+          </a:ln>
+        </p:spPr>
+      </p:sp>
+      <p:sp>
+        <p:nvSpPr>
+          <p:cNvPr id="39" name="Text 37"/>
+          <p:cNvSpPr/>
+          <p:nvPr/>
+        </p:nvSpPr>
+        <p:spPr>
+          <a:xfrm>
+            <a:off x="4850892" y="4169664"/>
+            <a:ext cx="685800" cy="384048"/>
           </a:xfrm>
           <a:prstGeom prst="rect">
             <a:avLst/>
@@ -10573,84 +10660,57 @@
               <a:buNone/>
             </a:pPr>
             <a:r>
-              <a:rPr lang="en-US" sz="1100" b="1" dirty="0">
-                <a:solidFill>
-                  <a:srgbClr val="475569"/>
+              <a:rPr lang="en-US" sz="900" b="1" dirty="0">
+                <a:solidFill>
+                  <a:srgbClr val="9D174D"/>
                 </a:solidFill>
                 <a:latin typeface="Trebuchet MS" pitchFamily="34" charset="0"/>
                 <a:ea typeface="Trebuchet MS" pitchFamily="34" charset="-122"/>
                 <a:cs typeface="Trebuchet MS" pitchFamily="34" charset="-120"/>
               </a:rPr>
-              <a:t>Syllables</a:t>
-            </a:r>
-            <a:endParaRPr lang="en-US" sz="1100" dirty="0"/>
-          </a:p>
-        </p:txBody>
-      </p:sp>
-      <p:sp>
-        <p:nvSpPr>
-          <p:cNvPr id="27" name="Shape 25"/>
-          <p:cNvSpPr/>
-          <p:nvPr/>
-        </p:nvSpPr>
-        <p:spPr>
-          <a:xfrm>
-            <a:off x="1874520" y="3273552"/>
-            <a:ext cx="6903720" cy="658368"/>
+              <a:t>l</a:t>
+            </a:r>
+            <a:endParaRPr lang="en-US" sz="900" dirty="0"/>
+          </a:p>
+        </p:txBody>
+      </p:sp>
+      <p:sp>
+        <p:nvSpPr>
+          <p:cNvPr id="40" name="Shape 38"/>
+          <p:cNvSpPr/>
+          <p:nvPr/>
+        </p:nvSpPr>
+        <p:spPr>
+          <a:xfrm>
+            <a:off x="6062472" y="4169664"/>
+            <a:ext cx="685800" cy="384048"/>
           </a:xfrm>
           <a:prstGeom prst="rect">
             <a:avLst>
-              <a:gd name="adj" fmla="val 8333"/>
+              <a:gd name="adj" fmla="val 9524"/>
             </a:avLst>
           </a:prstGeom>
           <a:solidFill>
-            <a:srgbClr val="CCFBF1"/>
-          </a:solidFill>
-          <a:ln w="12700">
-            <a:solidFill>
-              <a:srgbClr val="0D9488"/>
-            </a:solidFill>
-            <a:prstDash val="solid"/>
-          </a:ln>
-        </p:spPr>
-      </p:sp>
-      <p:sp>
-        <p:nvSpPr>
-          <p:cNvPr id="28" name="Shape 26"/>
-          <p:cNvSpPr/>
-          <p:nvPr/>
-        </p:nvSpPr>
-        <p:spPr>
-          <a:xfrm>
-            <a:off x="2313432" y="3364992"/>
-            <a:ext cx="1645920" cy="475488"/>
-          </a:xfrm>
-          <a:prstGeom prst="rect">
-            <a:avLst>
-              <a:gd name="adj" fmla="val 9615"/>
-            </a:avLst>
-          </a:prstGeom>
-          <a:solidFill>
             <a:srgbClr val="FFFFFF"/>
           </a:solidFill>
           <a:ln w="12700">
             <a:solidFill>
-              <a:srgbClr val="0D9488"/>
-            </a:solidFill>
-            <a:prstDash val="solid"/>
-          </a:ln>
-        </p:spPr>
-      </p:sp>
-      <p:sp>
-        <p:nvSpPr>
-          <p:cNvPr id="29" name="Text 27"/>
-          <p:cNvSpPr/>
-          <p:nvPr/>
-        </p:nvSpPr>
-        <p:spPr>
-          <a:xfrm>
-            <a:off x="2313432" y="3364992"/>
-            <a:ext cx="1645920" cy="475488"/>
+              <a:srgbClr val="DB2777"/>
+            </a:solidFill>
+            <a:prstDash val="solid"/>
+          </a:ln>
+        </p:spPr>
+      </p:sp>
+      <p:sp>
+        <p:nvSpPr>
+          <p:cNvPr id="41" name="Text 39"/>
+          <p:cNvSpPr/>
+          <p:nvPr/>
+        </p:nvSpPr>
+        <p:spPr>
+          <a:xfrm>
+            <a:off x="6062472" y="4169664"/>
+            <a:ext cx="685800" cy="384048"/>
           </a:xfrm>
           <a:prstGeom prst="rect">
             <a:avLst/>
@@ -10666,73 +10726,34 @@
               <a:buNone/>
             </a:pPr>
             <a:r>
-              <a:rPr lang="en-US" sz="1400" b="1" dirty="0">
-                <a:solidFill>
-                  <a:srgbClr val="0D9488"/>
+              <a:rPr lang="en-US" sz="900" b="1" dirty="0">
+                <a:solidFill>
+                  <a:srgbClr val="9D174D"/>
                 </a:solidFill>
                 <a:latin typeface="Trebuchet MS" pitchFamily="34" charset="0"/>
                 <a:ea typeface="Trebuchet MS" pitchFamily="34" charset="-122"/>
                 <a:cs typeface="Trebuchet MS" pitchFamily="34" charset="-120"/>
               </a:rPr>
-              <a:t>re</a:t>
-            </a:r>
-            <a:endParaRPr lang="en-US" sz="1400" dirty="0"/>
-          </a:p>
-        </p:txBody>
-      </p:sp>
-      <p:sp>
-        <p:nvSpPr>
-          <p:cNvPr id="30" name="Text 28"/>
-          <p:cNvSpPr/>
-          <p:nvPr/>
-        </p:nvSpPr>
-        <p:spPr>
-          <a:xfrm>
-            <a:off x="3959352" y="3364992"/>
-            <a:ext cx="411480" cy="475488"/>
-          </a:xfrm>
-          <a:prstGeom prst="rect">
-            <a:avLst/>
-          </a:prstGeom>
-          <a:noFill/>
-          <a:ln/>
-        </p:spPr>
-        <p:txBody>
-          <a:bodyPr wrap="square" lIns="0" tIns="0" rIns="0" bIns="0" rtlCol="0" anchor="ctr"/>
-          <a:lstStyle/>
-          <a:p>
-            <a:pPr algn="ctr" indent="0" marL="0">
-              <a:buNone/>
-            </a:pPr>
-            <a:r>
-              <a:rPr lang="en-US" sz="1600" b="1" dirty="0">
-                <a:solidFill>
-                  <a:srgbClr val="0D9488"/>
-                </a:solidFill>
-                <a:latin typeface="Trebuchet MS" pitchFamily="34" charset="0"/>
-                <a:ea typeface="Trebuchet MS" pitchFamily="34" charset="-122"/>
-                <a:cs typeface="Trebuchet MS" pitchFamily="34" charset="-120"/>
-              </a:rPr>
-              <a:t>·</a:t>
-            </a:r>
-            <a:endParaRPr lang="en-US" sz="1600" dirty="0"/>
-          </a:p>
-        </p:txBody>
-      </p:sp>
-      <p:sp>
-        <p:nvSpPr>
-          <p:cNvPr id="31" name="Shape 29"/>
-          <p:cNvSpPr/>
-          <p:nvPr/>
-        </p:nvSpPr>
-        <p:spPr>
-          <a:xfrm>
-            <a:off x="4370832" y="3364992"/>
-            <a:ext cx="1645920" cy="475488"/>
+              <a:t>d</a:t>
+            </a:r>
+            <a:endParaRPr lang="en-US" sz="900" dirty="0"/>
+          </a:p>
+        </p:txBody>
+      </p:sp>
+      <p:sp>
+        <p:nvSpPr>
+          <p:cNvPr id="42" name="Shape 40"/>
+          <p:cNvSpPr/>
+          <p:nvPr/>
+        </p:nvSpPr>
+        <p:spPr>
+          <a:xfrm>
+            <a:off x="7274052" y="4169664"/>
+            <a:ext cx="685800" cy="384048"/>
           </a:xfrm>
           <a:prstGeom prst="rect">
             <a:avLst>
-              <a:gd name="adj" fmla="val 9615"/>
+              <a:gd name="adj" fmla="val 9524"/>
             </a:avLst>
           </a:prstGeom>
           <a:solidFill>
@@ -10740,243 +10761,6 @@
           </a:solidFill>
           <a:ln w="12700">
             <a:solidFill>
-              <a:srgbClr val="0D9488"/>
-            </a:solidFill>
-            <a:prstDash val="solid"/>
-          </a:ln>
-        </p:spPr>
-      </p:sp>
-      <p:sp>
-        <p:nvSpPr>
-          <p:cNvPr id="32" name="Text 30"/>
-          <p:cNvSpPr/>
-          <p:nvPr/>
-        </p:nvSpPr>
-        <p:spPr>
-          <a:xfrm>
-            <a:off x="4370832" y="3364992"/>
-            <a:ext cx="1645920" cy="475488"/>
-          </a:xfrm>
-          <a:prstGeom prst="rect">
-            <a:avLst/>
-          </a:prstGeom>
-          <a:noFill/>
-          <a:ln/>
-        </p:spPr>
-        <p:txBody>
-          <a:bodyPr wrap="square" lIns="0" tIns="0" rIns="0" bIns="0" rtlCol="0" anchor="ctr"/>
-          <a:lstStyle/>
-          <a:p>
-            <a:pPr algn="ctr" indent="0" marL="0">
-              <a:buNone/>
-            </a:pPr>
-            <a:r>
-              <a:rPr lang="en-US" sz="1400" b="1" dirty="0">
-                <a:solidFill>
-                  <a:srgbClr val="0D9488"/>
-                </a:solidFill>
-                <a:latin typeface="Trebuchet MS" pitchFamily="34" charset="0"/>
-                <a:ea typeface="Trebuchet MS" pitchFamily="34" charset="-122"/>
-                <a:cs typeface="Trebuchet MS" pitchFamily="34" charset="-120"/>
-              </a:rPr>
-              <a:t>port</a:t>
-            </a:r>
-            <a:endParaRPr lang="en-US" sz="1400" dirty="0"/>
-          </a:p>
-        </p:txBody>
-      </p:sp>
-      <p:sp>
-        <p:nvSpPr>
-          <p:cNvPr id="33" name="Text 31"/>
-          <p:cNvSpPr/>
-          <p:nvPr/>
-        </p:nvSpPr>
-        <p:spPr>
-          <a:xfrm>
-            <a:off x="6016752" y="3364992"/>
-            <a:ext cx="411480" cy="475488"/>
-          </a:xfrm>
-          <a:prstGeom prst="rect">
-            <a:avLst/>
-          </a:prstGeom>
-          <a:noFill/>
-          <a:ln/>
-        </p:spPr>
-        <p:txBody>
-          <a:bodyPr wrap="square" lIns="0" tIns="0" rIns="0" bIns="0" rtlCol="0" anchor="ctr"/>
-          <a:lstStyle/>
-          <a:p>
-            <a:pPr algn="ctr" indent="0" marL="0">
-              <a:buNone/>
-            </a:pPr>
-            <a:r>
-              <a:rPr lang="en-US" sz="1600" b="1" dirty="0">
-                <a:solidFill>
-                  <a:srgbClr val="0D9488"/>
-                </a:solidFill>
-                <a:latin typeface="Trebuchet MS" pitchFamily="34" charset="0"/>
-                <a:ea typeface="Trebuchet MS" pitchFamily="34" charset="-122"/>
-                <a:cs typeface="Trebuchet MS" pitchFamily="34" charset="-120"/>
-              </a:rPr>
-              <a:t>·</a:t>
-            </a:r>
-            <a:endParaRPr lang="en-US" sz="1600" dirty="0"/>
-          </a:p>
-        </p:txBody>
-      </p:sp>
-      <p:sp>
-        <p:nvSpPr>
-          <p:cNvPr id="34" name="Shape 32"/>
-          <p:cNvSpPr/>
-          <p:nvPr/>
-        </p:nvSpPr>
-        <p:spPr>
-          <a:xfrm>
-            <a:off x="6428232" y="3364992"/>
-            <a:ext cx="1645920" cy="475488"/>
-          </a:xfrm>
-          <a:prstGeom prst="rect">
-            <a:avLst>
-              <a:gd name="adj" fmla="val 9615"/>
-            </a:avLst>
-          </a:prstGeom>
-          <a:solidFill>
-            <a:srgbClr val="FFFFFF"/>
-          </a:solidFill>
-          <a:ln w="12700">
-            <a:solidFill>
-              <a:srgbClr val="0D9488"/>
-            </a:solidFill>
-            <a:prstDash val="solid"/>
-          </a:ln>
-        </p:spPr>
-      </p:sp>
-      <p:sp>
-        <p:nvSpPr>
-          <p:cNvPr id="35" name="Text 33"/>
-          <p:cNvSpPr/>
-          <p:nvPr/>
-        </p:nvSpPr>
-        <p:spPr>
-          <a:xfrm>
-            <a:off x="6428232" y="3364992"/>
-            <a:ext cx="1645920" cy="475488"/>
-          </a:xfrm>
-          <a:prstGeom prst="rect">
-            <a:avLst/>
-          </a:prstGeom>
-          <a:noFill/>
-          <a:ln/>
-        </p:spPr>
-        <p:txBody>
-          <a:bodyPr wrap="square" lIns="0" tIns="0" rIns="0" bIns="0" rtlCol="0" anchor="ctr"/>
-          <a:lstStyle/>
-          <a:p>
-            <a:pPr algn="ctr" indent="0" marL="0">
-              <a:buNone/>
-            </a:pPr>
-            <a:r>
-              <a:rPr lang="en-US" sz="1400" b="1" dirty="0">
-                <a:solidFill>
-                  <a:srgbClr val="0D9488"/>
-                </a:solidFill>
-                <a:latin typeface="Trebuchet MS" pitchFamily="34" charset="0"/>
-                <a:ea typeface="Trebuchet MS" pitchFamily="34" charset="-122"/>
-                <a:cs typeface="Trebuchet MS" pitchFamily="34" charset="-120"/>
-              </a:rPr>
-              <a:t>er</a:t>
-            </a:r>
-            <a:endParaRPr lang="en-US" sz="1400" dirty="0"/>
-          </a:p>
-        </p:txBody>
-      </p:sp>
-      <p:sp>
-        <p:nvSpPr>
-          <p:cNvPr id="36" name="Shape 34"/>
-          <p:cNvSpPr/>
-          <p:nvPr/>
-        </p:nvSpPr>
-        <p:spPr>
-          <a:xfrm>
-            <a:off x="365760" y="4096512"/>
-            <a:ext cx="1371600" cy="804672"/>
-          </a:xfrm>
-          <a:prstGeom prst="rect">
-            <a:avLst>
-              <a:gd name="adj" fmla="val 6818"/>
-            </a:avLst>
-          </a:prstGeom>
-          <a:solidFill>
-            <a:srgbClr val="E2E8F0"/>
-          </a:solidFill>
-          <a:ln w="12700">
-            <a:solidFill>
-              <a:srgbClr val="E2E8F0"/>
-            </a:solidFill>
-            <a:prstDash val="solid"/>
-          </a:ln>
-        </p:spPr>
-      </p:sp>
-      <p:sp>
-        <p:nvSpPr>
-          <p:cNvPr id="37" name="Text 35"/>
-          <p:cNvSpPr/>
-          <p:nvPr/>
-        </p:nvSpPr>
-        <p:spPr>
-          <a:xfrm>
-            <a:off x="365760" y="4096512"/>
-            <a:ext cx="1371600" cy="804672"/>
-          </a:xfrm>
-          <a:prstGeom prst="rect">
-            <a:avLst/>
-          </a:prstGeom>
-          <a:noFill/>
-          <a:ln/>
-        </p:spPr>
-        <p:txBody>
-          <a:bodyPr wrap="square" lIns="0" tIns="0" rIns="0" bIns="0" rtlCol="0" anchor="ctr"/>
-          <a:lstStyle/>
-          <a:p>
-            <a:pPr algn="ctr" indent="0" marL="0">
-              <a:buNone/>
-            </a:pPr>
-            <a:r>
-              <a:rPr lang="en-US" sz="1100" b="1" dirty="0">
-                <a:solidFill>
-                  <a:srgbClr val="475569"/>
-                </a:solidFill>
-                <a:latin typeface="Trebuchet MS" pitchFamily="34" charset="0"/>
-                <a:ea typeface="Trebuchet MS" pitchFamily="34" charset="-122"/>
-                <a:cs typeface="Trebuchet MS" pitchFamily="34" charset="-120"/>
-              </a:rPr>
-              <a:t>Phonemes</a:t>
-            </a:r>
-            <a:endParaRPr lang="en-US" sz="1100" dirty="0"/>
-          </a:p>
-        </p:txBody>
-      </p:sp>
-      <p:sp>
-        <p:nvSpPr>
-          <p:cNvPr id="38" name="Shape 36"/>
-          <p:cNvSpPr/>
-          <p:nvPr/>
-        </p:nvSpPr>
-        <p:spPr>
-          <a:xfrm>
-            <a:off x="1874520" y="4096512"/>
-            <a:ext cx="6903720" cy="658368"/>
-          </a:xfrm>
-          <a:prstGeom prst="rect">
-            <a:avLst>
-              <a:gd name="adj" fmla="val 8333"/>
-            </a:avLst>
-          </a:prstGeom>
-          <a:solidFill>
-            <a:srgbClr val="FCE7F3"/>
-          </a:solidFill>
-          <a:ln w="12700">
-            <a:solidFill>
               <a:srgbClr val="DB2777"/>
             </a:solidFill>
             <a:prstDash val="solid"/>
@@ -10985,371 +10769,14 @@
       </p:sp>
       <p:sp>
         <p:nvSpPr>
-          <p:cNvPr id="39" name="Shape 37"/>
-          <p:cNvSpPr/>
-          <p:nvPr/>
-        </p:nvSpPr>
-        <p:spPr>
-          <a:xfrm>
-            <a:off x="2254649" y="4169664"/>
-            <a:ext cx="685800" cy="475488"/>
-          </a:xfrm>
-          <a:prstGeom prst="rect">
-            <a:avLst>
-              <a:gd name="adj" fmla="val 7692"/>
-            </a:avLst>
-          </a:prstGeom>
-          <a:solidFill>
-            <a:srgbClr val="FFFFFF"/>
-          </a:solidFill>
-          <a:ln w="12700">
-            <a:solidFill>
-              <a:srgbClr val="DB2777"/>
-            </a:solidFill>
-            <a:prstDash val="solid"/>
-          </a:ln>
-        </p:spPr>
-      </p:sp>
-      <p:sp>
-        <p:nvSpPr>
-          <p:cNvPr id="40" name="Text 38"/>
-          <p:cNvSpPr/>
-          <p:nvPr/>
-        </p:nvSpPr>
-        <p:spPr>
-          <a:xfrm>
-            <a:off x="2254649" y="4169664"/>
-            <a:ext cx="685800" cy="475488"/>
-          </a:xfrm>
-          <a:prstGeom prst="rect">
-            <a:avLst/>
-          </a:prstGeom>
-          <a:noFill/>
-          <a:ln/>
-        </p:spPr>
-        <p:txBody>
-          <a:bodyPr wrap="square" lIns="0" tIns="0" rIns="0" bIns="0" rtlCol="0" anchor="ctr"/>
-          <a:lstStyle/>
-          <a:p>
-            <a:pPr algn="ctr" indent="0" marL="0">
-              <a:buNone/>
-            </a:pPr>
-            <a:r>
-              <a:rPr lang="en-US" sz="900" b="1" dirty="0">
-                <a:solidFill>
-                  <a:srgbClr val="9D174D"/>
-                </a:solidFill>
-                <a:latin typeface="Trebuchet MS" pitchFamily="34" charset="0"/>
-                <a:ea typeface="Trebuchet MS" pitchFamily="34" charset="-122"/>
-                <a:cs typeface="Trebuchet MS" pitchFamily="34" charset="-120"/>
-              </a:rPr>
-              <a:t>r</a:t>
-            </a:r>
-            <a:endParaRPr lang="en-US" sz="900" dirty="0"/>
-          </a:p>
-        </p:txBody>
-      </p:sp>
-      <p:sp>
-        <p:nvSpPr>
-          <p:cNvPr id="41" name="Shape 39"/>
-          <p:cNvSpPr/>
-          <p:nvPr/>
-        </p:nvSpPr>
-        <p:spPr>
-          <a:xfrm>
-            <a:off x="3293146" y="4169664"/>
-            <a:ext cx="685800" cy="475488"/>
-          </a:xfrm>
-          <a:prstGeom prst="rect">
-            <a:avLst>
-              <a:gd name="adj" fmla="val 7692"/>
-            </a:avLst>
-          </a:prstGeom>
-          <a:solidFill>
-            <a:srgbClr val="FFFFFF"/>
-          </a:solidFill>
-          <a:ln w="12700">
-            <a:solidFill>
-              <a:srgbClr val="DB2777"/>
-            </a:solidFill>
-            <a:prstDash val="solid"/>
-          </a:ln>
-        </p:spPr>
-      </p:sp>
-      <p:sp>
-        <p:nvSpPr>
-          <p:cNvPr id="42" name="Text 40"/>
-          <p:cNvSpPr/>
-          <p:nvPr/>
-        </p:nvSpPr>
-        <p:spPr>
-          <a:xfrm>
-            <a:off x="3293146" y="4169664"/>
-            <a:ext cx="685800" cy="475488"/>
-          </a:xfrm>
-          <a:prstGeom prst="rect">
-            <a:avLst/>
-          </a:prstGeom>
-          <a:noFill/>
-          <a:ln/>
-        </p:spPr>
-        <p:txBody>
-          <a:bodyPr wrap="square" lIns="0" tIns="0" rIns="0" bIns="0" rtlCol="0" anchor="ctr"/>
-          <a:lstStyle/>
-          <a:p>
-            <a:pPr algn="ctr" indent="0" marL="0">
-              <a:buNone/>
-            </a:pPr>
-            <a:r>
-              <a:rPr lang="en-US" sz="900" b="1" dirty="0">
-                <a:solidFill>
-                  <a:srgbClr val="9D174D"/>
-                </a:solidFill>
-                <a:latin typeface="Trebuchet MS" pitchFamily="34" charset="0"/>
-                <a:ea typeface="Trebuchet MS" pitchFamily="34" charset="-122"/>
-                <a:cs typeface="Trebuchet MS" pitchFamily="34" charset="-120"/>
-              </a:rPr>
-              <a:t>e</a:t>
-            </a:r>
-            <a:endParaRPr lang="en-US" sz="900" dirty="0"/>
-          </a:p>
-        </p:txBody>
-      </p:sp>
-      <p:sp>
-        <p:nvSpPr>
-          <p:cNvPr id="43" name="Shape 41"/>
-          <p:cNvSpPr/>
-          <p:nvPr/>
-        </p:nvSpPr>
-        <p:spPr>
-          <a:xfrm>
-            <a:off x="4331643" y="4169664"/>
-            <a:ext cx="685800" cy="475488"/>
-          </a:xfrm>
-          <a:prstGeom prst="rect">
-            <a:avLst>
-              <a:gd name="adj" fmla="val 7692"/>
-            </a:avLst>
-          </a:prstGeom>
-          <a:solidFill>
-            <a:srgbClr val="FFFFFF"/>
-          </a:solidFill>
-          <a:ln w="12700">
-            <a:solidFill>
-              <a:srgbClr val="DB2777"/>
-            </a:solidFill>
-            <a:prstDash val="solid"/>
-          </a:ln>
-        </p:spPr>
-      </p:sp>
-      <p:sp>
-        <p:nvSpPr>
-          <p:cNvPr id="44" name="Text 42"/>
-          <p:cNvSpPr/>
-          <p:nvPr/>
-        </p:nvSpPr>
-        <p:spPr>
-          <a:xfrm>
-            <a:off x="4331643" y="4169664"/>
-            <a:ext cx="685800" cy="475488"/>
-          </a:xfrm>
-          <a:prstGeom prst="rect">
-            <a:avLst/>
-          </a:prstGeom>
-          <a:noFill/>
-          <a:ln/>
-        </p:spPr>
-        <p:txBody>
-          <a:bodyPr wrap="square" lIns="0" tIns="0" rIns="0" bIns="0" rtlCol="0" anchor="ctr"/>
-          <a:lstStyle/>
-          <a:p>
-            <a:pPr algn="ctr" indent="0" marL="0">
-              <a:buNone/>
-            </a:pPr>
-            <a:r>
-              <a:rPr lang="en-US" sz="900" b="1" dirty="0">
-                <a:solidFill>
-                  <a:srgbClr val="9D174D"/>
-                </a:solidFill>
-                <a:latin typeface="Trebuchet MS" pitchFamily="34" charset="0"/>
-                <a:ea typeface="Trebuchet MS" pitchFamily="34" charset="-122"/>
-                <a:cs typeface="Trebuchet MS" pitchFamily="34" charset="-120"/>
-              </a:rPr>
-              <a:t>p</a:t>
-            </a:r>
-            <a:endParaRPr lang="en-US" sz="900" dirty="0"/>
-          </a:p>
-        </p:txBody>
-      </p:sp>
-      <p:sp>
-        <p:nvSpPr>
-          <p:cNvPr id="45" name="Shape 43"/>
-          <p:cNvSpPr/>
-          <p:nvPr/>
-        </p:nvSpPr>
-        <p:spPr>
-          <a:xfrm>
-            <a:off x="5370141" y="4169664"/>
-            <a:ext cx="685800" cy="475488"/>
-          </a:xfrm>
-          <a:prstGeom prst="rect">
-            <a:avLst>
-              <a:gd name="adj" fmla="val 7692"/>
-            </a:avLst>
-          </a:prstGeom>
-          <a:solidFill>
-            <a:srgbClr val="FFFFFF"/>
-          </a:solidFill>
-          <a:ln w="12700">
-            <a:solidFill>
-              <a:srgbClr val="DB2777"/>
-            </a:solidFill>
-            <a:prstDash val="solid"/>
-          </a:ln>
-        </p:spPr>
-      </p:sp>
-      <p:sp>
-        <p:nvSpPr>
-          <p:cNvPr id="46" name="Text 44"/>
-          <p:cNvSpPr/>
-          <p:nvPr/>
-        </p:nvSpPr>
-        <p:spPr>
-          <a:xfrm>
-            <a:off x="5370141" y="4169664"/>
-            <a:ext cx="685800" cy="475488"/>
-          </a:xfrm>
-          <a:prstGeom prst="rect">
-            <a:avLst/>
-          </a:prstGeom>
-          <a:noFill/>
-          <a:ln/>
-        </p:spPr>
-        <p:txBody>
-          <a:bodyPr wrap="square" lIns="0" tIns="0" rIns="0" bIns="0" rtlCol="0" anchor="ctr"/>
-          <a:lstStyle/>
-          <a:p>
-            <a:pPr algn="ctr" indent="0" marL="0">
-              <a:buNone/>
-            </a:pPr>
-            <a:r>
-              <a:rPr lang="en-US" sz="900" b="1" dirty="0">
-                <a:solidFill>
-                  <a:srgbClr val="9D174D"/>
-                </a:solidFill>
-                <a:latin typeface="Trebuchet MS" pitchFamily="34" charset="0"/>
-                <a:ea typeface="Trebuchet MS" pitchFamily="34" charset="-122"/>
-                <a:cs typeface="Trebuchet MS" pitchFamily="34" charset="-120"/>
-              </a:rPr>
-              <a:t>or</a:t>
-            </a:r>
-            <a:endParaRPr lang="en-US" sz="900" dirty="0"/>
-          </a:p>
-        </p:txBody>
-      </p:sp>
-      <p:sp>
-        <p:nvSpPr>
-          <p:cNvPr id="47" name="Shape 45"/>
-          <p:cNvSpPr/>
-          <p:nvPr/>
-        </p:nvSpPr>
-        <p:spPr>
-          <a:xfrm>
-            <a:off x="6408638" y="4169664"/>
-            <a:ext cx="685800" cy="475488"/>
-          </a:xfrm>
-          <a:prstGeom prst="rect">
-            <a:avLst>
-              <a:gd name="adj" fmla="val 7692"/>
-            </a:avLst>
-          </a:prstGeom>
-          <a:solidFill>
-            <a:srgbClr val="FFFFFF"/>
-          </a:solidFill>
-          <a:ln w="12700">
-            <a:solidFill>
-              <a:srgbClr val="DB2777"/>
-            </a:solidFill>
-            <a:prstDash val="solid"/>
-          </a:ln>
-        </p:spPr>
-      </p:sp>
-      <p:sp>
-        <p:nvSpPr>
-          <p:cNvPr id="48" name="Text 46"/>
-          <p:cNvSpPr/>
-          <p:nvPr/>
-        </p:nvSpPr>
-        <p:spPr>
-          <a:xfrm>
-            <a:off x="6408638" y="4169664"/>
-            <a:ext cx="685800" cy="475488"/>
-          </a:xfrm>
-          <a:prstGeom prst="rect">
-            <a:avLst/>
-          </a:prstGeom>
-          <a:noFill/>
-          <a:ln/>
-        </p:spPr>
-        <p:txBody>
-          <a:bodyPr wrap="square" lIns="0" tIns="0" rIns="0" bIns="0" rtlCol="0" anchor="ctr"/>
-          <a:lstStyle/>
-          <a:p>
-            <a:pPr algn="ctr" indent="0" marL="0">
-              <a:buNone/>
-            </a:pPr>
-            <a:r>
-              <a:rPr lang="en-US" sz="900" b="1" dirty="0">
-                <a:solidFill>
-                  <a:srgbClr val="9D174D"/>
-                </a:solidFill>
-                <a:latin typeface="Trebuchet MS" pitchFamily="34" charset="0"/>
-                <a:ea typeface="Trebuchet MS" pitchFamily="34" charset="-122"/>
-                <a:cs typeface="Trebuchet MS" pitchFamily="34" charset="-120"/>
-              </a:rPr>
-              <a:t>t</a:t>
-            </a:r>
-            <a:endParaRPr lang="en-US" sz="900" dirty="0"/>
-          </a:p>
-        </p:txBody>
-      </p:sp>
-      <p:sp>
-        <p:nvSpPr>
-          <p:cNvPr id="49" name="Shape 47"/>
-          <p:cNvSpPr/>
-          <p:nvPr/>
-        </p:nvSpPr>
-        <p:spPr>
-          <a:xfrm>
-            <a:off x="7447135" y="4169664"/>
-            <a:ext cx="685800" cy="475488"/>
-          </a:xfrm>
-          <a:prstGeom prst="rect">
-            <a:avLst>
-              <a:gd name="adj" fmla="val 7692"/>
-            </a:avLst>
-          </a:prstGeom>
-          <a:solidFill>
-            <a:srgbClr val="FFFFFF"/>
-          </a:solidFill>
-          <a:ln w="12700">
-            <a:solidFill>
-              <a:srgbClr val="DB2777"/>
-            </a:solidFill>
-            <a:prstDash val="solid"/>
-          </a:ln>
-        </p:spPr>
-      </p:sp>
-      <p:sp>
-        <p:nvSpPr>
-          <p:cNvPr id="50" name="Text 48"/>
-          <p:cNvSpPr/>
-          <p:nvPr/>
-        </p:nvSpPr>
-        <p:spPr>
-          <a:xfrm>
-            <a:off x="7447135" y="4169664"/>
-            <a:ext cx="685800" cy="475488"/>
+          <p:cNvPr id="43" name="Text 41"/>
+          <p:cNvSpPr/>
+          <p:nvPr/>
+        </p:nvSpPr>
+        <p:spPr>
+          <a:xfrm>
+            <a:off x="7274052" y="4169664"/>
+            <a:ext cx="685800" cy="384048"/>
           </a:xfrm>
           <a:prstGeom prst="rect">
             <a:avLst/>
@@ -11804,7 +11231,7 @@
                 <a:ea typeface="Trebuchet MS" pitchFamily="34" charset="-122"/>
                 <a:cs typeface="Trebuchet MS" pitchFamily="34" charset="-120"/>
               </a:rPr>
-              <a:t>farmer</a:t>
+              <a:t>harder</a:t>
             </a:r>
             <a:endParaRPr lang="en-US" sz="2800" dirty="0"/>
           </a:p>
@@ -12631,7 +12058,7 @@
                 <a:ea typeface="Trebuchet MS" pitchFamily="34" charset="-122"/>
                 <a:cs typeface="Trebuchet MS" pitchFamily="34" charset="-120"/>
               </a:rPr>
-              <a:t>farmer</a:t>
+              <a:t>harder</a:t>
             </a:r>
             <a:endParaRPr lang="en-US" sz="2800" dirty="0"/>
           </a:p>
@@ -12770,7 +12197,7 @@
                 <a:ea typeface="Trebuchet MS" pitchFamily="34" charset="-122"/>
                 <a:cs typeface="Trebuchet MS" pitchFamily="34" charset="-120"/>
               </a:rPr>
-              <a:t>farm</a:t>
+              <a:t>hard</a:t>
             </a:r>
             <a:endParaRPr lang="en-US" sz="1300" dirty="0"/>
           </a:p>
@@ -12809,7 +12236,7 @@
                 <a:ea typeface="Calibri" pitchFamily="34" charset="-122"/>
                 <a:cs typeface="Calibri" pitchFamily="34" charset="-120"/>
               </a:rPr>
-              <a:t>cultivate land</a:t>
+              <a:t>with great effort</a:t>
             </a:r>
             <a:endParaRPr lang="en-US" sz="850" dirty="0"/>
           </a:p>
@@ -12921,7 +12348,7 @@
                 <a:ea typeface="Calibri" pitchFamily="34" charset="-122"/>
                 <a:cs typeface="Calibri" pitchFamily="34" charset="-120"/>
               </a:rPr>
-              <a:t>one who does</a:t>
+              <a:t>more</a:t>
             </a:r>
             <a:endParaRPr lang="en-US" sz="850" dirty="0"/>
           </a:p>
@@ -13616,7 +13043,7 @@
                 <a:ea typeface="Trebuchet MS" pitchFamily="34" charset="-122"/>
                 <a:cs typeface="Trebuchet MS" pitchFamily="34" charset="-120"/>
               </a:rPr>
-              <a:t>farmer</a:t>
+              <a:t>harder</a:t>
             </a:r>
             <a:endParaRPr lang="en-US" sz="2800" dirty="0"/>
           </a:p>
@@ -13755,7 +13182,7 @@
                 <a:ea typeface="Trebuchet MS" pitchFamily="34" charset="-122"/>
                 <a:cs typeface="Trebuchet MS" pitchFamily="34" charset="-120"/>
               </a:rPr>
-              <a:t>farm</a:t>
+              <a:t>hard</a:t>
             </a:r>
             <a:endParaRPr lang="en-US" sz="1300" dirty="0"/>
           </a:p>
@@ -13794,7 +13221,7 @@
                 <a:ea typeface="Calibri" pitchFamily="34" charset="-122"/>
                 <a:cs typeface="Calibri" pitchFamily="34" charset="-120"/>
               </a:rPr>
-              <a:t>cultivate land</a:t>
+              <a:t>with great effort</a:t>
             </a:r>
             <a:endParaRPr lang="en-US" sz="850" dirty="0"/>
           </a:p>
@@ -13906,7 +13333,7 @@
                 <a:ea typeface="Calibri" pitchFamily="34" charset="-122"/>
                 <a:cs typeface="Calibri" pitchFamily="34" charset="-120"/>
               </a:rPr>
-              <a:t>one who does</a:t>
+              <a:t>more</a:t>
             </a:r>
             <a:endParaRPr lang="en-US" sz="850" dirty="0"/>
           </a:p>
@@ -14065,7 +13492,7 @@
                 <a:ea typeface="Trebuchet MS" pitchFamily="34" charset="-122"/>
                 <a:cs typeface="Trebuchet MS" pitchFamily="34" charset="-120"/>
               </a:rPr>
-              <a:t>farm</a:t>
+              <a:t>har</a:t>
             </a:r>
             <a:endParaRPr lang="en-US" sz="1400" dirty="0"/>
           </a:p>
@@ -14170,7 +13597,7 @@
                 <a:ea typeface="Trebuchet MS" pitchFamily="34" charset="-122"/>
                 <a:cs typeface="Trebuchet MS" pitchFamily="34" charset="-120"/>
               </a:rPr>
-              <a:t>er</a:t>
+              <a:t>der</a:t>
             </a:r>
             <a:endParaRPr lang="en-US" sz="1400" dirty="0"/>
           </a:p>
@@ -14998,7 +14425,7 @@
                 <a:ea typeface="Trebuchet MS" pitchFamily="34" charset="-122"/>
                 <a:cs typeface="Trebuchet MS" pitchFamily="34" charset="-120"/>
               </a:rPr>
-              <a:t>farmer</a:t>
+              <a:t>harder</a:t>
             </a:r>
             <a:endParaRPr lang="en-US" sz="2800" dirty="0"/>
           </a:p>
@@ -15137,7 +14564,7 @@
                 <a:ea typeface="Trebuchet MS" pitchFamily="34" charset="-122"/>
                 <a:cs typeface="Trebuchet MS" pitchFamily="34" charset="-120"/>
               </a:rPr>
-              <a:t>farm</a:t>
+              <a:t>hard</a:t>
             </a:r>
             <a:endParaRPr lang="en-US" sz="1300" dirty="0"/>
           </a:p>
@@ -15176,7 +14603,7 @@
                 <a:ea typeface="Calibri" pitchFamily="34" charset="-122"/>
                 <a:cs typeface="Calibri" pitchFamily="34" charset="-120"/>
               </a:rPr>
-              <a:t>cultivate land</a:t>
+              <a:t>with great effort</a:t>
             </a:r>
             <a:endParaRPr lang="en-US" sz="850" dirty="0"/>
           </a:p>
@@ -15288,7 +14715,7 @@
                 <a:ea typeface="Calibri" pitchFamily="34" charset="-122"/>
                 <a:cs typeface="Calibri" pitchFamily="34" charset="-120"/>
               </a:rPr>
-              <a:t>one who does</a:t>
+              <a:t>more</a:t>
             </a:r>
             <a:endParaRPr lang="en-US" sz="850" dirty="0"/>
           </a:p>
@@ -15447,7 +14874,7 @@
                 <a:ea typeface="Trebuchet MS" pitchFamily="34" charset="-122"/>
                 <a:cs typeface="Trebuchet MS" pitchFamily="34" charset="-120"/>
               </a:rPr>
-              <a:t>farm</a:t>
+              <a:t>har</a:t>
             </a:r>
             <a:endParaRPr lang="en-US" sz="1400" dirty="0"/>
           </a:p>
@@ -15552,7 +14979,7 @@
                 <a:ea typeface="Trebuchet MS" pitchFamily="34" charset="-122"/>
                 <a:cs typeface="Trebuchet MS" pitchFamily="34" charset="-120"/>
               </a:rPr>
-              <a:t>er</a:t>
+              <a:t>der</a:t>
             </a:r>
             <a:endParaRPr lang="en-US" sz="1400" dirty="0"/>
           </a:p>
@@ -15711,7 +15138,7 @@
                 <a:ea typeface="Trebuchet MS" pitchFamily="34" charset="-122"/>
                 <a:cs typeface="Trebuchet MS" pitchFamily="34" charset="-120"/>
               </a:rPr>
-              <a:t>f</a:t>
+              <a:t>h</a:t>
             </a:r>
             <a:endParaRPr lang="en-US" sz="900" dirty="0"/>
           </a:p>
@@ -15843,7 +15270,7 @@
                 <a:ea typeface="Trebuchet MS" pitchFamily="34" charset="-122"/>
                 <a:cs typeface="Trebuchet MS" pitchFamily="34" charset="-120"/>
               </a:rPr>
-              <a:t>m</a:t>
+              <a:t>d</a:t>
             </a:r>
             <a:endParaRPr lang="en-US" sz="900" dirty="0"/>
           </a:p>
@@ -17235,7 +16662,7 @@
                 <a:ea typeface="Calibri" pitchFamily="34" charset="-122"/>
                 <a:cs typeface="Calibri" pitchFamily="34" charset="-120"/>
               </a:rPr>
-              <a:t>The discover was made by a careful </a:t>
+              <a:t>The young </a:t>
             </a:r>
             <a:pPr algn="l" indent="0" marL="0">
               <a:buNone/>
@@ -17252,7 +16679,7 @@
                 <a:ea typeface="Calibri" pitchFamily="34" charset="-122"/>
                 <a:cs typeface="Calibri" pitchFamily="34" charset="-120"/>
               </a:rPr>
-              <a:t>researcher</a:t>
+              <a:t>reporter</a:t>
             </a:r>
             <a:pPr algn="l" indent="0" marL="0">
               <a:buNone/>
@@ -17266,7 +16693,7 @@
                 <a:ea typeface="Calibri" pitchFamily="34" charset="-122"/>
                 <a:cs typeface="Calibri" pitchFamily="34" charset="-120"/>
               </a:rPr>
-              <a:t>, who was also a talented </a:t>
+              <a:t> asked the </a:t>
             </a:r>
             <a:pPr algn="l" indent="0" marL="0">
               <a:buNone/>
@@ -17283,7 +16710,7 @@
                 <a:ea typeface="Calibri" pitchFamily="34" charset="-122"/>
                 <a:cs typeface="Calibri" pitchFamily="34" charset="-120"/>
               </a:rPr>
-              <a:t>teacher</a:t>
+              <a:t>farmer</a:t>
             </a:r>
             <a:pPr algn="l" indent="0" marL="0">
               <a:buNone/>
@@ -17297,7 +16724,38 @@
                 <a:ea typeface="Calibri" pitchFamily="34" charset="-122"/>
                 <a:cs typeface="Calibri" pitchFamily="34" charset="-120"/>
               </a:rPr>
-              <a:t>.</a:t>
+              <a:t> and the </a:t>
+            </a:r>
+            <a:pPr algn="l" indent="0" marL="0">
+              <a:buNone/>
+            </a:pPr>
+            <a:r>
+              <a:rPr lang="en-US" sz="1800" b="1" dirty="0">
+                <a:solidFill>
+                  <a:srgbClr val="0D9488"/>
+                </a:solidFill>
+                <a:highlight>
+                  <a:srgbClr val="CCFBF1"/>
+                </a:highlight>
+                <a:latin typeface="Calibri" pitchFamily="34" charset="0"/>
+                <a:ea typeface="Calibri" pitchFamily="34" charset="-122"/>
+                <a:cs typeface="Calibri" pitchFamily="34" charset="-120"/>
+              </a:rPr>
+              <a:t>teacher</a:t>
+            </a:r>
+            <a:pPr algn="l" indent="0" marL="0">
+              <a:buNone/>
+            </a:pPr>
+            <a:r>
+              <a:rPr lang="en-US" sz="1800" dirty="0">
+                <a:solidFill>
+                  <a:srgbClr val="0F172A"/>
+                </a:solidFill>
+                <a:latin typeface="Calibri" pitchFamily="34" charset="0"/>
+                <a:ea typeface="Calibri" pitchFamily="34" charset="-122"/>
+                <a:cs typeface="Calibri" pitchFamily="34" charset="-120"/>
+              </a:rPr>
+              <a:t> about the flooding near their properties.</a:t>
             </a:r>
             <a:endParaRPr lang="en-US" sz="1800" dirty="0"/>
           </a:p>
@@ -17452,7 +16910,7 @@
                 <a:ea typeface="Trebuchet MS" pitchFamily="34" charset="-122"/>
                 <a:cs typeface="Trebuchet MS" pitchFamily="34" charset="-120"/>
               </a:rPr>
-              <a:t>discoverer</a:t>
+              <a:t>reporter</a:t>
             </a:r>
             <a:endParaRPr lang="en-US" sz="1400" dirty="0"/>
           </a:p>
@@ -17580,7 +17038,7 @@
                 <a:ea typeface="Trebuchet MS" pitchFamily="34" charset="-122"/>
                 <a:cs typeface="Trebuchet MS" pitchFamily="34" charset="-120"/>
               </a:rPr>
-              <a:t>researcher</a:t>
+              <a:t>farmer</a:t>
             </a:r>
             <a:endParaRPr lang="en-US" sz="1400" dirty="0"/>
           </a:p>
@@ -18178,7 +17636,7 @@
                 <a:ea typeface="Trebuchet MS" pitchFamily="34" charset="-122"/>
                 <a:cs typeface="Trebuchet MS" pitchFamily="34" charset="-120"/>
               </a:rPr>
-              <a:t>discoverer</a:t>
+              <a:t>reporter</a:t>
             </a:r>
             <a:endParaRPr lang="en-US" sz="2800" dirty="0"/>
           </a:p>
@@ -19005,7 +18463,7 @@
                 <a:ea typeface="Trebuchet MS" pitchFamily="34" charset="-122"/>
                 <a:cs typeface="Trebuchet MS" pitchFamily="34" charset="-120"/>
               </a:rPr>
-              <a:t>discoverer</a:t>
+              <a:t>reporter</a:t>
             </a:r>
             <a:endParaRPr lang="en-US" sz="2800" dirty="0"/>
           </a:p>
@@ -19144,7 +18602,7 @@
                 <a:ea typeface="Trebuchet MS" pitchFamily="34" charset="-122"/>
                 <a:cs typeface="Trebuchet MS" pitchFamily="34" charset="-120"/>
               </a:rPr>
-              <a:t>dis</a:t>
+              <a:t>re</a:t>
             </a:r>
             <a:endParaRPr lang="en-US" sz="1300" dirty="0"/>
           </a:p>
@@ -19183,7 +18641,7 @@
                 <a:ea typeface="Calibri" pitchFamily="34" charset="-122"/>
                 <a:cs typeface="Calibri" pitchFamily="34" charset="-120"/>
               </a:rPr>
-              <a:t>apart; away</a:t>
+              <a:t>back</a:t>
             </a:r>
             <a:endParaRPr lang="en-US" sz="850" dirty="0"/>
           </a:p>
@@ -19256,7 +18714,7 @@
                 <a:ea typeface="Trebuchet MS" pitchFamily="34" charset="-122"/>
                 <a:cs typeface="Trebuchet MS" pitchFamily="34" charset="-120"/>
               </a:rPr>
-              <a:t>cover</a:t>
+              <a:t>port</a:t>
             </a:r>
             <a:endParaRPr lang="en-US" sz="1300" dirty="0"/>
           </a:p>
@@ -19295,7 +18753,7 @@
                 <a:ea typeface="Calibri" pitchFamily="34" charset="-122"/>
                 <a:cs typeface="Calibri" pitchFamily="34" charset="-120"/>
               </a:rPr>
-              <a:t>to cover or find</a:t>
+              <a:t>to carry</a:t>
             </a:r>
             <a:endParaRPr lang="en-US" sz="850" dirty="0"/>
           </a:p>
@@ -20102,7 +19560,7 @@
                 <a:ea typeface="Trebuchet MS" pitchFamily="34" charset="-122"/>
                 <a:cs typeface="Trebuchet MS" pitchFamily="34" charset="-120"/>
               </a:rPr>
-              <a:t>discoverer</a:t>
+              <a:t>reporter</a:t>
             </a:r>
             <a:endParaRPr lang="en-US" sz="2800" dirty="0"/>
           </a:p>
@@ -20241,7 +19699,7 @@
                 <a:ea typeface="Trebuchet MS" pitchFamily="34" charset="-122"/>
                 <a:cs typeface="Trebuchet MS" pitchFamily="34" charset="-120"/>
               </a:rPr>
-              <a:t>dis</a:t>
+              <a:t>re</a:t>
             </a:r>
             <a:endParaRPr lang="en-US" sz="1300" dirty="0"/>
           </a:p>
@@ -20280,7 +19738,7 @@
                 <a:ea typeface="Calibri" pitchFamily="34" charset="-122"/>
                 <a:cs typeface="Calibri" pitchFamily="34" charset="-120"/>
               </a:rPr>
-              <a:t>apart; away</a:t>
+              <a:t>back</a:t>
             </a:r>
             <a:endParaRPr lang="en-US" sz="850" dirty="0"/>
           </a:p>
@@ -20353,7 +19811,7 @@
                 <a:ea typeface="Trebuchet MS" pitchFamily="34" charset="-122"/>
                 <a:cs typeface="Trebuchet MS" pitchFamily="34" charset="-120"/>
               </a:rPr>
-              <a:t>cover</a:t>
+              <a:t>port</a:t>
             </a:r>
             <a:endParaRPr lang="en-US" sz="1300" dirty="0"/>
           </a:p>
@@ -20392,7 +19850,7 @@
                 <a:ea typeface="Calibri" pitchFamily="34" charset="-122"/>
                 <a:cs typeface="Calibri" pitchFamily="34" charset="-120"/>
               </a:rPr>
-              <a:t>to cover or find</a:t>
+              <a:t>to carry</a:t>
             </a:r>
             <a:endParaRPr lang="en-US" sz="850" dirty="0"/>
           </a:p>
@@ -20611,8 +20069,8 @@
         </p:nvSpPr>
         <p:spPr>
           <a:xfrm>
-            <a:off x="1975104" y="3364992"/>
-            <a:ext cx="1554480" cy="475488"/>
+            <a:off x="2313432" y="3364992"/>
+            <a:ext cx="1645920" cy="475488"/>
           </a:xfrm>
           <a:prstGeom prst="rect">
             <a:avLst>
@@ -20638,8 +20096,8 @@
         </p:nvSpPr>
         <p:spPr>
           <a:xfrm>
-            <a:off x="1975104" y="3364992"/>
-            <a:ext cx="1554480" cy="475488"/>
+            <a:off x="2313432" y="3364992"/>
+            <a:ext cx="1645920" cy="475488"/>
           </a:xfrm>
           <a:prstGeom prst="rect">
             <a:avLst/>
@@ -20663,7 +20121,7 @@
                 <a:ea typeface="Trebuchet MS" pitchFamily="34" charset="-122"/>
                 <a:cs typeface="Trebuchet MS" pitchFamily="34" charset="-120"/>
               </a:rPr>
-              <a:t>dis</a:t>
+              <a:t>re</a:t>
             </a:r>
             <a:endParaRPr lang="en-US" sz="1400" dirty="0"/>
           </a:p>
@@ -20677,8 +20135,8 @@
         </p:nvSpPr>
         <p:spPr>
           <a:xfrm>
-            <a:off x="3529584" y="3364992"/>
-            <a:ext cx="73152" cy="475488"/>
+            <a:off x="3959352" y="3364992"/>
+            <a:ext cx="411480" cy="475488"/>
           </a:xfrm>
           <a:prstGeom prst="rect">
             <a:avLst/>
@@ -20716,8 +20174,8 @@
         </p:nvSpPr>
         <p:spPr>
           <a:xfrm>
-            <a:off x="3602736" y="3364992"/>
-            <a:ext cx="1554480" cy="475488"/>
+            <a:off x="4370832" y="3364992"/>
+            <a:ext cx="1645920" cy="475488"/>
           </a:xfrm>
           <a:prstGeom prst="rect">
             <a:avLst>
@@ -20743,8 +20201,8 @@
         </p:nvSpPr>
         <p:spPr>
           <a:xfrm>
-            <a:off x="3602736" y="3364992"/>
-            <a:ext cx="1554480" cy="475488"/>
+            <a:off x="4370832" y="3364992"/>
+            <a:ext cx="1645920" cy="475488"/>
           </a:xfrm>
           <a:prstGeom prst="rect">
             <a:avLst/>
@@ -20768,7 +20226,7 @@
                 <a:ea typeface="Trebuchet MS" pitchFamily="34" charset="-122"/>
                 <a:cs typeface="Trebuchet MS" pitchFamily="34" charset="-120"/>
               </a:rPr>
-              <a:t>cov</a:t>
+              <a:t>por</a:t>
             </a:r>
             <a:endParaRPr lang="en-US" sz="1400" dirty="0"/>
           </a:p>
@@ -20782,8 +20240,8 @@
         </p:nvSpPr>
         <p:spPr>
           <a:xfrm>
-            <a:off x="5157216" y="3364992"/>
-            <a:ext cx="73152" cy="475488"/>
+            <a:off x="6016752" y="3364992"/>
+            <a:ext cx="411480" cy="475488"/>
           </a:xfrm>
           <a:prstGeom prst="rect">
             <a:avLst/>
@@ -20821,8 +20279,8 @@
         </p:nvSpPr>
         <p:spPr>
           <a:xfrm>
-            <a:off x="5230368" y="3364992"/>
-            <a:ext cx="1554480" cy="475488"/>
+            <a:off x="6428232" y="3364992"/>
+            <a:ext cx="1645920" cy="475488"/>
           </a:xfrm>
           <a:prstGeom prst="rect">
             <a:avLst>
@@ -20848,8 +20306,8 @@
         </p:nvSpPr>
         <p:spPr>
           <a:xfrm>
-            <a:off x="5230368" y="3364992"/>
-            <a:ext cx="1554480" cy="475488"/>
+            <a:off x="6428232" y="3364992"/>
+            <a:ext cx="1645920" cy="475488"/>
           </a:xfrm>
           <a:prstGeom prst="rect">
             <a:avLst/>
@@ -20873,7 +20331,7 @@
                 <a:ea typeface="Trebuchet MS" pitchFamily="34" charset="-122"/>
                 <a:cs typeface="Trebuchet MS" pitchFamily="34" charset="-120"/>
               </a:rPr>
-              <a:t>er</a:t>
+              <a:t>ter</a:t>
             </a:r>
             <a:endParaRPr lang="en-US" sz="1400" dirty="0"/>
           </a:p>
@@ -20881,14 +20339,41 @@
       </p:sp>
       <p:sp>
         <p:nvSpPr>
-          <p:cNvPr id="36" name="Text 34"/>
-          <p:cNvSpPr/>
-          <p:nvPr/>
-        </p:nvSpPr>
-        <p:spPr>
-          <a:xfrm>
-            <a:off x="6784848" y="3364992"/>
-            <a:ext cx="73152" cy="475488"/>
+          <p:cNvPr id="36" name="Shape 34"/>
+          <p:cNvSpPr/>
+          <p:nvPr/>
+        </p:nvSpPr>
+        <p:spPr>
+          <a:xfrm>
+            <a:off x="365760" y="4096512"/>
+            <a:ext cx="1371600" cy="804672"/>
+          </a:xfrm>
+          <a:prstGeom prst="rect">
+            <a:avLst>
+              <a:gd name="adj" fmla="val 6818"/>
+            </a:avLst>
+          </a:prstGeom>
+          <a:solidFill>
+            <a:srgbClr val="E2E8F0"/>
+          </a:solidFill>
+          <a:ln w="12700">
+            <a:solidFill>
+              <a:srgbClr val="E2E8F0"/>
+            </a:solidFill>
+            <a:prstDash val="solid"/>
+          </a:ln>
+        </p:spPr>
+      </p:sp>
+      <p:sp>
+        <p:nvSpPr>
+          <p:cNvPr id="37" name="Text 35"/>
+          <p:cNvSpPr/>
+          <p:nvPr/>
+        </p:nvSpPr>
+        <p:spPr>
+          <a:xfrm>
+            <a:off x="365760" y="4096512"/>
+            <a:ext cx="1371600" cy="804672"/>
           </a:xfrm>
           <a:prstGeom prst="rect">
             <a:avLst/>
@@ -20904,96 +20389,30 @@
               <a:buNone/>
             </a:pPr>
             <a:r>
-              <a:rPr lang="en-US" sz="1600" b="1" dirty="0">
-                <a:solidFill>
-                  <a:srgbClr val="0D9488"/>
+              <a:rPr lang="en-US" sz="1100" b="1" dirty="0">
+                <a:solidFill>
+                  <a:srgbClr val="475569"/>
                 </a:solidFill>
                 <a:latin typeface="Trebuchet MS" pitchFamily="34" charset="0"/>
                 <a:ea typeface="Trebuchet MS" pitchFamily="34" charset="-122"/>
                 <a:cs typeface="Trebuchet MS" pitchFamily="34" charset="-120"/>
               </a:rPr>
-              <a:t>·</a:t>
-            </a:r>
-            <a:endParaRPr lang="en-US" sz="1600" dirty="0"/>
-          </a:p>
-        </p:txBody>
-      </p:sp>
-      <p:sp>
-        <p:nvSpPr>
-          <p:cNvPr id="37" name="Shape 35"/>
-          <p:cNvSpPr/>
-          <p:nvPr/>
-        </p:nvSpPr>
-        <p:spPr>
-          <a:xfrm>
-            <a:off x="6858000" y="3364992"/>
-            <a:ext cx="1554480" cy="475488"/>
-          </a:xfrm>
-          <a:prstGeom prst="rect">
-            <a:avLst>
-              <a:gd name="adj" fmla="val 9615"/>
-            </a:avLst>
-          </a:prstGeom>
-          <a:solidFill>
-            <a:srgbClr val="FFFFFF"/>
-          </a:solidFill>
-          <a:ln w="12700">
-            <a:solidFill>
-              <a:srgbClr val="0D9488"/>
-            </a:solidFill>
-            <a:prstDash val="solid"/>
-          </a:ln>
-        </p:spPr>
-      </p:sp>
-      <p:sp>
-        <p:nvSpPr>
-          <p:cNvPr id="38" name="Text 36"/>
-          <p:cNvSpPr/>
-          <p:nvPr/>
-        </p:nvSpPr>
-        <p:spPr>
-          <a:xfrm>
-            <a:off x="6858000" y="3364992"/>
-            <a:ext cx="1554480" cy="475488"/>
-          </a:xfrm>
-          <a:prstGeom prst="rect">
-            <a:avLst/>
-          </a:prstGeom>
-          <a:noFill/>
-          <a:ln/>
-        </p:spPr>
-        <p:txBody>
-          <a:bodyPr wrap="square" lIns="0" tIns="0" rIns="0" bIns="0" rtlCol="0" anchor="ctr"/>
-          <a:lstStyle/>
-          <a:p>
-            <a:pPr algn="ctr" indent="0" marL="0">
-              <a:buNone/>
-            </a:pPr>
-            <a:r>
-              <a:rPr lang="en-US" sz="1400" b="1" dirty="0">
-                <a:solidFill>
-                  <a:srgbClr val="0D9488"/>
-                </a:solidFill>
-                <a:latin typeface="Trebuchet MS" pitchFamily="34" charset="0"/>
-                <a:ea typeface="Trebuchet MS" pitchFamily="34" charset="-122"/>
-                <a:cs typeface="Trebuchet MS" pitchFamily="34" charset="-120"/>
-              </a:rPr>
-              <a:t>er</a:t>
-            </a:r>
-            <a:endParaRPr lang="en-US" sz="1400" dirty="0"/>
-          </a:p>
-        </p:txBody>
-      </p:sp>
-      <p:sp>
-        <p:nvSpPr>
-          <p:cNvPr id="39" name="Shape 37"/>
-          <p:cNvSpPr/>
-          <p:nvPr/>
-        </p:nvSpPr>
-        <p:spPr>
-          <a:xfrm>
-            <a:off x="365760" y="4096512"/>
-            <a:ext cx="1371600" cy="804672"/>
+              <a:t>Phonemes</a:t>
+            </a:r>
+            <a:endParaRPr lang="en-US" sz="1100" dirty="0"/>
+          </a:p>
+        </p:txBody>
+      </p:sp>
+      <p:sp>
+        <p:nvSpPr>
+          <p:cNvPr id="38" name="Shape 36"/>
+          <p:cNvSpPr/>
+          <p:nvPr/>
+        </p:nvSpPr>
+        <p:spPr>
+          <a:xfrm>
+            <a:off x="1874520" y="4096512"/>
+            <a:ext cx="6903720" cy="804672"/>
           </a:xfrm>
           <a:prstGeom prst="rect">
             <a:avLst>
@@ -21001,85 +20420,19 @@
             </a:avLst>
           </a:prstGeom>
           <a:solidFill>
-            <a:srgbClr val="E2E8F0"/>
+            <a:srgbClr val="F8FAFC"/>
           </a:solidFill>
           <a:ln w="12700">
             <a:solidFill>
               <a:srgbClr val="E2E8F0"/>
             </a:solidFill>
-            <a:prstDash val="solid"/>
-          </a:ln>
-        </p:spPr>
-      </p:sp>
-      <p:sp>
-        <p:nvSpPr>
-          <p:cNvPr id="40" name="Text 38"/>
-          <p:cNvSpPr/>
-          <p:nvPr/>
-        </p:nvSpPr>
-        <p:spPr>
-          <a:xfrm>
-            <a:off x="365760" y="4096512"/>
-            <a:ext cx="1371600" cy="804672"/>
-          </a:xfrm>
-          <a:prstGeom prst="rect">
-            <a:avLst/>
-          </a:prstGeom>
-          <a:noFill/>
-          <a:ln/>
-        </p:spPr>
-        <p:txBody>
-          <a:bodyPr wrap="square" lIns="0" tIns="0" rIns="0" bIns="0" rtlCol="0" anchor="ctr"/>
-          <a:lstStyle/>
-          <a:p>
-            <a:pPr algn="ctr" indent="0" marL="0">
-              <a:buNone/>
-            </a:pPr>
-            <a:r>
-              <a:rPr lang="en-US" sz="1100" b="1" dirty="0">
-                <a:solidFill>
-                  <a:srgbClr val="475569"/>
-                </a:solidFill>
-                <a:latin typeface="Trebuchet MS" pitchFamily="34" charset="0"/>
-                <a:ea typeface="Trebuchet MS" pitchFamily="34" charset="-122"/>
-                <a:cs typeface="Trebuchet MS" pitchFamily="34" charset="-120"/>
-              </a:rPr>
-              <a:t>Phonemes</a:t>
-            </a:r>
-            <a:endParaRPr lang="en-US" sz="1100" dirty="0"/>
-          </a:p>
-        </p:txBody>
-      </p:sp>
-      <p:sp>
-        <p:nvSpPr>
-          <p:cNvPr id="41" name="Shape 39"/>
-          <p:cNvSpPr/>
-          <p:nvPr/>
-        </p:nvSpPr>
-        <p:spPr>
-          <a:xfrm>
-            <a:off x="1874520" y="4096512"/>
-            <a:ext cx="6903720" cy="804672"/>
-          </a:xfrm>
-          <a:prstGeom prst="rect">
-            <a:avLst>
-              <a:gd name="adj" fmla="val 6818"/>
-            </a:avLst>
-          </a:prstGeom>
-          <a:solidFill>
-            <a:srgbClr val="F8FAFC"/>
-          </a:solidFill>
-          <a:ln w="12700">
-            <a:solidFill>
-              <a:srgbClr val="E2E8F0"/>
-            </a:solidFill>
             <a:prstDash val="dash"/>
           </a:ln>
         </p:spPr>
       </p:sp>
       <p:sp>
         <p:nvSpPr>
-          <p:cNvPr id="42" name="Text 40"/>
+          <p:cNvPr id="39" name="Text 37"/>
           <p:cNvSpPr/>
           <p:nvPr/>
         </p:nvSpPr>
@@ -21541,7 +20894,7 @@
                 <a:ea typeface="Trebuchet MS" pitchFamily="34" charset="-122"/>
                 <a:cs typeface="Trebuchet MS" pitchFamily="34" charset="-120"/>
               </a:rPr>
-              <a:t>discoverer</a:t>
+              <a:t>reporter</a:t>
             </a:r>
             <a:endParaRPr lang="en-US" sz="2800" dirty="0"/>
           </a:p>
@@ -21680,7 +21033,7 @@
                 <a:ea typeface="Trebuchet MS" pitchFamily="34" charset="-122"/>
                 <a:cs typeface="Trebuchet MS" pitchFamily="34" charset="-120"/>
               </a:rPr>
-              <a:t>dis</a:t>
+              <a:t>re</a:t>
             </a:r>
             <a:endParaRPr lang="en-US" sz="1300" dirty="0"/>
           </a:p>
@@ -21719,7 +21072,7 @@
                 <a:ea typeface="Calibri" pitchFamily="34" charset="-122"/>
                 <a:cs typeface="Calibri" pitchFamily="34" charset="-120"/>
               </a:rPr>
-              <a:t>apart; away</a:t>
+              <a:t>back</a:t>
             </a:r>
             <a:endParaRPr lang="en-US" sz="850" dirty="0"/>
           </a:p>
@@ -21792,7 +21145,7 @@
                 <a:ea typeface="Trebuchet MS" pitchFamily="34" charset="-122"/>
                 <a:cs typeface="Trebuchet MS" pitchFamily="34" charset="-120"/>
               </a:rPr>
-              <a:t>cover</a:t>
+              <a:t>port</a:t>
             </a:r>
             <a:endParaRPr lang="en-US" sz="1300" dirty="0"/>
           </a:p>
@@ -21831,7 +21184,7 @@
                 <a:ea typeface="Calibri" pitchFamily="34" charset="-122"/>
                 <a:cs typeface="Calibri" pitchFamily="34" charset="-120"/>
               </a:rPr>
-              <a:t>to cover or find</a:t>
+              <a:t>to carry</a:t>
             </a:r>
             <a:endParaRPr lang="en-US" sz="850" dirty="0"/>
           </a:p>
@@ -22050,8 +21403,8 @@
         </p:nvSpPr>
         <p:spPr>
           <a:xfrm>
-            <a:off x="1975104" y="3364992"/>
-            <a:ext cx="1554480" cy="475488"/>
+            <a:off x="2313432" y="3364992"/>
+            <a:ext cx="1645920" cy="475488"/>
           </a:xfrm>
           <a:prstGeom prst="rect">
             <a:avLst>
@@ -22077,8 +21430,8 @@
         </p:nvSpPr>
         <p:spPr>
           <a:xfrm>
-            <a:off x="1975104" y="3364992"/>
-            <a:ext cx="1554480" cy="475488"/>
+            <a:off x="2313432" y="3364992"/>
+            <a:ext cx="1645920" cy="475488"/>
           </a:xfrm>
           <a:prstGeom prst="rect">
             <a:avLst/>
@@ -22102,7 +21455,7 @@
                 <a:ea typeface="Trebuchet MS" pitchFamily="34" charset="-122"/>
                 <a:cs typeface="Trebuchet MS" pitchFamily="34" charset="-120"/>
               </a:rPr>
-              <a:t>dis</a:t>
+              <a:t>re</a:t>
             </a:r>
             <a:endParaRPr lang="en-US" sz="1400" dirty="0"/>
           </a:p>
@@ -22116,8 +21469,8 @@
         </p:nvSpPr>
         <p:spPr>
           <a:xfrm>
-            <a:off x="3529584" y="3364992"/>
-            <a:ext cx="73152" cy="475488"/>
+            <a:off x="3959352" y="3364992"/>
+            <a:ext cx="411480" cy="475488"/>
           </a:xfrm>
           <a:prstGeom prst="rect">
             <a:avLst/>
@@ -22155,8 +21508,8 @@
         </p:nvSpPr>
         <p:spPr>
           <a:xfrm>
-            <a:off x="3602736" y="3364992"/>
-            <a:ext cx="1554480" cy="475488"/>
+            <a:off x="4370832" y="3364992"/>
+            <a:ext cx="1645920" cy="475488"/>
           </a:xfrm>
           <a:prstGeom prst="rect">
             <a:avLst>
@@ -22182,8 +21535,8 @@
         </p:nvSpPr>
         <p:spPr>
           <a:xfrm>
-            <a:off x="3602736" y="3364992"/>
-            <a:ext cx="1554480" cy="475488"/>
+            <a:off x="4370832" y="3364992"/>
+            <a:ext cx="1645920" cy="475488"/>
           </a:xfrm>
           <a:prstGeom prst="rect">
             <a:avLst/>
@@ -22207,7 +21560,7 @@
                 <a:ea typeface="Trebuchet MS" pitchFamily="34" charset="-122"/>
                 <a:cs typeface="Trebuchet MS" pitchFamily="34" charset="-120"/>
               </a:rPr>
-              <a:t>cov</a:t>
+              <a:t>por</a:t>
             </a:r>
             <a:endParaRPr lang="en-US" sz="1400" dirty="0"/>
           </a:p>
@@ -22221,8 +21574,8 @@
         </p:nvSpPr>
         <p:spPr>
           <a:xfrm>
-            <a:off x="5157216" y="3364992"/>
-            <a:ext cx="73152" cy="475488"/>
+            <a:off x="6016752" y="3364992"/>
+            <a:ext cx="411480" cy="475488"/>
           </a:xfrm>
           <a:prstGeom prst="rect">
             <a:avLst/>
@@ -22260,8 +21613,8 @@
         </p:nvSpPr>
         <p:spPr>
           <a:xfrm>
-            <a:off x="5230368" y="3364992"/>
-            <a:ext cx="1554480" cy="475488"/>
+            <a:off x="6428232" y="3364992"/>
+            <a:ext cx="1645920" cy="475488"/>
           </a:xfrm>
           <a:prstGeom prst="rect">
             <a:avLst>
@@ -22287,8 +21640,8 @@
         </p:nvSpPr>
         <p:spPr>
           <a:xfrm>
-            <a:off x="5230368" y="3364992"/>
-            <a:ext cx="1554480" cy="475488"/>
+            <a:off x="6428232" y="3364992"/>
+            <a:ext cx="1645920" cy="475488"/>
           </a:xfrm>
           <a:prstGeom prst="rect">
             <a:avLst/>
@@ -22312,7 +21665,7 @@
                 <a:ea typeface="Trebuchet MS" pitchFamily="34" charset="-122"/>
                 <a:cs typeface="Trebuchet MS" pitchFamily="34" charset="-120"/>
               </a:rPr>
-              <a:t>er</a:t>
+              <a:t>ter</a:t>
             </a:r>
             <a:endParaRPr lang="en-US" sz="1400" dirty="0"/>
           </a:p>
@@ -22320,14 +21673,41 @@
       </p:sp>
       <p:sp>
         <p:nvSpPr>
-          <p:cNvPr id="36" name="Text 34"/>
-          <p:cNvSpPr/>
-          <p:nvPr/>
-        </p:nvSpPr>
-        <p:spPr>
-          <a:xfrm>
-            <a:off x="6784848" y="3364992"/>
-            <a:ext cx="73152" cy="475488"/>
+          <p:cNvPr id="36" name="Shape 34"/>
+          <p:cNvSpPr/>
+          <p:nvPr/>
+        </p:nvSpPr>
+        <p:spPr>
+          <a:xfrm>
+            <a:off x="365760" y="4096512"/>
+            <a:ext cx="1371600" cy="804672"/>
+          </a:xfrm>
+          <a:prstGeom prst="rect">
+            <a:avLst>
+              <a:gd name="adj" fmla="val 6818"/>
+            </a:avLst>
+          </a:prstGeom>
+          <a:solidFill>
+            <a:srgbClr val="E2E8F0"/>
+          </a:solidFill>
+          <a:ln w="12700">
+            <a:solidFill>
+              <a:srgbClr val="E2E8F0"/>
+            </a:solidFill>
+            <a:prstDash val="solid"/>
+          </a:ln>
+        </p:spPr>
+      </p:sp>
+      <p:sp>
+        <p:nvSpPr>
+          <p:cNvPr id="37" name="Text 35"/>
+          <p:cNvSpPr/>
+          <p:nvPr/>
+        </p:nvSpPr>
+        <p:spPr>
+          <a:xfrm>
+            <a:off x="365760" y="4096512"/>
+            <a:ext cx="1371600" cy="804672"/>
           </a:xfrm>
           <a:prstGeom prst="rect">
             <a:avLst/>
@@ -22343,57 +21723,84 @@
               <a:buNone/>
             </a:pPr>
             <a:r>
-              <a:rPr lang="en-US" sz="1600" b="1" dirty="0">
-                <a:solidFill>
-                  <a:srgbClr val="0D9488"/>
+              <a:rPr lang="en-US" sz="1100" b="1" dirty="0">
+                <a:solidFill>
+                  <a:srgbClr val="475569"/>
                 </a:solidFill>
                 <a:latin typeface="Trebuchet MS" pitchFamily="34" charset="0"/>
                 <a:ea typeface="Trebuchet MS" pitchFamily="34" charset="-122"/>
                 <a:cs typeface="Trebuchet MS" pitchFamily="34" charset="-120"/>
               </a:rPr>
-              <a:t>·</a:t>
-            </a:r>
-            <a:endParaRPr lang="en-US" sz="1600" dirty="0"/>
-          </a:p>
-        </p:txBody>
-      </p:sp>
-      <p:sp>
-        <p:nvSpPr>
-          <p:cNvPr id="37" name="Shape 35"/>
-          <p:cNvSpPr/>
-          <p:nvPr/>
-        </p:nvSpPr>
-        <p:spPr>
-          <a:xfrm>
-            <a:off x="6858000" y="3364992"/>
-            <a:ext cx="1554480" cy="475488"/>
+              <a:t>Phonemes</a:t>
+            </a:r>
+            <a:endParaRPr lang="en-US" sz="1100" dirty="0"/>
+          </a:p>
+        </p:txBody>
+      </p:sp>
+      <p:sp>
+        <p:nvSpPr>
+          <p:cNvPr id="38" name="Shape 36"/>
+          <p:cNvSpPr/>
+          <p:nvPr/>
+        </p:nvSpPr>
+        <p:spPr>
+          <a:xfrm>
+            <a:off x="1874520" y="4096512"/>
+            <a:ext cx="6903720" cy="658368"/>
           </a:xfrm>
           <a:prstGeom prst="rect">
             <a:avLst>
-              <a:gd name="adj" fmla="val 9615"/>
+              <a:gd name="adj" fmla="val 8333"/>
             </a:avLst>
           </a:prstGeom>
           <a:solidFill>
+            <a:srgbClr val="FCE7F3"/>
+          </a:solidFill>
+          <a:ln w="12700">
+            <a:solidFill>
+              <a:srgbClr val="DB2777"/>
+            </a:solidFill>
+            <a:prstDash val="solid"/>
+          </a:ln>
+        </p:spPr>
+      </p:sp>
+      <p:sp>
+        <p:nvSpPr>
+          <p:cNvPr id="39" name="Shape 37"/>
+          <p:cNvSpPr/>
+          <p:nvPr/>
+        </p:nvSpPr>
+        <p:spPr>
+          <a:xfrm>
+            <a:off x="2254649" y="4169664"/>
+            <a:ext cx="685800" cy="475488"/>
+          </a:xfrm>
+          <a:prstGeom prst="rect">
+            <a:avLst>
+              <a:gd name="adj" fmla="val 7692"/>
+            </a:avLst>
+          </a:prstGeom>
+          <a:solidFill>
             <a:srgbClr val="FFFFFF"/>
           </a:solidFill>
           <a:ln w="12700">
             <a:solidFill>
-              <a:srgbClr val="0D9488"/>
-            </a:solidFill>
-            <a:prstDash val="solid"/>
-          </a:ln>
-        </p:spPr>
-      </p:sp>
-      <p:sp>
-        <p:nvSpPr>
-          <p:cNvPr id="38" name="Text 36"/>
-          <p:cNvSpPr/>
-          <p:nvPr/>
-        </p:nvSpPr>
-        <p:spPr>
-          <a:xfrm>
-            <a:off x="6858000" y="3364992"/>
-            <a:ext cx="1554480" cy="475488"/>
+              <a:srgbClr val="DB2777"/>
+            </a:solidFill>
+            <a:prstDash val="solid"/>
+          </a:ln>
+        </p:spPr>
+      </p:sp>
+      <p:sp>
+        <p:nvSpPr>
+          <p:cNvPr id="40" name="Text 38"/>
+          <p:cNvSpPr/>
+          <p:nvPr/>
+        </p:nvSpPr>
+        <p:spPr>
+          <a:xfrm>
+            <a:off x="2254649" y="4169664"/>
+            <a:ext cx="685800" cy="475488"/>
           </a:xfrm>
           <a:prstGeom prst="rect">
             <a:avLst/>
@@ -22409,57 +21816,57 @@
               <a:buNone/>
             </a:pPr>
             <a:r>
-              <a:rPr lang="en-US" sz="1400" b="1" dirty="0">
-                <a:solidFill>
-                  <a:srgbClr val="0D9488"/>
+              <a:rPr lang="en-US" sz="900" b="1" dirty="0">
+                <a:solidFill>
+                  <a:srgbClr val="9D174D"/>
                 </a:solidFill>
                 <a:latin typeface="Trebuchet MS" pitchFamily="34" charset="0"/>
                 <a:ea typeface="Trebuchet MS" pitchFamily="34" charset="-122"/>
                 <a:cs typeface="Trebuchet MS" pitchFamily="34" charset="-120"/>
               </a:rPr>
-              <a:t>er</a:t>
-            </a:r>
-            <a:endParaRPr lang="en-US" sz="1400" dirty="0"/>
-          </a:p>
-        </p:txBody>
-      </p:sp>
-      <p:sp>
-        <p:nvSpPr>
-          <p:cNvPr id="39" name="Shape 37"/>
-          <p:cNvSpPr/>
-          <p:nvPr/>
-        </p:nvSpPr>
-        <p:spPr>
-          <a:xfrm>
-            <a:off x="365760" y="4096512"/>
-            <a:ext cx="1371600" cy="804672"/>
+              <a:t>r</a:t>
+            </a:r>
+            <a:endParaRPr lang="en-US" sz="900" dirty="0"/>
+          </a:p>
+        </p:txBody>
+      </p:sp>
+      <p:sp>
+        <p:nvSpPr>
+          <p:cNvPr id="41" name="Shape 39"/>
+          <p:cNvSpPr/>
+          <p:nvPr/>
+        </p:nvSpPr>
+        <p:spPr>
+          <a:xfrm>
+            <a:off x="3293146" y="4169664"/>
+            <a:ext cx="685800" cy="475488"/>
           </a:xfrm>
           <a:prstGeom prst="rect">
             <a:avLst>
-              <a:gd name="adj" fmla="val 6818"/>
+              <a:gd name="adj" fmla="val 7692"/>
             </a:avLst>
           </a:prstGeom>
           <a:solidFill>
-            <a:srgbClr val="E2E8F0"/>
-          </a:solidFill>
-          <a:ln w="12700">
-            <a:solidFill>
-              <a:srgbClr val="E2E8F0"/>
-            </a:solidFill>
-            <a:prstDash val="solid"/>
-          </a:ln>
-        </p:spPr>
-      </p:sp>
-      <p:sp>
-        <p:nvSpPr>
-          <p:cNvPr id="40" name="Text 38"/>
-          <p:cNvSpPr/>
-          <p:nvPr/>
-        </p:nvSpPr>
-        <p:spPr>
-          <a:xfrm>
-            <a:off x="365760" y="4096512"/>
-            <a:ext cx="1371600" cy="804672"/>
+            <a:srgbClr val="FFFFFF"/>
+          </a:solidFill>
+          <a:ln w="12700">
+            <a:solidFill>
+              <a:srgbClr val="DB2777"/>
+            </a:solidFill>
+            <a:prstDash val="solid"/>
+          </a:ln>
+        </p:spPr>
+      </p:sp>
+      <p:sp>
+        <p:nvSpPr>
+          <p:cNvPr id="42" name="Text 40"/>
+          <p:cNvSpPr/>
+          <p:nvPr/>
+        </p:nvSpPr>
+        <p:spPr>
+          <a:xfrm>
+            <a:off x="3293146" y="4169664"/>
+            <a:ext cx="685800" cy="475488"/>
           </a:xfrm>
           <a:prstGeom prst="rect">
             <a:avLst/>
@@ -22475,38 +21882,38 @@
               <a:buNone/>
             </a:pPr>
             <a:r>
-              <a:rPr lang="en-US" sz="1100" b="1" dirty="0">
-                <a:solidFill>
-                  <a:srgbClr val="475569"/>
+              <a:rPr lang="en-US" sz="900" b="1" dirty="0">
+                <a:solidFill>
+                  <a:srgbClr val="9D174D"/>
                 </a:solidFill>
                 <a:latin typeface="Trebuchet MS" pitchFamily="34" charset="0"/>
                 <a:ea typeface="Trebuchet MS" pitchFamily="34" charset="-122"/>
                 <a:cs typeface="Trebuchet MS" pitchFamily="34" charset="-120"/>
               </a:rPr>
-              <a:t>Phonemes</a:t>
-            </a:r>
-            <a:endParaRPr lang="en-US" sz="1100" dirty="0"/>
-          </a:p>
-        </p:txBody>
-      </p:sp>
-      <p:sp>
-        <p:nvSpPr>
-          <p:cNvPr id="41" name="Shape 39"/>
-          <p:cNvSpPr/>
-          <p:nvPr/>
-        </p:nvSpPr>
-        <p:spPr>
-          <a:xfrm>
-            <a:off x="1874520" y="4096512"/>
-            <a:ext cx="6903720" cy="804672"/>
+              <a:t>e</a:t>
+            </a:r>
+            <a:endParaRPr lang="en-US" sz="900" dirty="0"/>
+          </a:p>
+        </p:txBody>
+      </p:sp>
+      <p:sp>
+        <p:nvSpPr>
+          <p:cNvPr id="43" name="Shape 41"/>
+          <p:cNvSpPr/>
+          <p:nvPr/>
+        </p:nvSpPr>
+        <p:spPr>
+          <a:xfrm>
+            <a:off x="4331643" y="4169664"/>
+            <a:ext cx="685800" cy="475488"/>
           </a:xfrm>
           <a:prstGeom prst="rect">
             <a:avLst>
-              <a:gd name="adj" fmla="val 6818"/>
+              <a:gd name="adj" fmla="val 7692"/>
             </a:avLst>
           </a:prstGeom>
           <a:solidFill>
-            <a:srgbClr val="FCE7F3"/>
+            <a:srgbClr val="FFFFFF"/>
           </a:solidFill>
           <a:ln w="12700">
             <a:solidFill>
@@ -22518,41 +21925,14 @@
       </p:sp>
       <p:sp>
         <p:nvSpPr>
-          <p:cNvPr id="42" name="Shape 40"/>
-          <p:cNvSpPr/>
-          <p:nvPr/>
-        </p:nvSpPr>
-        <p:spPr>
-          <a:xfrm>
-            <a:off x="2124837" y="4169664"/>
-            <a:ext cx="685800" cy="384048"/>
-          </a:xfrm>
-          <a:prstGeom prst="rect">
-            <a:avLst>
-              <a:gd name="adj" fmla="val 9524"/>
-            </a:avLst>
-          </a:prstGeom>
-          <a:solidFill>
-            <a:srgbClr val="FFFFFF"/>
-          </a:solidFill>
-          <a:ln w="12700">
-            <a:solidFill>
-              <a:srgbClr val="DB2777"/>
-            </a:solidFill>
-            <a:prstDash val="solid"/>
-          </a:ln>
-        </p:spPr>
-      </p:sp>
-      <p:sp>
-        <p:nvSpPr>
-          <p:cNvPr id="43" name="Text 41"/>
-          <p:cNvSpPr/>
-          <p:nvPr/>
-        </p:nvSpPr>
-        <p:spPr>
-          <a:xfrm>
-            <a:off x="2124837" y="4169664"/>
-            <a:ext cx="685800" cy="384048"/>
+          <p:cNvPr id="44" name="Text 42"/>
+          <p:cNvSpPr/>
+          <p:nvPr/>
+        </p:nvSpPr>
+        <p:spPr>
+          <a:xfrm>
+            <a:off x="4331643" y="4169664"/>
+            <a:ext cx="685800" cy="475488"/>
           </a:xfrm>
           <a:prstGeom prst="rect">
             <a:avLst/>
@@ -22576,7 +21956,7 @@
                 <a:ea typeface="Trebuchet MS" pitchFamily="34" charset="-122"/>
                 <a:cs typeface="Trebuchet MS" pitchFamily="34" charset="-120"/>
               </a:rPr>
-              <a:t>d</a:t>
+              <a:t>p</a:t>
             </a:r>
             <a:endParaRPr lang="en-US" sz="900" dirty="0"/>
           </a:p>
@@ -22584,18 +21964,18 @@
       </p:sp>
       <p:sp>
         <p:nvSpPr>
-          <p:cNvPr id="44" name="Shape 42"/>
-          <p:cNvSpPr/>
-          <p:nvPr/>
-        </p:nvSpPr>
-        <p:spPr>
-          <a:xfrm>
-            <a:off x="3033522" y="4169664"/>
-            <a:ext cx="685800" cy="384048"/>
+          <p:cNvPr id="45" name="Shape 43"/>
+          <p:cNvSpPr/>
+          <p:nvPr/>
+        </p:nvSpPr>
+        <p:spPr>
+          <a:xfrm>
+            <a:off x="5370141" y="4169664"/>
+            <a:ext cx="685800" cy="475488"/>
           </a:xfrm>
           <a:prstGeom prst="rect">
             <a:avLst>
-              <a:gd name="adj" fmla="val 9524"/>
+              <a:gd name="adj" fmla="val 7692"/>
             </a:avLst>
           </a:prstGeom>
           <a:solidFill>
@@ -22611,14 +21991,14 @@
       </p:sp>
       <p:sp>
         <p:nvSpPr>
-          <p:cNvPr id="45" name="Text 43"/>
-          <p:cNvSpPr/>
-          <p:nvPr/>
-        </p:nvSpPr>
-        <p:spPr>
-          <a:xfrm>
-            <a:off x="3033522" y="4169664"/>
-            <a:ext cx="685800" cy="384048"/>
+          <p:cNvPr id="46" name="Text 44"/>
+          <p:cNvSpPr/>
+          <p:nvPr/>
+        </p:nvSpPr>
+        <p:spPr>
+          <a:xfrm>
+            <a:off x="5370141" y="4169664"/>
+            <a:ext cx="685800" cy="475488"/>
           </a:xfrm>
           <a:prstGeom prst="rect">
             <a:avLst/>
@@ -22642,7 +22022,7 @@
                 <a:ea typeface="Trebuchet MS" pitchFamily="34" charset="-122"/>
                 <a:cs typeface="Trebuchet MS" pitchFamily="34" charset="-120"/>
               </a:rPr>
-              <a:t>i</a:t>
+              <a:t>or</a:t>
             </a:r>
             <a:endParaRPr lang="en-US" sz="900" dirty="0"/>
           </a:p>
@@ -22650,18 +22030,18 @@
       </p:sp>
       <p:sp>
         <p:nvSpPr>
-          <p:cNvPr id="46" name="Shape 44"/>
-          <p:cNvSpPr/>
-          <p:nvPr/>
-        </p:nvSpPr>
-        <p:spPr>
-          <a:xfrm>
-            <a:off x="3942207" y="4169664"/>
-            <a:ext cx="685800" cy="384048"/>
+          <p:cNvPr id="47" name="Shape 45"/>
+          <p:cNvSpPr/>
+          <p:nvPr/>
+        </p:nvSpPr>
+        <p:spPr>
+          <a:xfrm>
+            <a:off x="6408638" y="4169664"/>
+            <a:ext cx="685800" cy="475488"/>
           </a:xfrm>
           <a:prstGeom prst="rect">
             <a:avLst>
-              <a:gd name="adj" fmla="val 9524"/>
+              <a:gd name="adj" fmla="val 7692"/>
             </a:avLst>
           </a:prstGeom>
           <a:solidFill>
@@ -22677,14 +22057,14 @@
       </p:sp>
       <p:sp>
         <p:nvSpPr>
-          <p:cNvPr id="47" name="Text 45"/>
-          <p:cNvSpPr/>
-          <p:nvPr/>
-        </p:nvSpPr>
-        <p:spPr>
-          <a:xfrm>
-            <a:off x="3942207" y="4169664"/>
-            <a:ext cx="685800" cy="384048"/>
+          <p:cNvPr id="48" name="Text 46"/>
+          <p:cNvSpPr/>
+          <p:nvPr/>
+        </p:nvSpPr>
+        <p:spPr>
+          <a:xfrm>
+            <a:off x="6408638" y="4169664"/>
+            <a:ext cx="685800" cy="475488"/>
           </a:xfrm>
           <a:prstGeom prst="rect">
             <a:avLst/>
@@ -22708,7 +22088,7 @@
                 <a:ea typeface="Trebuchet MS" pitchFamily="34" charset="-122"/>
                 <a:cs typeface="Trebuchet MS" pitchFamily="34" charset="-120"/>
               </a:rPr>
-              <a:t>s</a:t>
+              <a:t>t</a:t>
             </a:r>
             <a:endParaRPr lang="en-US" sz="900" dirty="0"/>
           </a:p>
@@ -22716,18 +22096,18 @@
       </p:sp>
       <p:sp>
         <p:nvSpPr>
-          <p:cNvPr id="48" name="Shape 46"/>
-          <p:cNvSpPr/>
-          <p:nvPr/>
-        </p:nvSpPr>
-        <p:spPr>
-          <a:xfrm>
-            <a:off x="4850892" y="4169664"/>
-            <a:ext cx="685800" cy="384048"/>
+          <p:cNvPr id="49" name="Shape 47"/>
+          <p:cNvSpPr/>
+          <p:nvPr/>
+        </p:nvSpPr>
+        <p:spPr>
+          <a:xfrm>
+            <a:off x="7447135" y="4169664"/>
+            <a:ext cx="685800" cy="475488"/>
           </a:xfrm>
           <a:prstGeom prst="rect">
             <a:avLst>
-              <a:gd name="adj" fmla="val 9524"/>
+              <a:gd name="adj" fmla="val 7692"/>
             </a:avLst>
           </a:prstGeom>
           <a:solidFill>
@@ -22743,251 +22123,14 @@
       </p:sp>
       <p:sp>
         <p:nvSpPr>
-          <p:cNvPr id="49" name="Text 47"/>
-          <p:cNvSpPr/>
-          <p:nvPr/>
-        </p:nvSpPr>
-        <p:spPr>
-          <a:xfrm>
-            <a:off x="4850892" y="4169664"/>
-            <a:ext cx="685800" cy="384048"/>
-          </a:xfrm>
-          <a:prstGeom prst="rect">
-            <a:avLst/>
-          </a:prstGeom>
-          <a:noFill/>
-          <a:ln/>
-        </p:spPr>
-        <p:txBody>
-          <a:bodyPr wrap="square" lIns="0" tIns="0" rIns="0" bIns="0" rtlCol="0" anchor="ctr"/>
-          <a:lstStyle/>
-          <a:p>
-            <a:pPr algn="ctr" indent="0" marL="0">
-              <a:buNone/>
-            </a:pPr>
-            <a:r>
-              <a:rPr lang="en-US" sz="900" b="1" dirty="0">
-                <a:solidFill>
-                  <a:srgbClr val="9D174D"/>
-                </a:solidFill>
-                <a:latin typeface="Trebuchet MS" pitchFamily="34" charset="0"/>
-                <a:ea typeface="Trebuchet MS" pitchFamily="34" charset="-122"/>
-                <a:cs typeface="Trebuchet MS" pitchFamily="34" charset="-120"/>
-              </a:rPr>
-              <a:t>c</a:t>
-            </a:r>
-            <a:endParaRPr lang="en-US" sz="900" dirty="0"/>
-          </a:p>
-        </p:txBody>
-      </p:sp>
-      <p:sp>
-        <p:nvSpPr>
           <p:cNvPr id="50" name="Text 48"/>
           <p:cNvSpPr/>
           <p:nvPr/>
         </p:nvSpPr>
         <p:spPr>
           <a:xfrm>
-            <a:off x="4850892" y="4572000"/>
-            <a:ext cx="685800" cy="219456"/>
-          </a:xfrm>
-          <a:prstGeom prst="rect">
-            <a:avLst/>
-          </a:prstGeom>
-          <a:noFill/>
-          <a:ln/>
-        </p:spPr>
-        <p:txBody>
-          <a:bodyPr wrap="square" lIns="0" tIns="0" rIns="0" bIns="0" rtlCol="0" anchor="t"/>
-          <a:lstStyle/>
-          <a:p>
-            <a:pPr algn="ctr" indent="0" marL="0">
-              <a:buNone/>
-            </a:pPr>
-            <a:r>
-              <a:rPr lang="en-US" sz="750" i="1" dirty="0">
-                <a:solidFill>
-                  <a:srgbClr val="94A3B8"/>
-                </a:solidFill>
-                <a:latin typeface="Calibri" pitchFamily="34" charset="0"/>
-                <a:ea typeface="Calibri" pitchFamily="34" charset="-122"/>
-                <a:cs typeface="Calibri" pitchFamily="34" charset="-120"/>
-              </a:rPr>
-              <a:t>/k/</a:t>
-            </a:r>
-            <a:endParaRPr lang="en-US" sz="750" dirty="0"/>
-          </a:p>
-        </p:txBody>
-      </p:sp>
-      <p:sp>
-        <p:nvSpPr>
-          <p:cNvPr id="51" name="Shape 49"/>
-          <p:cNvSpPr/>
-          <p:nvPr/>
-        </p:nvSpPr>
-        <p:spPr>
-          <a:xfrm>
-            <a:off x="5759577" y="4169664"/>
-            <a:ext cx="685800" cy="384048"/>
-          </a:xfrm>
-          <a:prstGeom prst="rect">
-            <a:avLst>
-              <a:gd name="adj" fmla="val 9524"/>
-            </a:avLst>
-          </a:prstGeom>
-          <a:solidFill>
-            <a:srgbClr val="FFFFFF"/>
-          </a:solidFill>
-          <a:ln w="12700">
-            <a:solidFill>
-              <a:srgbClr val="DB2777"/>
-            </a:solidFill>
-            <a:prstDash val="solid"/>
-          </a:ln>
-        </p:spPr>
-      </p:sp>
-      <p:sp>
-        <p:nvSpPr>
-          <p:cNvPr id="52" name="Text 50"/>
-          <p:cNvSpPr/>
-          <p:nvPr/>
-        </p:nvSpPr>
-        <p:spPr>
-          <a:xfrm>
-            <a:off x="5759577" y="4169664"/>
-            <a:ext cx="685800" cy="384048"/>
-          </a:xfrm>
-          <a:prstGeom prst="rect">
-            <a:avLst/>
-          </a:prstGeom>
-          <a:noFill/>
-          <a:ln/>
-        </p:spPr>
-        <p:txBody>
-          <a:bodyPr wrap="square" lIns="0" tIns="0" rIns="0" bIns="0" rtlCol="0" anchor="ctr"/>
-          <a:lstStyle/>
-          <a:p>
-            <a:pPr algn="ctr" indent="0" marL="0">
-              <a:buNone/>
-            </a:pPr>
-            <a:r>
-              <a:rPr lang="en-US" sz="900" b="1" dirty="0">
-                <a:solidFill>
-                  <a:srgbClr val="9D174D"/>
-                </a:solidFill>
-                <a:latin typeface="Trebuchet MS" pitchFamily="34" charset="0"/>
-                <a:ea typeface="Trebuchet MS" pitchFamily="34" charset="-122"/>
-                <a:cs typeface="Trebuchet MS" pitchFamily="34" charset="-120"/>
-              </a:rPr>
-              <a:t>ov</a:t>
-            </a:r>
-            <a:endParaRPr lang="en-US" sz="900" dirty="0"/>
-          </a:p>
-        </p:txBody>
-      </p:sp>
-      <p:sp>
-        <p:nvSpPr>
-          <p:cNvPr id="53" name="Shape 51"/>
-          <p:cNvSpPr/>
-          <p:nvPr/>
-        </p:nvSpPr>
-        <p:spPr>
-          <a:xfrm>
-            <a:off x="6668262" y="4169664"/>
-            <a:ext cx="685800" cy="384048"/>
-          </a:xfrm>
-          <a:prstGeom prst="rect">
-            <a:avLst>
-              <a:gd name="adj" fmla="val 9524"/>
-            </a:avLst>
-          </a:prstGeom>
-          <a:solidFill>
-            <a:srgbClr val="FFFFFF"/>
-          </a:solidFill>
-          <a:ln w="12700">
-            <a:solidFill>
-              <a:srgbClr val="DB2777"/>
-            </a:solidFill>
-            <a:prstDash val="solid"/>
-          </a:ln>
-        </p:spPr>
-      </p:sp>
-      <p:sp>
-        <p:nvSpPr>
-          <p:cNvPr id="54" name="Text 52"/>
-          <p:cNvSpPr/>
-          <p:nvPr/>
-        </p:nvSpPr>
-        <p:spPr>
-          <a:xfrm>
-            <a:off x="6668262" y="4169664"/>
-            <a:ext cx="685800" cy="384048"/>
-          </a:xfrm>
-          <a:prstGeom prst="rect">
-            <a:avLst/>
-          </a:prstGeom>
-          <a:noFill/>
-          <a:ln/>
-        </p:spPr>
-        <p:txBody>
-          <a:bodyPr wrap="square" lIns="0" tIns="0" rIns="0" bIns="0" rtlCol="0" anchor="ctr"/>
-          <a:lstStyle/>
-          <a:p>
-            <a:pPr algn="ctr" indent="0" marL="0">
-              <a:buNone/>
-            </a:pPr>
-            <a:r>
-              <a:rPr lang="en-US" sz="900" b="1" dirty="0">
-                <a:solidFill>
-                  <a:srgbClr val="9D174D"/>
-                </a:solidFill>
-                <a:latin typeface="Trebuchet MS" pitchFamily="34" charset="0"/>
-                <a:ea typeface="Trebuchet MS" pitchFamily="34" charset="-122"/>
-                <a:cs typeface="Trebuchet MS" pitchFamily="34" charset="-120"/>
-              </a:rPr>
-              <a:t>er</a:t>
-            </a:r>
-            <a:endParaRPr lang="en-US" sz="900" dirty="0"/>
-          </a:p>
-        </p:txBody>
-      </p:sp>
-      <p:sp>
-        <p:nvSpPr>
-          <p:cNvPr id="55" name="Shape 53"/>
-          <p:cNvSpPr/>
-          <p:nvPr/>
-        </p:nvSpPr>
-        <p:spPr>
-          <a:xfrm>
-            <a:off x="7576947" y="4169664"/>
-            <a:ext cx="685800" cy="384048"/>
-          </a:xfrm>
-          <a:prstGeom prst="rect">
-            <a:avLst>
-              <a:gd name="adj" fmla="val 9524"/>
-            </a:avLst>
-          </a:prstGeom>
-          <a:solidFill>
-            <a:srgbClr val="FFFFFF"/>
-          </a:solidFill>
-          <a:ln w="12700">
-            <a:solidFill>
-              <a:srgbClr val="DB2777"/>
-            </a:solidFill>
-            <a:prstDash val="solid"/>
-          </a:ln>
-        </p:spPr>
-      </p:sp>
-      <p:sp>
-        <p:nvSpPr>
-          <p:cNvPr id="56" name="Text 54"/>
-          <p:cNvSpPr/>
-          <p:nvPr/>
-        </p:nvSpPr>
-        <p:spPr>
-          <a:xfrm>
-            <a:off x="7576947" y="4169664"/>
-            <a:ext cx="685800" cy="384048"/>
+            <a:off x="7447135" y="4169664"/>
+            <a:ext cx="685800" cy="475488"/>
           </a:xfrm>
           <a:prstGeom prst="rect">
             <a:avLst/>
@@ -23442,7 +22585,7 @@
                 <a:ea typeface="Trebuchet MS" pitchFamily="34" charset="-122"/>
                 <a:cs typeface="Trebuchet MS" pitchFamily="34" charset="-120"/>
               </a:rPr>
-              <a:t>researcher</a:t>
+              <a:t>farmer</a:t>
             </a:r>
             <a:endParaRPr lang="en-US" sz="2800" dirty="0"/>
           </a:p>
@@ -24269,7 +23412,7 @@
                 <a:ea typeface="Trebuchet MS" pitchFamily="34" charset="-122"/>
                 <a:cs typeface="Trebuchet MS" pitchFamily="34" charset="-120"/>
               </a:rPr>
-              <a:t>researcher</a:t>
+              <a:t>farmer</a:t>
             </a:r>
             <a:endParaRPr lang="en-US" sz="2800" dirty="0"/>
           </a:p>
@@ -24349,7 +23492,7 @@
         </p:nvSpPr>
         <p:spPr>
           <a:xfrm>
-            <a:off x="2221992" y="2258568"/>
+            <a:off x="2938272" y="2258568"/>
             <a:ext cx="1828800" cy="292608"/>
           </a:xfrm>
           <a:prstGeom prst="rect">
@@ -24383,7 +23526,7 @@
         </p:nvSpPr>
         <p:spPr>
           <a:xfrm>
-            <a:off x="2221992" y="2258568"/>
+            <a:off x="2938272" y="2258568"/>
             <a:ext cx="1828800" cy="292608"/>
           </a:xfrm>
           <a:prstGeom prst="rect">
@@ -24408,7 +23551,7 @@
                 <a:ea typeface="Trebuchet MS" pitchFamily="34" charset="-122"/>
                 <a:cs typeface="Trebuchet MS" pitchFamily="34" charset="-120"/>
               </a:rPr>
-              <a:t>re</a:t>
+              <a:t>farm</a:t>
             </a:r>
             <a:endParaRPr lang="en-US" sz="1300" dirty="0"/>
           </a:p>
@@ -24422,7 +23565,7 @@
         </p:nvSpPr>
         <p:spPr>
           <a:xfrm>
-            <a:off x="2221992" y="2569464"/>
+            <a:off x="2938272" y="2569464"/>
             <a:ext cx="1828800" cy="201168"/>
           </a:xfrm>
           <a:prstGeom prst="rect">
@@ -24447,7 +23590,7 @@
                 <a:ea typeface="Calibri" pitchFamily="34" charset="-122"/>
                 <a:cs typeface="Calibri" pitchFamily="34" charset="-120"/>
               </a:rPr>
-              <a:t>again</a:t>
+              <a:t>to cultivate land</a:t>
             </a:r>
             <a:endParaRPr lang="en-US" sz="850" dirty="0"/>
           </a:p>
@@ -24461,7 +23604,7 @@
         </p:nvSpPr>
         <p:spPr>
           <a:xfrm>
-            <a:off x="4370832" y="2258568"/>
+            <a:off x="5803392" y="2258568"/>
             <a:ext cx="1828800" cy="292608"/>
           </a:xfrm>
           <a:prstGeom prst="rect">
@@ -24470,11 +23613,11 @@
             </a:avLst>
           </a:prstGeom>
           <a:solidFill>
-            <a:srgbClr val="FCE7F3"/>
+            <a:srgbClr val="CCFBF1"/>
           </a:solidFill>
           <a:ln w="19050">
             <a:solidFill>
-              <a:srgbClr val="DB2777"/>
+              <a:srgbClr val="0D9488"/>
             </a:solidFill>
             <a:prstDash val="solid"/>
           </a:ln>
@@ -24495,7 +23638,7 @@
         </p:nvSpPr>
         <p:spPr>
           <a:xfrm>
-            <a:off x="4370832" y="2258568"/>
+            <a:off x="5803392" y="2258568"/>
             <a:ext cx="1828800" cy="292608"/>
           </a:xfrm>
           <a:prstGeom prst="rect">
@@ -24514,13 +23657,13 @@
             <a:r>
               <a:rPr lang="en-US" sz="1300" b="1" dirty="0">
                 <a:solidFill>
-                  <a:srgbClr val="9D174D"/>
+                  <a:srgbClr val="0F766E"/>
                 </a:solidFill>
                 <a:latin typeface="Trebuchet MS" pitchFamily="34" charset="0"/>
                 <a:ea typeface="Trebuchet MS" pitchFamily="34" charset="-122"/>
                 <a:cs typeface="Trebuchet MS" pitchFamily="34" charset="-120"/>
               </a:rPr>
-              <a:t>search</a:t>
+              <a:t>er</a:t>
             </a:r>
             <a:endParaRPr lang="en-US" sz="1300" dirty="0"/>
           </a:p>
@@ -24534,7 +23677,7 @@
         </p:nvSpPr>
         <p:spPr>
           <a:xfrm>
-            <a:off x="4370832" y="2569464"/>
+            <a:off x="5803392" y="2569464"/>
             <a:ext cx="1828800" cy="201168"/>
           </a:xfrm>
           <a:prstGeom prst="rect">
@@ -24559,7 +23702,7 @@
                 <a:ea typeface="Calibri" pitchFamily="34" charset="-122"/>
                 <a:cs typeface="Calibri" pitchFamily="34" charset="-120"/>
               </a:rPr>
-              <a:t>to look carefully</a:t>
+              <a:t>one who does</a:t>
             </a:r>
             <a:endParaRPr lang="en-US" sz="850" dirty="0"/>
           </a:p>
@@ -24573,30 +23716,23 @@
         </p:nvSpPr>
         <p:spPr>
           <a:xfrm>
-            <a:off x="6519672" y="2258568"/>
-            <a:ext cx="1828800" cy="292608"/>
+            <a:off x="365760" y="3273552"/>
+            <a:ext cx="1371600" cy="658368"/>
           </a:xfrm>
           <a:prstGeom prst="rect">
             <a:avLst>
-              <a:gd name="adj" fmla="val 25000"/>
+              <a:gd name="adj" fmla="val 8333"/>
             </a:avLst>
           </a:prstGeom>
           <a:solidFill>
-            <a:srgbClr val="CCFBF1"/>
-          </a:solidFill>
-          <a:ln w="19050">
-            <a:solidFill>
-              <a:srgbClr val="0D9488"/>
-            </a:solidFill>
-            <a:prstDash val="solid"/>
-          </a:ln>
-          <a:effectLst>
-            <a:outerShdw sx="100000" sy="100000" kx="0" ky="0" algn="bl" rotWithShape="0" blurRad="101600" dist="38100" dir="8100000">
-              <a:srgbClr val="000000">
-                <a:alpha val="12000"/>
-              </a:srgbClr>
-            </a:outerShdw>
-          </a:effectLst>
+            <a:srgbClr val="E2E8F0"/>
+          </a:solidFill>
+          <a:ln w="12700">
+            <a:solidFill>
+              <a:srgbClr val="E2E8F0"/>
+            </a:solidFill>
+            <a:prstDash val="solid"/>
+          </a:ln>
         </p:spPr>
       </p:sp>
       <p:sp>
@@ -24607,8 +23743,8 @@
         </p:nvSpPr>
         <p:spPr>
           <a:xfrm>
-            <a:off x="6519672" y="2258568"/>
-            <a:ext cx="1828800" cy="292608"/>
+            <a:off x="365760" y="3273552"/>
+            <a:ext cx="1371600" cy="658368"/>
           </a:xfrm>
           <a:prstGeom prst="rect">
             <a:avLst/>
@@ -24624,73 +23760,100 @@
               <a:buNone/>
             </a:pPr>
             <a:r>
-              <a:rPr lang="en-US" sz="1300" b="1" dirty="0">
-                <a:solidFill>
-                  <a:srgbClr val="0F766E"/>
+              <a:rPr lang="en-US" sz="1100" b="1" dirty="0">
+                <a:solidFill>
+                  <a:srgbClr val="475569"/>
                 </a:solidFill>
                 <a:latin typeface="Trebuchet MS" pitchFamily="34" charset="0"/>
                 <a:ea typeface="Trebuchet MS" pitchFamily="34" charset="-122"/>
                 <a:cs typeface="Trebuchet MS" pitchFamily="34" charset="-120"/>
               </a:rPr>
-              <a:t>er</a:t>
-            </a:r>
-            <a:endParaRPr lang="en-US" sz="1300" dirty="0"/>
-          </a:p>
-        </p:txBody>
-      </p:sp>
-      <p:sp>
-        <p:nvSpPr>
-          <p:cNvPr id="24" name="Text 22"/>
-          <p:cNvSpPr/>
-          <p:nvPr/>
-        </p:nvSpPr>
-        <p:spPr>
-          <a:xfrm>
-            <a:off x="6519672" y="2569464"/>
-            <a:ext cx="1828800" cy="201168"/>
-          </a:xfrm>
-          <a:prstGeom prst="rect">
-            <a:avLst/>
-          </a:prstGeom>
-          <a:noFill/>
-          <a:ln/>
-        </p:spPr>
-        <p:txBody>
-          <a:bodyPr wrap="square" lIns="0" tIns="0" rIns="0" bIns="0" rtlCol="0" anchor="t"/>
-          <a:lstStyle/>
-          <a:p>
-            <a:pPr algn="ctr" indent="0" marL="0">
-              <a:buNone/>
-            </a:pPr>
-            <a:r>
-              <a:rPr lang="en-US" sz="850" dirty="0">
-                <a:solidFill>
-                  <a:srgbClr val="475569"/>
+              <a:t>Syllables</a:t>
+            </a:r>
+            <a:endParaRPr lang="en-US" sz="1100" dirty="0"/>
+          </a:p>
+        </p:txBody>
+      </p:sp>
+      <p:sp>
+        <p:nvSpPr>
+          <p:cNvPr id="24" name="Shape 22"/>
+          <p:cNvSpPr/>
+          <p:nvPr/>
+        </p:nvSpPr>
+        <p:spPr>
+          <a:xfrm>
+            <a:off x="1874520" y="3273552"/>
+            <a:ext cx="6903720" cy="658368"/>
+          </a:xfrm>
+          <a:prstGeom prst="rect">
+            <a:avLst>
+              <a:gd name="adj" fmla="val 8333"/>
+            </a:avLst>
+          </a:prstGeom>
+          <a:solidFill>
+            <a:srgbClr val="F8FAFC"/>
+          </a:solidFill>
+          <a:ln w="12700">
+            <a:solidFill>
+              <a:srgbClr val="E2E8F0"/>
+            </a:solidFill>
+            <a:prstDash val="dash"/>
+          </a:ln>
+        </p:spPr>
+      </p:sp>
+      <p:sp>
+        <p:nvSpPr>
+          <p:cNvPr id="25" name="Text 23"/>
+          <p:cNvSpPr/>
+          <p:nvPr/>
+        </p:nvSpPr>
+        <p:spPr>
+          <a:xfrm>
+            <a:off x="1874520" y="3273552"/>
+            <a:ext cx="6903720" cy="658368"/>
+          </a:xfrm>
+          <a:prstGeom prst="rect">
+            <a:avLst/>
+          </a:prstGeom>
+          <a:noFill/>
+          <a:ln/>
+        </p:spPr>
+        <p:txBody>
+          <a:bodyPr wrap="square" rtlCol="0" anchor="ctr"/>
+          <a:lstStyle/>
+          <a:p>
+            <a:pPr algn="ctr" indent="0" marL="0">
+              <a:buNone/>
+            </a:pPr>
+            <a:r>
+              <a:rPr lang="en-US" sz="1100" i="1" dirty="0">
+                <a:solidFill>
+                  <a:srgbClr val="CBD5E1"/>
                 </a:solidFill>
                 <a:latin typeface="Calibri" pitchFamily="34" charset="0"/>
                 <a:ea typeface="Calibri" pitchFamily="34" charset="-122"/>
                 <a:cs typeface="Calibri" pitchFamily="34" charset="-120"/>
               </a:rPr>
-              <a:t>one who does</a:t>
-            </a:r>
-            <a:endParaRPr lang="en-US" sz="850" dirty="0"/>
-          </a:p>
-        </p:txBody>
-      </p:sp>
-      <p:sp>
-        <p:nvSpPr>
-          <p:cNvPr id="25" name="Shape 23"/>
-          <p:cNvSpPr/>
-          <p:nvPr/>
-        </p:nvSpPr>
-        <p:spPr>
-          <a:xfrm>
-            <a:off x="365760" y="3273552"/>
-            <a:ext cx="1371600" cy="658368"/>
+              <a:t>Write here...</a:t>
+            </a:r>
+            <a:endParaRPr lang="en-US" sz="1100" dirty="0"/>
+          </a:p>
+        </p:txBody>
+      </p:sp>
+      <p:sp>
+        <p:nvSpPr>
+          <p:cNvPr id="26" name="Shape 24"/>
+          <p:cNvSpPr/>
+          <p:nvPr/>
+        </p:nvSpPr>
+        <p:spPr>
+          <a:xfrm>
+            <a:off x="365760" y="4096512"/>
+            <a:ext cx="1371600" cy="804672"/>
           </a:xfrm>
           <a:prstGeom prst="rect">
             <a:avLst>
-              <a:gd name="adj" fmla="val 8333"/>
+              <a:gd name="adj" fmla="val 6818"/>
             </a:avLst>
           </a:prstGeom>
           <a:solidFill>
@@ -24706,14 +23869,14 @@
       </p:sp>
       <p:sp>
         <p:nvSpPr>
-          <p:cNvPr id="26" name="Text 24"/>
-          <p:cNvSpPr/>
-          <p:nvPr/>
-        </p:nvSpPr>
-        <p:spPr>
-          <a:xfrm>
-            <a:off x="365760" y="3273552"/>
-            <a:ext cx="1371600" cy="658368"/>
+          <p:cNvPr id="27" name="Text 25"/>
+          <p:cNvSpPr/>
+          <p:nvPr/>
+        </p:nvSpPr>
+        <p:spPr>
+          <a:xfrm>
+            <a:off x="365760" y="4096512"/>
+            <a:ext cx="1371600" cy="804672"/>
           </a:xfrm>
           <a:prstGeom prst="rect">
             <a:avLst/>
@@ -24737,7 +23900,7 @@
                 <a:ea typeface="Trebuchet MS" pitchFamily="34" charset="-122"/>
                 <a:cs typeface="Trebuchet MS" pitchFamily="34" charset="-120"/>
               </a:rPr>
-              <a:t>Syllables</a:t>
+              <a:t>Phonemes</a:t>
             </a:r>
             <a:endParaRPr lang="en-US" sz="1100" dirty="0"/>
           </a:p>
@@ -24745,80 +23908,14 @@
       </p:sp>
       <p:sp>
         <p:nvSpPr>
-          <p:cNvPr id="27" name="Shape 25"/>
-          <p:cNvSpPr/>
-          <p:nvPr/>
-        </p:nvSpPr>
-        <p:spPr>
-          <a:xfrm>
-            <a:off x="1874520" y="3273552"/>
-            <a:ext cx="6903720" cy="658368"/>
-          </a:xfrm>
-          <a:prstGeom prst="rect">
-            <a:avLst>
-              <a:gd name="adj" fmla="val 8333"/>
-            </a:avLst>
-          </a:prstGeom>
-          <a:solidFill>
-            <a:srgbClr val="F8FAFC"/>
-          </a:solidFill>
-          <a:ln w="12700">
-            <a:solidFill>
-              <a:srgbClr val="E2E8F0"/>
-            </a:solidFill>
-            <a:prstDash val="dash"/>
-          </a:ln>
-        </p:spPr>
-      </p:sp>
-      <p:sp>
-        <p:nvSpPr>
-          <p:cNvPr id="28" name="Text 26"/>
-          <p:cNvSpPr/>
-          <p:nvPr/>
-        </p:nvSpPr>
-        <p:spPr>
-          <a:xfrm>
-            <a:off x="1874520" y="3273552"/>
-            <a:ext cx="6903720" cy="658368"/>
-          </a:xfrm>
-          <a:prstGeom prst="rect">
-            <a:avLst/>
-          </a:prstGeom>
-          <a:noFill/>
-          <a:ln/>
-        </p:spPr>
-        <p:txBody>
-          <a:bodyPr wrap="square" rtlCol="0" anchor="ctr"/>
-          <a:lstStyle/>
-          <a:p>
-            <a:pPr algn="ctr" indent="0" marL="0">
-              <a:buNone/>
-            </a:pPr>
-            <a:r>
-              <a:rPr lang="en-US" sz="1100" i="1" dirty="0">
-                <a:solidFill>
-                  <a:srgbClr val="CBD5E1"/>
-                </a:solidFill>
-                <a:latin typeface="Calibri" pitchFamily="34" charset="0"/>
-                <a:ea typeface="Calibri" pitchFamily="34" charset="-122"/>
-                <a:cs typeface="Calibri" pitchFamily="34" charset="-120"/>
-              </a:rPr>
-              <a:t>Write here...</a:t>
-            </a:r>
-            <a:endParaRPr lang="en-US" sz="1100" dirty="0"/>
-          </a:p>
-        </p:txBody>
-      </p:sp>
-      <p:sp>
-        <p:nvSpPr>
-          <p:cNvPr id="29" name="Shape 27"/>
-          <p:cNvSpPr/>
-          <p:nvPr/>
-        </p:nvSpPr>
-        <p:spPr>
-          <a:xfrm>
-            <a:off x="365760" y="4096512"/>
-            <a:ext cx="1371600" cy="804672"/>
+          <p:cNvPr id="28" name="Shape 26"/>
+          <p:cNvSpPr/>
+          <p:nvPr/>
+        </p:nvSpPr>
+        <p:spPr>
+          <a:xfrm>
+            <a:off x="1874520" y="4096512"/>
+            <a:ext cx="6903720" cy="804672"/>
           </a:xfrm>
           <a:prstGeom prst="rect">
             <a:avLst>
@@ -24826,85 +23923,19 @@
             </a:avLst>
           </a:prstGeom>
           <a:solidFill>
-            <a:srgbClr val="E2E8F0"/>
+            <a:srgbClr val="F8FAFC"/>
           </a:solidFill>
           <a:ln w="12700">
             <a:solidFill>
               <a:srgbClr val="E2E8F0"/>
             </a:solidFill>
-            <a:prstDash val="solid"/>
-          </a:ln>
-        </p:spPr>
-      </p:sp>
-      <p:sp>
-        <p:nvSpPr>
-          <p:cNvPr id="30" name="Text 28"/>
-          <p:cNvSpPr/>
-          <p:nvPr/>
-        </p:nvSpPr>
-        <p:spPr>
-          <a:xfrm>
-            <a:off x="365760" y="4096512"/>
-            <a:ext cx="1371600" cy="804672"/>
-          </a:xfrm>
-          <a:prstGeom prst="rect">
-            <a:avLst/>
-          </a:prstGeom>
-          <a:noFill/>
-          <a:ln/>
-        </p:spPr>
-        <p:txBody>
-          <a:bodyPr wrap="square" lIns="0" tIns="0" rIns="0" bIns="0" rtlCol="0" anchor="ctr"/>
-          <a:lstStyle/>
-          <a:p>
-            <a:pPr algn="ctr" indent="0" marL="0">
-              <a:buNone/>
-            </a:pPr>
-            <a:r>
-              <a:rPr lang="en-US" sz="1100" b="1" dirty="0">
-                <a:solidFill>
-                  <a:srgbClr val="475569"/>
-                </a:solidFill>
-                <a:latin typeface="Trebuchet MS" pitchFamily="34" charset="0"/>
-                <a:ea typeface="Trebuchet MS" pitchFamily="34" charset="-122"/>
-                <a:cs typeface="Trebuchet MS" pitchFamily="34" charset="-120"/>
-              </a:rPr>
-              <a:t>Phonemes</a:t>
-            </a:r>
-            <a:endParaRPr lang="en-US" sz="1100" dirty="0"/>
-          </a:p>
-        </p:txBody>
-      </p:sp>
-      <p:sp>
-        <p:nvSpPr>
-          <p:cNvPr id="31" name="Shape 29"/>
-          <p:cNvSpPr/>
-          <p:nvPr/>
-        </p:nvSpPr>
-        <p:spPr>
-          <a:xfrm>
-            <a:off x="1874520" y="4096512"/>
-            <a:ext cx="6903720" cy="804672"/>
-          </a:xfrm>
-          <a:prstGeom prst="rect">
-            <a:avLst>
-              <a:gd name="adj" fmla="val 6818"/>
-            </a:avLst>
-          </a:prstGeom>
-          <a:solidFill>
-            <a:srgbClr val="F8FAFC"/>
-          </a:solidFill>
-          <a:ln w="12700">
-            <a:solidFill>
-              <a:srgbClr val="E2E8F0"/>
-            </a:solidFill>
             <a:prstDash val="dash"/>
           </a:ln>
         </p:spPr>
       </p:sp>
       <p:sp>
         <p:nvSpPr>
-          <p:cNvPr id="32" name="Text 30"/>
+          <p:cNvPr id="29" name="Text 27"/>
           <p:cNvSpPr/>
           <p:nvPr/>
         </p:nvSpPr>
@@ -26085,7 +25116,7 @@
                 <a:ea typeface="Trebuchet MS" pitchFamily="34" charset="-122"/>
                 <a:cs typeface="Trebuchet MS" pitchFamily="34" charset="-120"/>
               </a:rPr>
-              <a:t>researcher</a:t>
+              <a:t>farmer</a:t>
             </a:r>
             <a:endParaRPr lang="en-US" sz="2800" dirty="0"/>
           </a:p>
@@ -26165,7 +25196,7 @@
         </p:nvSpPr>
         <p:spPr>
           <a:xfrm>
-            <a:off x="2221992" y="2258568"/>
+            <a:off x="2938272" y="2258568"/>
             <a:ext cx="1828800" cy="292608"/>
           </a:xfrm>
           <a:prstGeom prst="rect">
@@ -26199,7 +25230,7 @@
         </p:nvSpPr>
         <p:spPr>
           <a:xfrm>
-            <a:off x="2221992" y="2258568"/>
+            <a:off x="2938272" y="2258568"/>
             <a:ext cx="1828800" cy="292608"/>
           </a:xfrm>
           <a:prstGeom prst="rect">
@@ -26224,7 +25255,7 @@
                 <a:ea typeface="Trebuchet MS" pitchFamily="34" charset="-122"/>
                 <a:cs typeface="Trebuchet MS" pitchFamily="34" charset="-120"/>
               </a:rPr>
-              <a:t>re</a:t>
+              <a:t>farm</a:t>
             </a:r>
             <a:endParaRPr lang="en-US" sz="1300" dirty="0"/>
           </a:p>
@@ -26238,7 +25269,7 @@
         </p:nvSpPr>
         <p:spPr>
           <a:xfrm>
-            <a:off x="2221992" y="2569464"/>
+            <a:off x="2938272" y="2569464"/>
             <a:ext cx="1828800" cy="201168"/>
           </a:xfrm>
           <a:prstGeom prst="rect">
@@ -26263,7 +25294,7 @@
                 <a:ea typeface="Calibri" pitchFamily="34" charset="-122"/>
                 <a:cs typeface="Calibri" pitchFamily="34" charset="-120"/>
               </a:rPr>
-              <a:t>again</a:t>
+              <a:t>to cultivate land</a:t>
             </a:r>
             <a:endParaRPr lang="en-US" sz="850" dirty="0"/>
           </a:p>
@@ -26277,7 +25308,7 @@
         </p:nvSpPr>
         <p:spPr>
           <a:xfrm>
-            <a:off x="4370832" y="2258568"/>
+            <a:off x="5803392" y="2258568"/>
             <a:ext cx="1828800" cy="292608"/>
           </a:xfrm>
           <a:prstGeom prst="rect">
@@ -26286,11 +25317,11 @@
             </a:avLst>
           </a:prstGeom>
           <a:solidFill>
-            <a:srgbClr val="FCE7F3"/>
+            <a:srgbClr val="CCFBF1"/>
           </a:solidFill>
           <a:ln w="19050">
             <a:solidFill>
-              <a:srgbClr val="DB2777"/>
+              <a:srgbClr val="0D9488"/>
             </a:solidFill>
             <a:prstDash val="solid"/>
           </a:ln>
@@ -26311,7 +25342,7 @@
         </p:nvSpPr>
         <p:spPr>
           <a:xfrm>
-            <a:off x="4370832" y="2258568"/>
+            <a:off x="5803392" y="2258568"/>
             <a:ext cx="1828800" cy="292608"/>
           </a:xfrm>
           <a:prstGeom prst="rect">
@@ -26330,13 +25361,13 @@
             <a:r>
               <a:rPr lang="en-US" sz="1300" b="1" dirty="0">
                 <a:solidFill>
-                  <a:srgbClr val="9D174D"/>
+                  <a:srgbClr val="0F766E"/>
                 </a:solidFill>
                 <a:latin typeface="Trebuchet MS" pitchFamily="34" charset="0"/>
                 <a:ea typeface="Trebuchet MS" pitchFamily="34" charset="-122"/>
                 <a:cs typeface="Trebuchet MS" pitchFamily="34" charset="-120"/>
               </a:rPr>
-              <a:t>search</a:t>
+              <a:t>er</a:t>
             </a:r>
             <a:endParaRPr lang="en-US" sz="1300" dirty="0"/>
           </a:p>
@@ -26350,7 +25381,7 @@
         </p:nvSpPr>
         <p:spPr>
           <a:xfrm>
-            <a:off x="4370832" y="2569464"/>
+            <a:off x="5803392" y="2569464"/>
             <a:ext cx="1828800" cy="201168"/>
           </a:xfrm>
           <a:prstGeom prst="rect">
@@ -26375,7 +25406,7 @@
                 <a:ea typeface="Calibri" pitchFamily="34" charset="-122"/>
                 <a:cs typeface="Calibri" pitchFamily="34" charset="-120"/>
               </a:rPr>
-              <a:t>to look carefully</a:t>
+              <a:t>one who does</a:t>
             </a:r>
             <a:endParaRPr lang="en-US" sz="850" dirty="0"/>
           </a:p>
@@ -26389,30 +25420,23 @@
         </p:nvSpPr>
         <p:spPr>
           <a:xfrm>
-            <a:off x="6519672" y="2258568"/>
-            <a:ext cx="1828800" cy="292608"/>
+            <a:off x="365760" y="3273552"/>
+            <a:ext cx="1371600" cy="658368"/>
           </a:xfrm>
           <a:prstGeom prst="rect">
             <a:avLst>
-              <a:gd name="adj" fmla="val 25000"/>
+              <a:gd name="adj" fmla="val 8333"/>
             </a:avLst>
           </a:prstGeom>
           <a:solidFill>
-            <a:srgbClr val="CCFBF1"/>
-          </a:solidFill>
-          <a:ln w="19050">
-            <a:solidFill>
-              <a:srgbClr val="0D9488"/>
-            </a:solidFill>
-            <a:prstDash val="solid"/>
-          </a:ln>
-          <a:effectLst>
-            <a:outerShdw sx="100000" sy="100000" kx="0" ky="0" algn="bl" rotWithShape="0" blurRad="101600" dist="38100" dir="8100000">
-              <a:srgbClr val="000000">
-                <a:alpha val="12000"/>
-              </a:srgbClr>
-            </a:outerShdw>
-          </a:effectLst>
+            <a:srgbClr val="E2E8F0"/>
+          </a:solidFill>
+          <a:ln w="12700">
+            <a:solidFill>
+              <a:srgbClr val="E2E8F0"/>
+            </a:solidFill>
+            <a:prstDash val="solid"/>
+          </a:ln>
         </p:spPr>
       </p:sp>
       <p:sp>
@@ -26423,8 +25447,8 @@
         </p:nvSpPr>
         <p:spPr>
           <a:xfrm>
-            <a:off x="6519672" y="2258568"/>
-            <a:ext cx="1828800" cy="292608"/>
+            <a:off x="365760" y="3273552"/>
+            <a:ext cx="1371600" cy="658368"/>
           </a:xfrm>
           <a:prstGeom prst="rect">
             <a:avLst/>
@@ -26440,69 +25464,30 @@
               <a:buNone/>
             </a:pPr>
             <a:r>
-              <a:rPr lang="en-US" sz="1300" b="1" dirty="0">
-                <a:solidFill>
-                  <a:srgbClr val="0F766E"/>
+              <a:rPr lang="en-US" sz="1100" b="1" dirty="0">
+                <a:solidFill>
+                  <a:srgbClr val="475569"/>
                 </a:solidFill>
                 <a:latin typeface="Trebuchet MS" pitchFamily="34" charset="0"/>
                 <a:ea typeface="Trebuchet MS" pitchFamily="34" charset="-122"/>
                 <a:cs typeface="Trebuchet MS" pitchFamily="34" charset="-120"/>
               </a:rPr>
-              <a:t>er</a:t>
-            </a:r>
-            <a:endParaRPr lang="en-US" sz="1300" dirty="0"/>
-          </a:p>
-        </p:txBody>
-      </p:sp>
-      <p:sp>
-        <p:nvSpPr>
-          <p:cNvPr id="24" name="Text 22"/>
-          <p:cNvSpPr/>
-          <p:nvPr/>
-        </p:nvSpPr>
-        <p:spPr>
-          <a:xfrm>
-            <a:off x="6519672" y="2569464"/>
-            <a:ext cx="1828800" cy="201168"/>
-          </a:xfrm>
-          <a:prstGeom prst="rect">
-            <a:avLst/>
-          </a:prstGeom>
-          <a:noFill/>
-          <a:ln/>
-        </p:spPr>
-        <p:txBody>
-          <a:bodyPr wrap="square" lIns="0" tIns="0" rIns="0" bIns="0" rtlCol="0" anchor="t"/>
-          <a:lstStyle/>
-          <a:p>
-            <a:pPr algn="ctr" indent="0" marL="0">
-              <a:buNone/>
-            </a:pPr>
-            <a:r>
-              <a:rPr lang="en-US" sz="850" dirty="0">
-                <a:solidFill>
-                  <a:srgbClr val="475569"/>
-                </a:solidFill>
-                <a:latin typeface="Calibri" pitchFamily="34" charset="0"/>
-                <a:ea typeface="Calibri" pitchFamily="34" charset="-122"/>
-                <a:cs typeface="Calibri" pitchFamily="34" charset="-120"/>
-              </a:rPr>
-              <a:t>one who does</a:t>
-            </a:r>
-            <a:endParaRPr lang="en-US" sz="850" dirty="0"/>
-          </a:p>
-        </p:txBody>
-      </p:sp>
-      <p:sp>
-        <p:nvSpPr>
-          <p:cNvPr id="25" name="Shape 23"/>
-          <p:cNvSpPr/>
-          <p:nvPr/>
-        </p:nvSpPr>
-        <p:spPr>
-          <a:xfrm>
-            <a:off x="365760" y="3273552"/>
-            <a:ext cx="1371600" cy="658368"/>
+              <a:t>Syllables</a:t>
+            </a:r>
+            <a:endParaRPr lang="en-US" sz="1100" dirty="0"/>
+          </a:p>
+        </p:txBody>
+      </p:sp>
+      <p:sp>
+        <p:nvSpPr>
+          <p:cNvPr id="24" name="Shape 22"/>
+          <p:cNvSpPr/>
+          <p:nvPr/>
+        </p:nvSpPr>
+        <p:spPr>
+          <a:xfrm>
+            <a:off x="1874520" y="3273552"/>
+            <a:ext cx="6903720" cy="658368"/>
           </a:xfrm>
           <a:prstGeom prst="rect">
             <a:avLst>
@@ -26510,11 +25495,38 @@
             </a:avLst>
           </a:prstGeom>
           <a:solidFill>
-            <a:srgbClr val="E2E8F0"/>
-          </a:solidFill>
-          <a:ln w="12700">
-            <a:solidFill>
-              <a:srgbClr val="E2E8F0"/>
+            <a:srgbClr val="CCFBF1"/>
+          </a:solidFill>
+          <a:ln w="12700">
+            <a:solidFill>
+              <a:srgbClr val="0D9488"/>
+            </a:solidFill>
+            <a:prstDash val="solid"/>
+          </a:ln>
+        </p:spPr>
+      </p:sp>
+      <p:sp>
+        <p:nvSpPr>
+          <p:cNvPr id="25" name="Shape 23"/>
+          <p:cNvSpPr/>
+          <p:nvPr/>
+        </p:nvSpPr>
+        <p:spPr>
+          <a:xfrm>
+            <a:off x="2999232" y="3364992"/>
+            <a:ext cx="1645920" cy="475488"/>
+          </a:xfrm>
+          <a:prstGeom prst="rect">
+            <a:avLst>
+              <a:gd name="adj" fmla="val 9615"/>
+            </a:avLst>
+          </a:prstGeom>
+          <a:solidFill>
+            <a:srgbClr val="FFFFFF"/>
+          </a:solidFill>
+          <a:ln w="12700">
+            <a:solidFill>
+              <a:srgbClr val="0D9488"/>
             </a:solidFill>
             <a:prstDash val="solid"/>
           </a:ln>
@@ -26528,8 +25540,8 @@
         </p:nvSpPr>
         <p:spPr>
           <a:xfrm>
-            <a:off x="365760" y="3273552"/>
-            <a:ext cx="1371600" cy="658368"/>
+            <a:off x="2999232" y="3364992"/>
+            <a:ext cx="1645920" cy="475488"/>
           </a:xfrm>
           <a:prstGeom prst="rect">
             <a:avLst/>
@@ -26545,46 +25557,58 @@
               <a:buNone/>
             </a:pPr>
             <a:r>
-              <a:rPr lang="en-US" sz="1100" b="1" dirty="0">
-                <a:solidFill>
-                  <a:srgbClr val="475569"/>
+              <a:rPr lang="en-US" sz="1400" b="1" dirty="0">
+                <a:solidFill>
+                  <a:srgbClr val="0D9488"/>
                 </a:solidFill>
                 <a:latin typeface="Trebuchet MS" pitchFamily="34" charset="0"/>
                 <a:ea typeface="Trebuchet MS" pitchFamily="34" charset="-122"/>
                 <a:cs typeface="Trebuchet MS" pitchFamily="34" charset="-120"/>
               </a:rPr>
-              <a:t>Syllables</a:t>
-            </a:r>
-            <a:endParaRPr lang="en-US" sz="1100" dirty="0"/>
-          </a:p>
-        </p:txBody>
-      </p:sp>
-      <p:sp>
-        <p:nvSpPr>
-          <p:cNvPr id="27" name="Shape 25"/>
-          <p:cNvSpPr/>
-          <p:nvPr/>
-        </p:nvSpPr>
-        <p:spPr>
-          <a:xfrm>
-            <a:off x="1874520" y="3273552"/>
-            <a:ext cx="6903720" cy="658368"/>
-          </a:xfrm>
-          <a:prstGeom prst="rect">
-            <a:avLst>
-              <a:gd name="adj" fmla="val 8333"/>
-            </a:avLst>
-          </a:prstGeom>
-          <a:solidFill>
-            <a:srgbClr val="CCFBF1"/>
-          </a:solidFill>
-          <a:ln w="12700">
-            <a:solidFill>
-              <a:srgbClr val="0D9488"/>
-            </a:solidFill>
-            <a:prstDash val="solid"/>
-          </a:ln>
-        </p:spPr>
+              <a:t>far</a:t>
+            </a:r>
+            <a:endParaRPr lang="en-US" sz="1400" dirty="0"/>
+          </a:p>
+        </p:txBody>
+      </p:sp>
+      <p:sp>
+        <p:nvSpPr>
+          <p:cNvPr id="27" name="Text 25"/>
+          <p:cNvSpPr/>
+          <p:nvPr/>
+        </p:nvSpPr>
+        <p:spPr>
+          <a:xfrm>
+            <a:off x="4645152" y="3364992"/>
+            <a:ext cx="1097280" cy="475488"/>
+          </a:xfrm>
+          <a:prstGeom prst="rect">
+            <a:avLst/>
+          </a:prstGeom>
+          <a:noFill/>
+          <a:ln/>
+        </p:spPr>
+        <p:txBody>
+          <a:bodyPr wrap="square" lIns="0" tIns="0" rIns="0" bIns="0" rtlCol="0" anchor="ctr"/>
+          <a:lstStyle/>
+          <a:p>
+            <a:pPr algn="ctr" indent="0" marL="0">
+              <a:buNone/>
+            </a:pPr>
+            <a:r>
+              <a:rPr lang="en-US" sz="1600" b="1" dirty="0">
+                <a:solidFill>
+                  <a:srgbClr val="0D9488"/>
+                </a:solidFill>
+                <a:latin typeface="Trebuchet MS" pitchFamily="34" charset="0"/>
+                <a:ea typeface="Trebuchet MS" pitchFamily="34" charset="-122"/>
+                <a:cs typeface="Trebuchet MS" pitchFamily="34" charset="-120"/>
+              </a:rPr>
+              <a:t>·</a:t>
+            </a:r>
+            <a:endParaRPr lang="en-US" sz="1600" dirty="0"/>
+          </a:p>
+        </p:txBody>
       </p:sp>
       <p:sp>
         <p:nvSpPr>
@@ -26594,7 +25618,7 @@
         </p:nvSpPr>
         <p:spPr>
           <a:xfrm>
-            <a:off x="2313432" y="3364992"/>
+            <a:off x="5742432" y="3364992"/>
             <a:ext cx="1645920" cy="475488"/>
           </a:xfrm>
           <a:prstGeom prst="rect">
@@ -26621,7 +25645,7 @@
         </p:nvSpPr>
         <p:spPr>
           <a:xfrm>
-            <a:off x="2313432" y="3364992"/>
+            <a:off x="5742432" y="3364992"/>
             <a:ext cx="1645920" cy="475488"/>
           </a:xfrm>
           <a:prstGeom prst="rect">
@@ -26646,7 +25670,7 @@
                 <a:ea typeface="Trebuchet MS" pitchFamily="34" charset="-122"/>
                 <a:cs typeface="Trebuchet MS" pitchFamily="34" charset="-120"/>
               </a:rPr>
-              <a:t>re</a:t>
+              <a:t>mer</a:t>
             </a:r>
             <a:endParaRPr lang="en-US" sz="1400" dirty="0"/>
           </a:p>
@@ -26654,14 +25678,41 @@
       </p:sp>
       <p:sp>
         <p:nvSpPr>
-          <p:cNvPr id="30" name="Text 28"/>
-          <p:cNvSpPr/>
-          <p:nvPr/>
-        </p:nvSpPr>
-        <p:spPr>
-          <a:xfrm>
-            <a:off x="3959352" y="3364992"/>
-            <a:ext cx="411480" cy="475488"/>
+          <p:cNvPr id="30" name="Shape 28"/>
+          <p:cNvSpPr/>
+          <p:nvPr/>
+        </p:nvSpPr>
+        <p:spPr>
+          <a:xfrm>
+            <a:off x="365760" y="4096512"/>
+            <a:ext cx="1371600" cy="804672"/>
+          </a:xfrm>
+          <a:prstGeom prst="rect">
+            <a:avLst>
+              <a:gd name="adj" fmla="val 6818"/>
+            </a:avLst>
+          </a:prstGeom>
+          <a:solidFill>
+            <a:srgbClr val="E2E8F0"/>
+          </a:solidFill>
+          <a:ln w="12700">
+            <a:solidFill>
+              <a:srgbClr val="E2E8F0"/>
+            </a:solidFill>
+            <a:prstDash val="solid"/>
+          </a:ln>
+        </p:spPr>
+      </p:sp>
+      <p:sp>
+        <p:nvSpPr>
+          <p:cNvPr id="31" name="Text 29"/>
+          <p:cNvSpPr/>
+          <p:nvPr/>
+        </p:nvSpPr>
+        <p:spPr>
+          <a:xfrm>
+            <a:off x="365760" y="4096512"/>
+            <a:ext cx="1371600" cy="804672"/>
           </a:xfrm>
           <a:prstGeom prst="rect">
             <a:avLst/>
@@ -26677,201 +25728,30 @@
               <a:buNone/>
             </a:pPr>
             <a:r>
-              <a:rPr lang="en-US" sz="1600" b="1" dirty="0">
-                <a:solidFill>
-                  <a:srgbClr val="0D9488"/>
+              <a:rPr lang="en-US" sz="1100" b="1" dirty="0">
+                <a:solidFill>
+                  <a:srgbClr val="475569"/>
                 </a:solidFill>
                 <a:latin typeface="Trebuchet MS" pitchFamily="34" charset="0"/>
                 <a:ea typeface="Trebuchet MS" pitchFamily="34" charset="-122"/>
                 <a:cs typeface="Trebuchet MS" pitchFamily="34" charset="-120"/>
               </a:rPr>
-              <a:t>·</a:t>
-            </a:r>
-            <a:endParaRPr lang="en-US" sz="1600" dirty="0"/>
-          </a:p>
-        </p:txBody>
-      </p:sp>
-      <p:sp>
-        <p:nvSpPr>
-          <p:cNvPr id="31" name="Shape 29"/>
-          <p:cNvSpPr/>
-          <p:nvPr/>
-        </p:nvSpPr>
-        <p:spPr>
-          <a:xfrm>
-            <a:off x="4370832" y="3364992"/>
-            <a:ext cx="1645920" cy="475488"/>
-          </a:xfrm>
-          <a:prstGeom prst="rect">
-            <a:avLst>
-              <a:gd name="adj" fmla="val 9615"/>
-            </a:avLst>
-          </a:prstGeom>
-          <a:solidFill>
-            <a:srgbClr val="FFFFFF"/>
-          </a:solidFill>
-          <a:ln w="12700">
-            <a:solidFill>
-              <a:srgbClr val="0D9488"/>
-            </a:solidFill>
-            <a:prstDash val="solid"/>
-          </a:ln>
-        </p:spPr>
-      </p:sp>
-      <p:sp>
-        <p:nvSpPr>
-          <p:cNvPr id="32" name="Text 30"/>
-          <p:cNvSpPr/>
-          <p:nvPr/>
-        </p:nvSpPr>
-        <p:spPr>
-          <a:xfrm>
-            <a:off x="4370832" y="3364992"/>
-            <a:ext cx="1645920" cy="475488"/>
-          </a:xfrm>
-          <a:prstGeom prst="rect">
-            <a:avLst/>
-          </a:prstGeom>
-          <a:noFill/>
-          <a:ln/>
-        </p:spPr>
-        <p:txBody>
-          <a:bodyPr wrap="square" lIns="0" tIns="0" rIns="0" bIns="0" rtlCol="0" anchor="ctr"/>
-          <a:lstStyle/>
-          <a:p>
-            <a:pPr algn="ctr" indent="0" marL="0">
-              <a:buNone/>
-            </a:pPr>
-            <a:r>
-              <a:rPr lang="en-US" sz="1400" b="1" dirty="0">
-                <a:solidFill>
-                  <a:srgbClr val="0D9488"/>
-                </a:solidFill>
-                <a:latin typeface="Trebuchet MS" pitchFamily="34" charset="0"/>
-                <a:ea typeface="Trebuchet MS" pitchFamily="34" charset="-122"/>
-                <a:cs typeface="Trebuchet MS" pitchFamily="34" charset="-120"/>
-              </a:rPr>
-              <a:t>search</a:t>
-            </a:r>
-            <a:endParaRPr lang="en-US" sz="1400" dirty="0"/>
-          </a:p>
-        </p:txBody>
-      </p:sp>
-      <p:sp>
-        <p:nvSpPr>
-          <p:cNvPr id="33" name="Text 31"/>
-          <p:cNvSpPr/>
-          <p:nvPr/>
-        </p:nvSpPr>
-        <p:spPr>
-          <a:xfrm>
-            <a:off x="6016752" y="3364992"/>
-            <a:ext cx="411480" cy="475488"/>
-          </a:xfrm>
-          <a:prstGeom prst="rect">
-            <a:avLst/>
-          </a:prstGeom>
-          <a:noFill/>
-          <a:ln/>
-        </p:spPr>
-        <p:txBody>
-          <a:bodyPr wrap="square" lIns="0" tIns="0" rIns="0" bIns="0" rtlCol="0" anchor="ctr"/>
-          <a:lstStyle/>
-          <a:p>
-            <a:pPr algn="ctr" indent="0" marL="0">
-              <a:buNone/>
-            </a:pPr>
-            <a:r>
-              <a:rPr lang="en-US" sz="1600" b="1" dirty="0">
-                <a:solidFill>
-                  <a:srgbClr val="0D9488"/>
-                </a:solidFill>
-                <a:latin typeface="Trebuchet MS" pitchFamily="34" charset="0"/>
-                <a:ea typeface="Trebuchet MS" pitchFamily="34" charset="-122"/>
-                <a:cs typeface="Trebuchet MS" pitchFamily="34" charset="-120"/>
-              </a:rPr>
-              <a:t>·</a:t>
-            </a:r>
-            <a:endParaRPr lang="en-US" sz="1600" dirty="0"/>
-          </a:p>
-        </p:txBody>
-      </p:sp>
-      <p:sp>
-        <p:nvSpPr>
-          <p:cNvPr id="34" name="Shape 32"/>
-          <p:cNvSpPr/>
-          <p:nvPr/>
-        </p:nvSpPr>
-        <p:spPr>
-          <a:xfrm>
-            <a:off x="6428232" y="3364992"/>
-            <a:ext cx="1645920" cy="475488"/>
-          </a:xfrm>
-          <a:prstGeom prst="rect">
-            <a:avLst>
-              <a:gd name="adj" fmla="val 9615"/>
-            </a:avLst>
-          </a:prstGeom>
-          <a:solidFill>
-            <a:srgbClr val="FFFFFF"/>
-          </a:solidFill>
-          <a:ln w="12700">
-            <a:solidFill>
-              <a:srgbClr val="0D9488"/>
-            </a:solidFill>
-            <a:prstDash val="solid"/>
-          </a:ln>
-        </p:spPr>
-      </p:sp>
-      <p:sp>
-        <p:nvSpPr>
-          <p:cNvPr id="35" name="Text 33"/>
-          <p:cNvSpPr/>
-          <p:nvPr/>
-        </p:nvSpPr>
-        <p:spPr>
-          <a:xfrm>
-            <a:off x="6428232" y="3364992"/>
-            <a:ext cx="1645920" cy="475488"/>
-          </a:xfrm>
-          <a:prstGeom prst="rect">
-            <a:avLst/>
-          </a:prstGeom>
-          <a:noFill/>
-          <a:ln/>
-        </p:spPr>
-        <p:txBody>
-          <a:bodyPr wrap="square" lIns="0" tIns="0" rIns="0" bIns="0" rtlCol="0" anchor="ctr"/>
-          <a:lstStyle/>
-          <a:p>
-            <a:pPr algn="ctr" indent="0" marL="0">
-              <a:buNone/>
-            </a:pPr>
-            <a:r>
-              <a:rPr lang="en-US" sz="1400" b="1" dirty="0">
-                <a:solidFill>
-                  <a:srgbClr val="0D9488"/>
-                </a:solidFill>
-                <a:latin typeface="Trebuchet MS" pitchFamily="34" charset="0"/>
-                <a:ea typeface="Trebuchet MS" pitchFamily="34" charset="-122"/>
-                <a:cs typeface="Trebuchet MS" pitchFamily="34" charset="-120"/>
-              </a:rPr>
-              <a:t>er</a:t>
-            </a:r>
-            <a:endParaRPr lang="en-US" sz="1400" dirty="0"/>
-          </a:p>
-        </p:txBody>
-      </p:sp>
-      <p:sp>
-        <p:nvSpPr>
-          <p:cNvPr id="36" name="Shape 34"/>
-          <p:cNvSpPr/>
-          <p:nvPr/>
-        </p:nvSpPr>
-        <p:spPr>
-          <a:xfrm>
-            <a:off x="365760" y="4096512"/>
-            <a:ext cx="1371600" cy="804672"/>
+              <a:t>Phonemes</a:t>
+            </a:r>
+            <a:endParaRPr lang="en-US" sz="1100" dirty="0"/>
+          </a:p>
+        </p:txBody>
+      </p:sp>
+      <p:sp>
+        <p:nvSpPr>
+          <p:cNvPr id="32" name="Shape 30"/>
+          <p:cNvSpPr/>
+          <p:nvPr/>
+        </p:nvSpPr>
+        <p:spPr>
+          <a:xfrm>
+            <a:off x="1874520" y="4096512"/>
+            <a:ext cx="6903720" cy="804672"/>
           </a:xfrm>
           <a:prstGeom prst="rect">
             <a:avLst>
@@ -26879,85 +25759,19 @@
             </a:avLst>
           </a:prstGeom>
           <a:solidFill>
-            <a:srgbClr val="E2E8F0"/>
+            <a:srgbClr val="F8FAFC"/>
           </a:solidFill>
           <a:ln w="12700">
             <a:solidFill>
               <a:srgbClr val="E2E8F0"/>
             </a:solidFill>
-            <a:prstDash val="solid"/>
-          </a:ln>
-        </p:spPr>
-      </p:sp>
-      <p:sp>
-        <p:nvSpPr>
-          <p:cNvPr id="37" name="Text 35"/>
-          <p:cNvSpPr/>
-          <p:nvPr/>
-        </p:nvSpPr>
-        <p:spPr>
-          <a:xfrm>
-            <a:off x="365760" y="4096512"/>
-            <a:ext cx="1371600" cy="804672"/>
-          </a:xfrm>
-          <a:prstGeom prst="rect">
-            <a:avLst/>
-          </a:prstGeom>
-          <a:noFill/>
-          <a:ln/>
-        </p:spPr>
-        <p:txBody>
-          <a:bodyPr wrap="square" lIns="0" tIns="0" rIns="0" bIns="0" rtlCol="0" anchor="ctr"/>
-          <a:lstStyle/>
-          <a:p>
-            <a:pPr algn="ctr" indent="0" marL="0">
-              <a:buNone/>
-            </a:pPr>
-            <a:r>
-              <a:rPr lang="en-US" sz="1100" b="1" dirty="0">
-                <a:solidFill>
-                  <a:srgbClr val="475569"/>
-                </a:solidFill>
-                <a:latin typeface="Trebuchet MS" pitchFamily="34" charset="0"/>
-                <a:ea typeface="Trebuchet MS" pitchFamily="34" charset="-122"/>
-                <a:cs typeface="Trebuchet MS" pitchFamily="34" charset="-120"/>
-              </a:rPr>
-              <a:t>Phonemes</a:t>
-            </a:r>
-            <a:endParaRPr lang="en-US" sz="1100" dirty="0"/>
-          </a:p>
-        </p:txBody>
-      </p:sp>
-      <p:sp>
-        <p:nvSpPr>
-          <p:cNvPr id="38" name="Shape 36"/>
-          <p:cNvSpPr/>
-          <p:nvPr/>
-        </p:nvSpPr>
-        <p:spPr>
-          <a:xfrm>
-            <a:off x="1874520" y="4096512"/>
-            <a:ext cx="6903720" cy="804672"/>
-          </a:xfrm>
-          <a:prstGeom prst="rect">
-            <a:avLst>
-              <a:gd name="adj" fmla="val 6818"/>
-            </a:avLst>
-          </a:prstGeom>
-          <a:solidFill>
-            <a:srgbClr val="F8FAFC"/>
-          </a:solidFill>
-          <a:ln w="12700">
-            <a:solidFill>
-              <a:srgbClr val="E2E8F0"/>
-            </a:solidFill>
             <a:prstDash val="dash"/>
           </a:ln>
         </p:spPr>
       </p:sp>
       <p:sp>
         <p:nvSpPr>
-          <p:cNvPr id="39" name="Text 37"/>
+          <p:cNvPr id="33" name="Text 31"/>
           <p:cNvSpPr/>
           <p:nvPr/>
         </p:nvSpPr>
@@ -27419,7 +26233,7 @@
                 <a:ea typeface="Trebuchet MS" pitchFamily="34" charset="-122"/>
                 <a:cs typeface="Trebuchet MS" pitchFamily="34" charset="-120"/>
               </a:rPr>
-              <a:t>researcher</a:t>
+              <a:t>farmer</a:t>
             </a:r>
             <a:endParaRPr lang="en-US" sz="2800" dirty="0"/>
           </a:p>
@@ -27499,7 +26313,7 @@
         </p:nvSpPr>
         <p:spPr>
           <a:xfrm>
-            <a:off x="2221992" y="2258568"/>
+            <a:off x="2938272" y="2258568"/>
             <a:ext cx="1828800" cy="292608"/>
           </a:xfrm>
           <a:prstGeom prst="rect">
@@ -27533,7 +26347,7 @@
         </p:nvSpPr>
         <p:spPr>
           <a:xfrm>
-            <a:off x="2221992" y="2258568"/>
+            <a:off x="2938272" y="2258568"/>
             <a:ext cx="1828800" cy="292608"/>
           </a:xfrm>
           <a:prstGeom prst="rect">
@@ -27558,7 +26372,7 @@
                 <a:ea typeface="Trebuchet MS" pitchFamily="34" charset="-122"/>
                 <a:cs typeface="Trebuchet MS" pitchFamily="34" charset="-120"/>
               </a:rPr>
-              <a:t>re</a:t>
+              <a:t>farm</a:t>
             </a:r>
             <a:endParaRPr lang="en-US" sz="1300" dirty="0"/>
           </a:p>
@@ -27572,7 +26386,7 @@
         </p:nvSpPr>
         <p:spPr>
           <a:xfrm>
-            <a:off x="2221992" y="2569464"/>
+            <a:off x="2938272" y="2569464"/>
             <a:ext cx="1828800" cy="201168"/>
           </a:xfrm>
           <a:prstGeom prst="rect">
@@ -27597,7 +26411,7 @@
                 <a:ea typeface="Calibri" pitchFamily="34" charset="-122"/>
                 <a:cs typeface="Calibri" pitchFamily="34" charset="-120"/>
               </a:rPr>
-              <a:t>again</a:t>
+              <a:t>to cultivate land</a:t>
             </a:r>
             <a:endParaRPr lang="en-US" sz="850" dirty="0"/>
           </a:p>
@@ -27611,7 +26425,7 @@
         </p:nvSpPr>
         <p:spPr>
           <a:xfrm>
-            <a:off x="4370832" y="2258568"/>
+            <a:off x="5803392" y="2258568"/>
             <a:ext cx="1828800" cy="292608"/>
           </a:xfrm>
           <a:prstGeom prst="rect">
@@ -27620,11 +26434,11 @@
             </a:avLst>
           </a:prstGeom>
           <a:solidFill>
-            <a:srgbClr val="FCE7F3"/>
+            <a:srgbClr val="CCFBF1"/>
           </a:solidFill>
           <a:ln w="19050">
             <a:solidFill>
-              <a:srgbClr val="DB2777"/>
+              <a:srgbClr val="0D9488"/>
             </a:solidFill>
             <a:prstDash val="solid"/>
           </a:ln>
@@ -27645,7 +26459,7 @@
         </p:nvSpPr>
         <p:spPr>
           <a:xfrm>
-            <a:off x="4370832" y="2258568"/>
+            <a:off x="5803392" y="2258568"/>
             <a:ext cx="1828800" cy="292608"/>
           </a:xfrm>
           <a:prstGeom prst="rect">
@@ -27664,13 +26478,13 @@
             <a:r>
               <a:rPr lang="en-US" sz="1300" b="1" dirty="0">
                 <a:solidFill>
-                  <a:srgbClr val="9D174D"/>
+                  <a:srgbClr val="0F766E"/>
                 </a:solidFill>
                 <a:latin typeface="Trebuchet MS" pitchFamily="34" charset="0"/>
                 <a:ea typeface="Trebuchet MS" pitchFamily="34" charset="-122"/>
                 <a:cs typeface="Trebuchet MS" pitchFamily="34" charset="-120"/>
               </a:rPr>
-              <a:t>search</a:t>
+              <a:t>er</a:t>
             </a:r>
             <a:endParaRPr lang="en-US" sz="1300" dirty="0"/>
           </a:p>
@@ -27684,7 +26498,7 @@
         </p:nvSpPr>
         <p:spPr>
           <a:xfrm>
-            <a:off x="4370832" y="2569464"/>
+            <a:off x="5803392" y="2569464"/>
             <a:ext cx="1828800" cy="201168"/>
           </a:xfrm>
           <a:prstGeom prst="rect">
@@ -27709,7 +26523,7 @@
                 <a:ea typeface="Calibri" pitchFamily="34" charset="-122"/>
                 <a:cs typeface="Calibri" pitchFamily="34" charset="-120"/>
               </a:rPr>
-              <a:t>to look carefully</a:t>
+              <a:t>one who does</a:t>
             </a:r>
             <a:endParaRPr lang="en-US" sz="850" dirty="0"/>
           </a:p>
@@ -27723,30 +26537,23 @@
         </p:nvSpPr>
         <p:spPr>
           <a:xfrm>
-            <a:off x="6519672" y="2258568"/>
-            <a:ext cx="1828800" cy="292608"/>
+            <a:off x="365760" y="3273552"/>
+            <a:ext cx="1371600" cy="658368"/>
           </a:xfrm>
           <a:prstGeom prst="rect">
             <a:avLst>
-              <a:gd name="adj" fmla="val 25000"/>
+              <a:gd name="adj" fmla="val 8333"/>
             </a:avLst>
           </a:prstGeom>
           <a:solidFill>
-            <a:srgbClr val="CCFBF1"/>
-          </a:solidFill>
-          <a:ln w="19050">
-            <a:solidFill>
-              <a:srgbClr val="0D9488"/>
-            </a:solidFill>
-            <a:prstDash val="solid"/>
-          </a:ln>
-          <a:effectLst>
-            <a:outerShdw sx="100000" sy="100000" kx="0" ky="0" algn="bl" rotWithShape="0" blurRad="101600" dist="38100" dir="8100000">
-              <a:srgbClr val="000000">
-                <a:alpha val="12000"/>
-              </a:srgbClr>
-            </a:outerShdw>
-          </a:effectLst>
+            <a:srgbClr val="E2E8F0"/>
+          </a:solidFill>
+          <a:ln w="12700">
+            <a:solidFill>
+              <a:srgbClr val="E2E8F0"/>
+            </a:solidFill>
+            <a:prstDash val="solid"/>
+          </a:ln>
         </p:spPr>
       </p:sp>
       <p:sp>
@@ -27757,8 +26564,8 @@
         </p:nvSpPr>
         <p:spPr>
           <a:xfrm>
-            <a:off x="6519672" y="2258568"/>
-            <a:ext cx="1828800" cy="292608"/>
+            <a:off x="365760" y="3273552"/>
+            <a:ext cx="1371600" cy="658368"/>
           </a:xfrm>
           <a:prstGeom prst="rect">
             <a:avLst/>
@@ -27774,69 +26581,30 @@
               <a:buNone/>
             </a:pPr>
             <a:r>
-              <a:rPr lang="en-US" sz="1300" b="1" dirty="0">
-                <a:solidFill>
-                  <a:srgbClr val="0F766E"/>
+              <a:rPr lang="en-US" sz="1100" b="1" dirty="0">
+                <a:solidFill>
+                  <a:srgbClr val="475569"/>
                 </a:solidFill>
                 <a:latin typeface="Trebuchet MS" pitchFamily="34" charset="0"/>
                 <a:ea typeface="Trebuchet MS" pitchFamily="34" charset="-122"/>
                 <a:cs typeface="Trebuchet MS" pitchFamily="34" charset="-120"/>
               </a:rPr>
-              <a:t>er</a:t>
-            </a:r>
-            <a:endParaRPr lang="en-US" sz="1300" dirty="0"/>
-          </a:p>
-        </p:txBody>
-      </p:sp>
-      <p:sp>
-        <p:nvSpPr>
-          <p:cNvPr id="24" name="Text 22"/>
-          <p:cNvSpPr/>
-          <p:nvPr/>
-        </p:nvSpPr>
-        <p:spPr>
-          <a:xfrm>
-            <a:off x="6519672" y="2569464"/>
-            <a:ext cx="1828800" cy="201168"/>
-          </a:xfrm>
-          <a:prstGeom prst="rect">
-            <a:avLst/>
-          </a:prstGeom>
-          <a:noFill/>
-          <a:ln/>
-        </p:spPr>
-        <p:txBody>
-          <a:bodyPr wrap="square" lIns="0" tIns="0" rIns="0" bIns="0" rtlCol="0" anchor="t"/>
-          <a:lstStyle/>
-          <a:p>
-            <a:pPr algn="ctr" indent="0" marL="0">
-              <a:buNone/>
-            </a:pPr>
-            <a:r>
-              <a:rPr lang="en-US" sz="850" dirty="0">
-                <a:solidFill>
-                  <a:srgbClr val="475569"/>
-                </a:solidFill>
-                <a:latin typeface="Calibri" pitchFamily="34" charset="0"/>
-                <a:ea typeface="Calibri" pitchFamily="34" charset="-122"/>
-                <a:cs typeface="Calibri" pitchFamily="34" charset="-120"/>
-              </a:rPr>
-              <a:t>one who does</a:t>
-            </a:r>
-            <a:endParaRPr lang="en-US" sz="850" dirty="0"/>
-          </a:p>
-        </p:txBody>
-      </p:sp>
-      <p:sp>
-        <p:nvSpPr>
-          <p:cNvPr id="25" name="Shape 23"/>
-          <p:cNvSpPr/>
-          <p:nvPr/>
-        </p:nvSpPr>
-        <p:spPr>
-          <a:xfrm>
-            <a:off x="365760" y="3273552"/>
-            <a:ext cx="1371600" cy="658368"/>
+              <a:t>Syllables</a:t>
+            </a:r>
+            <a:endParaRPr lang="en-US" sz="1100" dirty="0"/>
+          </a:p>
+        </p:txBody>
+      </p:sp>
+      <p:sp>
+        <p:nvSpPr>
+          <p:cNvPr id="24" name="Shape 22"/>
+          <p:cNvSpPr/>
+          <p:nvPr/>
+        </p:nvSpPr>
+        <p:spPr>
+          <a:xfrm>
+            <a:off x="1874520" y="3273552"/>
+            <a:ext cx="6903720" cy="658368"/>
           </a:xfrm>
           <a:prstGeom prst="rect">
             <a:avLst>
@@ -27844,11 +26612,38 @@
             </a:avLst>
           </a:prstGeom>
           <a:solidFill>
-            <a:srgbClr val="E2E8F0"/>
-          </a:solidFill>
-          <a:ln w="12700">
-            <a:solidFill>
-              <a:srgbClr val="E2E8F0"/>
+            <a:srgbClr val="CCFBF1"/>
+          </a:solidFill>
+          <a:ln w="12700">
+            <a:solidFill>
+              <a:srgbClr val="0D9488"/>
+            </a:solidFill>
+            <a:prstDash val="solid"/>
+          </a:ln>
+        </p:spPr>
+      </p:sp>
+      <p:sp>
+        <p:nvSpPr>
+          <p:cNvPr id="25" name="Shape 23"/>
+          <p:cNvSpPr/>
+          <p:nvPr/>
+        </p:nvSpPr>
+        <p:spPr>
+          <a:xfrm>
+            <a:off x="2999232" y="3364992"/>
+            <a:ext cx="1645920" cy="475488"/>
+          </a:xfrm>
+          <a:prstGeom prst="rect">
+            <a:avLst>
+              <a:gd name="adj" fmla="val 9615"/>
+            </a:avLst>
+          </a:prstGeom>
+          <a:solidFill>
+            <a:srgbClr val="FFFFFF"/>
+          </a:solidFill>
+          <a:ln w="12700">
+            <a:solidFill>
+              <a:srgbClr val="0D9488"/>
             </a:solidFill>
             <a:prstDash val="solid"/>
           </a:ln>
@@ -27862,8 +26657,8 @@
         </p:nvSpPr>
         <p:spPr>
           <a:xfrm>
-            <a:off x="365760" y="3273552"/>
-            <a:ext cx="1371600" cy="658368"/>
+            <a:off x="2999232" y="3364992"/>
+            <a:ext cx="1645920" cy="475488"/>
           </a:xfrm>
           <a:prstGeom prst="rect">
             <a:avLst/>
@@ -27879,15 +26674,186 @@
               <a:buNone/>
             </a:pPr>
             <a:r>
-              <a:rPr lang="en-US" sz="1100" b="1" dirty="0">
-                <a:solidFill>
-                  <a:srgbClr val="475569"/>
+              <a:rPr lang="en-US" sz="1400" b="1" dirty="0">
+                <a:solidFill>
+                  <a:srgbClr val="0D9488"/>
                 </a:solidFill>
                 <a:latin typeface="Trebuchet MS" pitchFamily="34" charset="0"/>
                 <a:ea typeface="Trebuchet MS" pitchFamily="34" charset="-122"/>
                 <a:cs typeface="Trebuchet MS" pitchFamily="34" charset="-120"/>
               </a:rPr>
-              <a:t>Syllables</a:t>
+              <a:t>far</a:t>
+            </a:r>
+            <a:endParaRPr lang="en-US" sz="1400" dirty="0"/>
+          </a:p>
+        </p:txBody>
+      </p:sp>
+      <p:sp>
+        <p:nvSpPr>
+          <p:cNvPr id="27" name="Text 25"/>
+          <p:cNvSpPr/>
+          <p:nvPr/>
+        </p:nvSpPr>
+        <p:spPr>
+          <a:xfrm>
+            <a:off x="4645152" y="3364992"/>
+            <a:ext cx="1097280" cy="475488"/>
+          </a:xfrm>
+          <a:prstGeom prst="rect">
+            <a:avLst/>
+          </a:prstGeom>
+          <a:noFill/>
+          <a:ln/>
+        </p:spPr>
+        <p:txBody>
+          <a:bodyPr wrap="square" lIns="0" tIns="0" rIns="0" bIns="0" rtlCol="0" anchor="ctr"/>
+          <a:lstStyle/>
+          <a:p>
+            <a:pPr algn="ctr" indent="0" marL="0">
+              <a:buNone/>
+            </a:pPr>
+            <a:r>
+              <a:rPr lang="en-US" sz="1600" b="1" dirty="0">
+                <a:solidFill>
+                  <a:srgbClr val="0D9488"/>
+                </a:solidFill>
+                <a:latin typeface="Trebuchet MS" pitchFamily="34" charset="0"/>
+                <a:ea typeface="Trebuchet MS" pitchFamily="34" charset="-122"/>
+                <a:cs typeface="Trebuchet MS" pitchFamily="34" charset="-120"/>
+              </a:rPr>
+              <a:t>·</a:t>
+            </a:r>
+            <a:endParaRPr lang="en-US" sz="1600" dirty="0"/>
+          </a:p>
+        </p:txBody>
+      </p:sp>
+      <p:sp>
+        <p:nvSpPr>
+          <p:cNvPr id="28" name="Shape 26"/>
+          <p:cNvSpPr/>
+          <p:nvPr/>
+        </p:nvSpPr>
+        <p:spPr>
+          <a:xfrm>
+            <a:off x="5742432" y="3364992"/>
+            <a:ext cx="1645920" cy="475488"/>
+          </a:xfrm>
+          <a:prstGeom prst="rect">
+            <a:avLst>
+              <a:gd name="adj" fmla="val 9615"/>
+            </a:avLst>
+          </a:prstGeom>
+          <a:solidFill>
+            <a:srgbClr val="FFFFFF"/>
+          </a:solidFill>
+          <a:ln w="12700">
+            <a:solidFill>
+              <a:srgbClr val="0D9488"/>
+            </a:solidFill>
+            <a:prstDash val="solid"/>
+          </a:ln>
+        </p:spPr>
+      </p:sp>
+      <p:sp>
+        <p:nvSpPr>
+          <p:cNvPr id="29" name="Text 27"/>
+          <p:cNvSpPr/>
+          <p:nvPr/>
+        </p:nvSpPr>
+        <p:spPr>
+          <a:xfrm>
+            <a:off x="5742432" y="3364992"/>
+            <a:ext cx="1645920" cy="475488"/>
+          </a:xfrm>
+          <a:prstGeom prst="rect">
+            <a:avLst/>
+          </a:prstGeom>
+          <a:noFill/>
+          <a:ln/>
+        </p:spPr>
+        <p:txBody>
+          <a:bodyPr wrap="square" lIns="0" tIns="0" rIns="0" bIns="0" rtlCol="0" anchor="ctr"/>
+          <a:lstStyle/>
+          <a:p>
+            <a:pPr algn="ctr" indent="0" marL="0">
+              <a:buNone/>
+            </a:pPr>
+            <a:r>
+              <a:rPr lang="en-US" sz="1400" b="1" dirty="0">
+                <a:solidFill>
+                  <a:srgbClr val="0D9488"/>
+                </a:solidFill>
+                <a:latin typeface="Trebuchet MS" pitchFamily="34" charset="0"/>
+                <a:ea typeface="Trebuchet MS" pitchFamily="34" charset="-122"/>
+                <a:cs typeface="Trebuchet MS" pitchFamily="34" charset="-120"/>
+              </a:rPr>
+              <a:t>mer</a:t>
+            </a:r>
+            <a:endParaRPr lang="en-US" sz="1400" dirty="0"/>
+          </a:p>
+        </p:txBody>
+      </p:sp>
+      <p:sp>
+        <p:nvSpPr>
+          <p:cNvPr id="30" name="Shape 28"/>
+          <p:cNvSpPr/>
+          <p:nvPr/>
+        </p:nvSpPr>
+        <p:spPr>
+          <a:xfrm>
+            <a:off x="365760" y="4096512"/>
+            <a:ext cx="1371600" cy="804672"/>
+          </a:xfrm>
+          <a:prstGeom prst="rect">
+            <a:avLst>
+              <a:gd name="adj" fmla="val 6818"/>
+            </a:avLst>
+          </a:prstGeom>
+          <a:solidFill>
+            <a:srgbClr val="E2E8F0"/>
+          </a:solidFill>
+          <a:ln w="12700">
+            <a:solidFill>
+              <a:srgbClr val="E2E8F0"/>
+            </a:solidFill>
+            <a:prstDash val="solid"/>
+          </a:ln>
+        </p:spPr>
+      </p:sp>
+      <p:sp>
+        <p:nvSpPr>
+          <p:cNvPr id="31" name="Text 29"/>
+          <p:cNvSpPr/>
+          <p:nvPr/>
+        </p:nvSpPr>
+        <p:spPr>
+          <a:xfrm>
+            <a:off x="365760" y="4096512"/>
+            <a:ext cx="1371600" cy="804672"/>
+          </a:xfrm>
+          <a:prstGeom prst="rect">
+            <a:avLst/>
+          </a:prstGeom>
+          <a:noFill/>
+          <a:ln/>
+        </p:spPr>
+        <p:txBody>
+          <a:bodyPr wrap="square" lIns="0" tIns="0" rIns="0" bIns="0" rtlCol="0" anchor="ctr"/>
+          <a:lstStyle/>
+          <a:p>
+            <a:pPr algn="ctr" indent="0" marL="0">
+              <a:buNone/>
+            </a:pPr>
+            <a:r>
+              <a:rPr lang="en-US" sz="1100" b="1" dirty="0">
+                <a:solidFill>
+                  <a:srgbClr val="475569"/>
+                </a:solidFill>
+                <a:latin typeface="Trebuchet MS" pitchFamily="34" charset="0"/>
+                <a:ea typeface="Trebuchet MS" pitchFamily="34" charset="-122"/>
+                <a:cs typeface="Trebuchet MS" pitchFamily="34" charset="-120"/>
+              </a:rPr>
+              <a:t>Phonemes</a:t>
             </a:r>
             <a:endParaRPr lang="en-US" sz="1100" dirty="0"/>
           </a:p>
@@ -27895,13 +26861,13 @@
       </p:sp>
       <p:sp>
         <p:nvSpPr>
-          <p:cNvPr id="27" name="Shape 25"/>
-          <p:cNvSpPr/>
-          <p:nvPr/>
-        </p:nvSpPr>
-        <p:spPr>
-          <a:xfrm>
-            <a:off x="1874520" y="3273552"/>
+          <p:cNvPr id="32" name="Shape 30"/>
+          <p:cNvSpPr/>
+          <p:nvPr/>
+        </p:nvSpPr>
+        <p:spPr>
+          <a:xfrm>
+            <a:off x="1874520" y="4096512"/>
             <a:ext cx="6903720" cy="658368"/>
           </a:xfrm>
           <a:prstGeom prst="rect">
@@ -27910,30 +26876,30 @@
             </a:avLst>
           </a:prstGeom>
           <a:solidFill>
-            <a:srgbClr val="CCFBF1"/>
-          </a:solidFill>
-          <a:ln w="12700">
-            <a:solidFill>
-              <a:srgbClr val="0D9488"/>
-            </a:solidFill>
-            <a:prstDash val="solid"/>
-          </a:ln>
-        </p:spPr>
-      </p:sp>
-      <p:sp>
-        <p:nvSpPr>
-          <p:cNvPr id="28" name="Shape 26"/>
-          <p:cNvSpPr/>
-          <p:nvPr/>
-        </p:nvSpPr>
-        <p:spPr>
-          <a:xfrm>
-            <a:off x="2313432" y="3364992"/>
-            <a:ext cx="1645920" cy="475488"/>
+            <a:srgbClr val="FCE7F3"/>
+          </a:solidFill>
+          <a:ln w="12700">
+            <a:solidFill>
+              <a:srgbClr val="DB2777"/>
+            </a:solidFill>
+            <a:prstDash val="solid"/>
+          </a:ln>
+        </p:spPr>
+      </p:sp>
+      <p:sp>
+        <p:nvSpPr>
+          <p:cNvPr id="33" name="Shape 31"/>
+          <p:cNvSpPr/>
+          <p:nvPr/>
+        </p:nvSpPr>
+        <p:spPr>
+          <a:xfrm>
+            <a:off x="2670048" y="4169664"/>
+            <a:ext cx="685800" cy="475488"/>
           </a:xfrm>
           <a:prstGeom prst="rect">
             <a:avLst>
-              <a:gd name="adj" fmla="val 9615"/>
+              <a:gd name="adj" fmla="val 7692"/>
             </a:avLst>
           </a:prstGeom>
           <a:solidFill>
@@ -27941,22 +26907,22 @@
           </a:solidFill>
           <a:ln w="12700">
             <a:solidFill>
-              <a:srgbClr val="0D9488"/>
-            </a:solidFill>
-            <a:prstDash val="solid"/>
-          </a:ln>
-        </p:spPr>
-      </p:sp>
-      <p:sp>
-        <p:nvSpPr>
-          <p:cNvPr id="29" name="Text 27"/>
-          <p:cNvSpPr/>
-          <p:nvPr/>
-        </p:nvSpPr>
-        <p:spPr>
-          <a:xfrm>
-            <a:off x="2313432" y="3364992"/>
-            <a:ext cx="1645920" cy="475488"/>
+              <a:srgbClr val="DB2777"/>
+            </a:solidFill>
+            <a:prstDash val="solid"/>
+          </a:ln>
+        </p:spPr>
+      </p:sp>
+      <p:sp>
+        <p:nvSpPr>
+          <p:cNvPr id="34" name="Text 32"/>
+          <p:cNvSpPr/>
+          <p:nvPr/>
+        </p:nvSpPr>
+        <p:spPr>
+          <a:xfrm>
+            <a:off x="2670048" y="4169664"/>
+            <a:ext cx="685800" cy="475488"/>
           </a:xfrm>
           <a:prstGeom prst="rect">
             <a:avLst/>
@@ -27972,30 +26938,57 @@
               <a:buNone/>
             </a:pPr>
             <a:r>
-              <a:rPr lang="en-US" sz="1400" b="1" dirty="0">
-                <a:solidFill>
-                  <a:srgbClr val="0D9488"/>
+              <a:rPr lang="en-US" sz="900" b="1" dirty="0">
+                <a:solidFill>
+                  <a:srgbClr val="9D174D"/>
                 </a:solidFill>
                 <a:latin typeface="Trebuchet MS" pitchFamily="34" charset="0"/>
                 <a:ea typeface="Trebuchet MS" pitchFamily="34" charset="-122"/>
                 <a:cs typeface="Trebuchet MS" pitchFamily="34" charset="-120"/>
               </a:rPr>
-              <a:t>re</a:t>
-            </a:r>
-            <a:endParaRPr lang="en-US" sz="1400" dirty="0"/>
-          </a:p>
-        </p:txBody>
-      </p:sp>
-      <p:sp>
-        <p:nvSpPr>
-          <p:cNvPr id="30" name="Text 28"/>
-          <p:cNvSpPr/>
-          <p:nvPr/>
-        </p:nvSpPr>
-        <p:spPr>
-          <a:xfrm>
-            <a:off x="3959352" y="3364992"/>
-            <a:ext cx="411480" cy="475488"/>
+              <a:t>f</a:t>
+            </a:r>
+            <a:endParaRPr lang="en-US" sz="900" dirty="0"/>
+          </a:p>
+        </p:txBody>
+      </p:sp>
+      <p:sp>
+        <p:nvSpPr>
+          <p:cNvPr id="35" name="Shape 33"/>
+          <p:cNvSpPr/>
+          <p:nvPr/>
+        </p:nvSpPr>
+        <p:spPr>
+          <a:xfrm>
+            <a:off x="4123944" y="4169664"/>
+            <a:ext cx="685800" cy="475488"/>
+          </a:xfrm>
+          <a:prstGeom prst="rect">
+            <a:avLst>
+              <a:gd name="adj" fmla="val 7692"/>
+            </a:avLst>
+          </a:prstGeom>
+          <a:solidFill>
+            <a:srgbClr val="FFFFFF"/>
+          </a:solidFill>
+          <a:ln w="12700">
+            <a:solidFill>
+              <a:srgbClr val="DB2777"/>
+            </a:solidFill>
+            <a:prstDash val="solid"/>
+          </a:ln>
+        </p:spPr>
+      </p:sp>
+      <p:sp>
+        <p:nvSpPr>
+          <p:cNvPr id="36" name="Text 34"/>
+          <p:cNvSpPr/>
+          <p:nvPr/>
+        </p:nvSpPr>
+        <p:spPr>
+          <a:xfrm>
+            <a:off x="4123944" y="4169664"/>
+            <a:ext cx="685800" cy="475488"/>
           </a:xfrm>
           <a:prstGeom prst="rect">
             <a:avLst/>
@@ -28011,34 +27004,34 @@
               <a:buNone/>
             </a:pPr>
             <a:r>
-              <a:rPr lang="en-US" sz="1600" b="1" dirty="0">
-                <a:solidFill>
-                  <a:srgbClr val="0D9488"/>
+              <a:rPr lang="en-US" sz="900" b="1" dirty="0">
+                <a:solidFill>
+                  <a:srgbClr val="9D174D"/>
                 </a:solidFill>
                 <a:latin typeface="Trebuchet MS" pitchFamily="34" charset="0"/>
                 <a:ea typeface="Trebuchet MS" pitchFamily="34" charset="-122"/>
                 <a:cs typeface="Trebuchet MS" pitchFamily="34" charset="-120"/>
               </a:rPr>
-              <a:t>·</a:t>
-            </a:r>
-            <a:endParaRPr lang="en-US" sz="1600" dirty="0"/>
-          </a:p>
-        </p:txBody>
-      </p:sp>
-      <p:sp>
-        <p:nvSpPr>
-          <p:cNvPr id="31" name="Shape 29"/>
-          <p:cNvSpPr/>
-          <p:nvPr/>
-        </p:nvSpPr>
-        <p:spPr>
-          <a:xfrm>
-            <a:off x="4370832" y="3364992"/>
-            <a:ext cx="1645920" cy="475488"/>
+              <a:t>ar</a:t>
+            </a:r>
+            <a:endParaRPr lang="en-US" sz="900" dirty="0"/>
+          </a:p>
+        </p:txBody>
+      </p:sp>
+      <p:sp>
+        <p:nvSpPr>
+          <p:cNvPr id="37" name="Shape 35"/>
+          <p:cNvSpPr/>
+          <p:nvPr/>
+        </p:nvSpPr>
+        <p:spPr>
+          <a:xfrm>
+            <a:off x="5577840" y="4169664"/>
+            <a:ext cx="685800" cy="475488"/>
           </a:xfrm>
           <a:prstGeom prst="rect">
             <a:avLst>
-              <a:gd name="adj" fmla="val 9615"/>
+              <a:gd name="adj" fmla="val 7692"/>
             </a:avLst>
           </a:prstGeom>
           <a:solidFill>
@@ -28046,22 +27039,22 @@
           </a:solidFill>
           <a:ln w="12700">
             <a:solidFill>
-              <a:srgbClr val="0D9488"/>
-            </a:solidFill>
-            <a:prstDash val="solid"/>
-          </a:ln>
-        </p:spPr>
-      </p:sp>
-      <p:sp>
-        <p:nvSpPr>
-          <p:cNvPr id="32" name="Text 30"/>
-          <p:cNvSpPr/>
-          <p:nvPr/>
-        </p:nvSpPr>
-        <p:spPr>
-          <a:xfrm>
-            <a:off x="4370832" y="3364992"/>
-            <a:ext cx="1645920" cy="475488"/>
+              <a:srgbClr val="DB2777"/>
+            </a:solidFill>
+            <a:prstDash val="solid"/>
+          </a:ln>
+        </p:spPr>
+      </p:sp>
+      <p:sp>
+        <p:nvSpPr>
+          <p:cNvPr id="38" name="Text 36"/>
+          <p:cNvSpPr/>
+          <p:nvPr/>
+        </p:nvSpPr>
+        <p:spPr>
+          <a:xfrm>
+            <a:off x="5577840" y="4169664"/>
+            <a:ext cx="685800" cy="475488"/>
           </a:xfrm>
           <a:prstGeom prst="rect">
             <a:avLst/>
@@ -28077,73 +27070,34 @@
               <a:buNone/>
             </a:pPr>
             <a:r>
-              <a:rPr lang="en-US" sz="1400" b="1" dirty="0">
-                <a:solidFill>
-                  <a:srgbClr val="0D9488"/>
+              <a:rPr lang="en-US" sz="900" b="1" dirty="0">
+                <a:solidFill>
+                  <a:srgbClr val="9D174D"/>
                 </a:solidFill>
                 <a:latin typeface="Trebuchet MS" pitchFamily="34" charset="0"/>
                 <a:ea typeface="Trebuchet MS" pitchFamily="34" charset="-122"/>
                 <a:cs typeface="Trebuchet MS" pitchFamily="34" charset="-120"/>
               </a:rPr>
-              <a:t>search</a:t>
-            </a:r>
-            <a:endParaRPr lang="en-US" sz="1400" dirty="0"/>
-          </a:p>
-        </p:txBody>
-      </p:sp>
-      <p:sp>
-        <p:nvSpPr>
-          <p:cNvPr id="33" name="Text 31"/>
-          <p:cNvSpPr/>
-          <p:nvPr/>
-        </p:nvSpPr>
-        <p:spPr>
-          <a:xfrm>
-            <a:off x="6016752" y="3364992"/>
-            <a:ext cx="411480" cy="475488"/>
-          </a:xfrm>
-          <a:prstGeom prst="rect">
-            <a:avLst/>
-          </a:prstGeom>
-          <a:noFill/>
-          <a:ln/>
-        </p:spPr>
-        <p:txBody>
-          <a:bodyPr wrap="square" lIns="0" tIns="0" rIns="0" bIns="0" rtlCol="0" anchor="ctr"/>
-          <a:lstStyle/>
-          <a:p>
-            <a:pPr algn="ctr" indent="0" marL="0">
-              <a:buNone/>
-            </a:pPr>
-            <a:r>
-              <a:rPr lang="en-US" sz="1600" b="1" dirty="0">
-                <a:solidFill>
-                  <a:srgbClr val="0D9488"/>
-                </a:solidFill>
-                <a:latin typeface="Trebuchet MS" pitchFamily="34" charset="0"/>
-                <a:ea typeface="Trebuchet MS" pitchFamily="34" charset="-122"/>
-                <a:cs typeface="Trebuchet MS" pitchFamily="34" charset="-120"/>
-              </a:rPr>
-              <a:t>·</a:t>
-            </a:r>
-            <a:endParaRPr lang="en-US" sz="1600" dirty="0"/>
-          </a:p>
-        </p:txBody>
-      </p:sp>
-      <p:sp>
-        <p:nvSpPr>
-          <p:cNvPr id="34" name="Shape 32"/>
-          <p:cNvSpPr/>
-          <p:nvPr/>
-        </p:nvSpPr>
-        <p:spPr>
-          <a:xfrm>
-            <a:off x="6428232" y="3364992"/>
-            <a:ext cx="1645920" cy="475488"/>
+              <a:t>m</a:t>
+            </a:r>
+            <a:endParaRPr lang="en-US" sz="900" dirty="0"/>
+          </a:p>
+        </p:txBody>
+      </p:sp>
+      <p:sp>
+        <p:nvSpPr>
+          <p:cNvPr id="39" name="Shape 37"/>
+          <p:cNvSpPr/>
+          <p:nvPr/>
+        </p:nvSpPr>
+        <p:spPr>
+          <a:xfrm>
+            <a:off x="7031736" y="4169664"/>
+            <a:ext cx="685800" cy="475488"/>
           </a:xfrm>
           <a:prstGeom prst="rect">
             <a:avLst>
-              <a:gd name="adj" fmla="val 9615"/>
+              <a:gd name="adj" fmla="val 7692"/>
             </a:avLst>
           </a:prstGeom>
           <a:solidFill>
@@ -28151,138 +27105,6 @@
           </a:solidFill>
           <a:ln w="12700">
             <a:solidFill>
-              <a:srgbClr val="0D9488"/>
-            </a:solidFill>
-            <a:prstDash val="solid"/>
-          </a:ln>
-        </p:spPr>
-      </p:sp>
-      <p:sp>
-        <p:nvSpPr>
-          <p:cNvPr id="35" name="Text 33"/>
-          <p:cNvSpPr/>
-          <p:nvPr/>
-        </p:nvSpPr>
-        <p:spPr>
-          <a:xfrm>
-            <a:off x="6428232" y="3364992"/>
-            <a:ext cx="1645920" cy="475488"/>
-          </a:xfrm>
-          <a:prstGeom prst="rect">
-            <a:avLst/>
-          </a:prstGeom>
-          <a:noFill/>
-          <a:ln/>
-        </p:spPr>
-        <p:txBody>
-          <a:bodyPr wrap="square" lIns="0" tIns="0" rIns="0" bIns="0" rtlCol="0" anchor="ctr"/>
-          <a:lstStyle/>
-          <a:p>
-            <a:pPr algn="ctr" indent="0" marL="0">
-              <a:buNone/>
-            </a:pPr>
-            <a:r>
-              <a:rPr lang="en-US" sz="1400" b="1" dirty="0">
-                <a:solidFill>
-                  <a:srgbClr val="0D9488"/>
-                </a:solidFill>
-                <a:latin typeface="Trebuchet MS" pitchFamily="34" charset="0"/>
-                <a:ea typeface="Trebuchet MS" pitchFamily="34" charset="-122"/>
-                <a:cs typeface="Trebuchet MS" pitchFamily="34" charset="-120"/>
-              </a:rPr>
-              <a:t>er</a:t>
-            </a:r>
-            <a:endParaRPr lang="en-US" sz="1400" dirty="0"/>
-          </a:p>
-        </p:txBody>
-      </p:sp>
-      <p:sp>
-        <p:nvSpPr>
-          <p:cNvPr id="36" name="Shape 34"/>
-          <p:cNvSpPr/>
-          <p:nvPr/>
-        </p:nvSpPr>
-        <p:spPr>
-          <a:xfrm>
-            <a:off x="365760" y="4096512"/>
-            <a:ext cx="1371600" cy="804672"/>
-          </a:xfrm>
-          <a:prstGeom prst="rect">
-            <a:avLst>
-              <a:gd name="adj" fmla="val 6818"/>
-            </a:avLst>
-          </a:prstGeom>
-          <a:solidFill>
-            <a:srgbClr val="E2E8F0"/>
-          </a:solidFill>
-          <a:ln w="12700">
-            <a:solidFill>
-              <a:srgbClr val="E2E8F0"/>
-            </a:solidFill>
-            <a:prstDash val="solid"/>
-          </a:ln>
-        </p:spPr>
-      </p:sp>
-      <p:sp>
-        <p:nvSpPr>
-          <p:cNvPr id="37" name="Text 35"/>
-          <p:cNvSpPr/>
-          <p:nvPr/>
-        </p:nvSpPr>
-        <p:spPr>
-          <a:xfrm>
-            <a:off x="365760" y="4096512"/>
-            <a:ext cx="1371600" cy="804672"/>
-          </a:xfrm>
-          <a:prstGeom prst="rect">
-            <a:avLst/>
-          </a:prstGeom>
-          <a:noFill/>
-          <a:ln/>
-        </p:spPr>
-        <p:txBody>
-          <a:bodyPr wrap="square" lIns="0" tIns="0" rIns="0" bIns="0" rtlCol="0" anchor="ctr"/>
-          <a:lstStyle/>
-          <a:p>
-            <a:pPr algn="ctr" indent="0" marL="0">
-              <a:buNone/>
-            </a:pPr>
-            <a:r>
-              <a:rPr lang="en-US" sz="1100" b="1" dirty="0">
-                <a:solidFill>
-                  <a:srgbClr val="475569"/>
-                </a:solidFill>
-                <a:latin typeface="Trebuchet MS" pitchFamily="34" charset="0"/>
-                <a:ea typeface="Trebuchet MS" pitchFamily="34" charset="-122"/>
-                <a:cs typeface="Trebuchet MS" pitchFamily="34" charset="-120"/>
-              </a:rPr>
-              <a:t>Phonemes</a:t>
-            </a:r>
-            <a:endParaRPr lang="en-US" sz="1100" dirty="0"/>
-          </a:p>
-        </p:txBody>
-      </p:sp>
-      <p:sp>
-        <p:nvSpPr>
-          <p:cNvPr id="38" name="Shape 36"/>
-          <p:cNvSpPr/>
-          <p:nvPr/>
-        </p:nvSpPr>
-        <p:spPr>
-          <a:xfrm>
-            <a:off x="1874520" y="4096512"/>
-            <a:ext cx="6903720" cy="804672"/>
-          </a:xfrm>
-          <a:prstGeom prst="rect">
-            <a:avLst>
-              <a:gd name="adj" fmla="val 6818"/>
-            </a:avLst>
-          </a:prstGeom>
-          <a:solidFill>
-            <a:srgbClr val="FCE7F3"/>
-          </a:solidFill>
-          <a:ln w="12700">
-            <a:solidFill>
               <a:srgbClr val="DB2777"/>
             </a:solidFill>
             <a:prstDash val="solid"/>
@@ -28291,410 +27113,14 @@
       </p:sp>
       <p:sp>
         <p:nvSpPr>
-          <p:cNvPr id="39" name="Shape 37"/>
-          <p:cNvSpPr/>
-          <p:nvPr/>
-        </p:nvSpPr>
-        <p:spPr>
-          <a:xfrm>
-            <a:off x="2254649" y="4169664"/>
-            <a:ext cx="685800" cy="384048"/>
-          </a:xfrm>
-          <a:prstGeom prst="rect">
-            <a:avLst>
-              <a:gd name="adj" fmla="val 9524"/>
-            </a:avLst>
-          </a:prstGeom>
-          <a:solidFill>
-            <a:srgbClr val="FFFFFF"/>
-          </a:solidFill>
-          <a:ln w="12700">
-            <a:solidFill>
-              <a:srgbClr val="DB2777"/>
-            </a:solidFill>
-            <a:prstDash val="solid"/>
-          </a:ln>
-        </p:spPr>
-      </p:sp>
-      <p:sp>
-        <p:nvSpPr>
           <p:cNvPr id="40" name="Text 38"/>
           <p:cNvSpPr/>
           <p:nvPr/>
         </p:nvSpPr>
         <p:spPr>
           <a:xfrm>
-            <a:off x="2254649" y="4169664"/>
-            <a:ext cx="685800" cy="384048"/>
-          </a:xfrm>
-          <a:prstGeom prst="rect">
-            <a:avLst/>
-          </a:prstGeom>
-          <a:noFill/>
-          <a:ln/>
-        </p:spPr>
-        <p:txBody>
-          <a:bodyPr wrap="square" lIns="0" tIns="0" rIns="0" bIns="0" rtlCol="0" anchor="ctr"/>
-          <a:lstStyle/>
-          <a:p>
-            <a:pPr algn="ctr" indent="0" marL="0">
-              <a:buNone/>
-            </a:pPr>
-            <a:r>
-              <a:rPr lang="en-US" sz="900" b="1" dirty="0">
-                <a:solidFill>
-                  <a:srgbClr val="9D174D"/>
-                </a:solidFill>
-                <a:latin typeface="Trebuchet MS" pitchFamily="34" charset="0"/>
-                <a:ea typeface="Trebuchet MS" pitchFamily="34" charset="-122"/>
-                <a:cs typeface="Trebuchet MS" pitchFamily="34" charset="-120"/>
-              </a:rPr>
-              <a:t>r</a:t>
-            </a:r>
-            <a:endParaRPr lang="en-US" sz="900" dirty="0"/>
-          </a:p>
-        </p:txBody>
-      </p:sp>
-      <p:sp>
-        <p:nvSpPr>
-          <p:cNvPr id="41" name="Shape 39"/>
-          <p:cNvSpPr/>
-          <p:nvPr/>
-        </p:nvSpPr>
-        <p:spPr>
-          <a:xfrm>
-            <a:off x="3293146" y="4169664"/>
-            <a:ext cx="685800" cy="384048"/>
-          </a:xfrm>
-          <a:prstGeom prst="rect">
-            <a:avLst>
-              <a:gd name="adj" fmla="val 9524"/>
-            </a:avLst>
-          </a:prstGeom>
-          <a:solidFill>
-            <a:srgbClr val="FFFFFF"/>
-          </a:solidFill>
-          <a:ln w="12700">
-            <a:solidFill>
-              <a:srgbClr val="DB2777"/>
-            </a:solidFill>
-            <a:prstDash val="solid"/>
-          </a:ln>
-        </p:spPr>
-      </p:sp>
-      <p:sp>
-        <p:nvSpPr>
-          <p:cNvPr id="42" name="Text 40"/>
-          <p:cNvSpPr/>
-          <p:nvPr/>
-        </p:nvSpPr>
-        <p:spPr>
-          <a:xfrm>
-            <a:off x="3293146" y="4169664"/>
-            <a:ext cx="685800" cy="384048"/>
-          </a:xfrm>
-          <a:prstGeom prst="rect">
-            <a:avLst/>
-          </a:prstGeom>
-          <a:noFill/>
-          <a:ln/>
-        </p:spPr>
-        <p:txBody>
-          <a:bodyPr wrap="square" lIns="0" tIns="0" rIns="0" bIns="0" rtlCol="0" anchor="ctr"/>
-          <a:lstStyle/>
-          <a:p>
-            <a:pPr algn="ctr" indent="0" marL="0">
-              <a:buNone/>
-            </a:pPr>
-            <a:r>
-              <a:rPr lang="en-US" sz="900" b="1" dirty="0">
-                <a:solidFill>
-                  <a:srgbClr val="9D174D"/>
-                </a:solidFill>
-                <a:latin typeface="Trebuchet MS" pitchFamily="34" charset="0"/>
-                <a:ea typeface="Trebuchet MS" pitchFamily="34" charset="-122"/>
-                <a:cs typeface="Trebuchet MS" pitchFamily="34" charset="-120"/>
-              </a:rPr>
-              <a:t>e</a:t>
-            </a:r>
-            <a:endParaRPr lang="en-US" sz="900" dirty="0"/>
-          </a:p>
-        </p:txBody>
-      </p:sp>
-      <p:sp>
-        <p:nvSpPr>
-          <p:cNvPr id="43" name="Shape 41"/>
-          <p:cNvSpPr/>
-          <p:nvPr/>
-        </p:nvSpPr>
-        <p:spPr>
-          <a:xfrm>
-            <a:off x="4331643" y="4169664"/>
-            <a:ext cx="685800" cy="384048"/>
-          </a:xfrm>
-          <a:prstGeom prst="rect">
-            <a:avLst>
-              <a:gd name="adj" fmla="val 9524"/>
-            </a:avLst>
-          </a:prstGeom>
-          <a:solidFill>
-            <a:srgbClr val="FFFFFF"/>
-          </a:solidFill>
-          <a:ln w="12700">
-            <a:solidFill>
-              <a:srgbClr val="DB2777"/>
-            </a:solidFill>
-            <a:prstDash val="solid"/>
-          </a:ln>
-        </p:spPr>
-      </p:sp>
-      <p:sp>
-        <p:nvSpPr>
-          <p:cNvPr id="44" name="Text 42"/>
-          <p:cNvSpPr/>
-          <p:nvPr/>
-        </p:nvSpPr>
-        <p:spPr>
-          <a:xfrm>
-            <a:off x="4331643" y="4169664"/>
-            <a:ext cx="685800" cy="384048"/>
-          </a:xfrm>
-          <a:prstGeom prst="rect">
-            <a:avLst/>
-          </a:prstGeom>
-          <a:noFill/>
-          <a:ln/>
-        </p:spPr>
-        <p:txBody>
-          <a:bodyPr wrap="square" lIns="0" tIns="0" rIns="0" bIns="0" rtlCol="0" anchor="ctr"/>
-          <a:lstStyle/>
-          <a:p>
-            <a:pPr algn="ctr" indent="0" marL="0">
-              <a:buNone/>
-            </a:pPr>
-            <a:r>
-              <a:rPr lang="en-US" sz="900" b="1" dirty="0">
-                <a:solidFill>
-                  <a:srgbClr val="9D174D"/>
-                </a:solidFill>
-                <a:latin typeface="Trebuchet MS" pitchFamily="34" charset="0"/>
-                <a:ea typeface="Trebuchet MS" pitchFamily="34" charset="-122"/>
-                <a:cs typeface="Trebuchet MS" pitchFamily="34" charset="-120"/>
-              </a:rPr>
-              <a:t>s</a:t>
-            </a:r>
-            <a:endParaRPr lang="en-US" sz="900" dirty="0"/>
-          </a:p>
-        </p:txBody>
-      </p:sp>
-      <p:sp>
-        <p:nvSpPr>
-          <p:cNvPr id="45" name="Shape 43"/>
-          <p:cNvSpPr/>
-          <p:nvPr/>
-        </p:nvSpPr>
-        <p:spPr>
-          <a:xfrm>
-            <a:off x="5370141" y="4169664"/>
-            <a:ext cx="685800" cy="384048"/>
-          </a:xfrm>
-          <a:prstGeom prst="rect">
-            <a:avLst>
-              <a:gd name="adj" fmla="val 9524"/>
-            </a:avLst>
-          </a:prstGeom>
-          <a:solidFill>
-            <a:srgbClr val="FFFFFF"/>
-          </a:solidFill>
-          <a:ln w="12700">
-            <a:solidFill>
-              <a:srgbClr val="DB2777"/>
-            </a:solidFill>
-            <a:prstDash val="solid"/>
-          </a:ln>
-        </p:spPr>
-      </p:sp>
-      <p:sp>
-        <p:nvSpPr>
-          <p:cNvPr id="46" name="Text 44"/>
-          <p:cNvSpPr/>
-          <p:nvPr/>
-        </p:nvSpPr>
-        <p:spPr>
-          <a:xfrm>
-            <a:off x="5370141" y="4169664"/>
-            <a:ext cx="685800" cy="384048"/>
-          </a:xfrm>
-          <a:prstGeom prst="rect">
-            <a:avLst/>
-          </a:prstGeom>
-          <a:noFill/>
-          <a:ln/>
-        </p:spPr>
-        <p:txBody>
-          <a:bodyPr wrap="square" lIns="0" tIns="0" rIns="0" bIns="0" rtlCol="0" anchor="ctr"/>
-          <a:lstStyle/>
-          <a:p>
-            <a:pPr algn="ctr" indent="0" marL="0">
-              <a:buNone/>
-            </a:pPr>
-            <a:r>
-              <a:rPr lang="en-US" sz="900" b="1" dirty="0">
-                <a:solidFill>
-                  <a:srgbClr val="9D174D"/>
-                </a:solidFill>
-                <a:latin typeface="Trebuchet MS" pitchFamily="34" charset="0"/>
-                <a:ea typeface="Trebuchet MS" pitchFamily="34" charset="-122"/>
-                <a:cs typeface="Trebuchet MS" pitchFamily="34" charset="-120"/>
-              </a:rPr>
-              <a:t>ear</a:t>
-            </a:r>
-            <a:endParaRPr lang="en-US" sz="900" dirty="0"/>
-          </a:p>
-        </p:txBody>
-      </p:sp>
-      <p:sp>
-        <p:nvSpPr>
-          <p:cNvPr id="47" name="Text 45"/>
-          <p:cNvSpPr/>
-          <p:nvPr/>
-        </p:nvSpPr>
-        <p:spPr>
-          <a:xfrm>
-            <a:off x="5370141" y="4572000"/>
-            <a:ext cx="685800" cy="219456"/>
-          </a:xfrm>
-          <a:prstGeom prst="rect">
-            <a:avLst/>
-          </a:prstGeom>
-          <a:noFill/>
-          <a:ln/>
-        </p:spPr>
-        <p:txBody>
-          <a:bodyPr wrap="square" lIns="0" tIns="0" rIns="0" bIns="0" rtlCol="0" anchor="t"/>
-          <a:lstStyle/>
-          <a:p>
-            <a:pPr algn="ctr" indent="0" marL="0">
-              <a:buNone/>
-            </a:pPr>
-            <a:r>
-              <a:rPr lang="en-US" sz="750" i="1" dirty="0">
-                <a:solidFill>
-                  <a:srgbClr val="94A3B8"/>
-                </a:solidFill>
-                <a:latin typeface="Calibri" pitchFamily="34" charset="0"/>
-                <a:ea typeface="Calibri" pitchFamily="34" charset="-122"/>
-                <a:cs typeface="Calibri" pitchFamily="34" charset="-120"/>
-              </a:rPr>
-              <a:t>/er/</a:t>
-            </a:r>
-            <a:endParaRPr lang="en-US" sz="750" dirty="0"/>
-          </a:p>
-        </p:txBody>
-      </p:sp>
-      <p:sp>
-        <p:nvSpPr>
-          <p:cNvPr id="48" name="Shape 46"/>
-          <p:cNvSpPr/>
-          <p:nvPr/>
-        </p:nvSpPr>
-        <p:spPr>
-          <a:xfrm>
-            <a:off x="6408638" y="4169664"/>
-            <a:ext cx="685800" cy="384048"/>
-          </a:xfrm>
-          <a:prstGeom prst="rect">
-            <a:avLst>
-              <a:gd name="adj" fmla="val 9524"/>
-            </a:avLst>
-          </a:prstGeom>
-          <a:solidFill>
-            <a:srgbClr val="FFFFFF"/>
-          </a:solidFill>
-          <a:ln w="12700">
-            <a:solidFill>
-              <a:srgbClr val="DB2777"/>
-            </a:solidFill>
-            <a:prstDash val="solid"/>
-          </a:ln>
-        </p:spPr>
-      </p:sp>
-      <p:sp>
-        <p:nvSpPr>
-          <p:cNvPr id="49" name="Text 47"/>
-          <p:cNvSpPr/>
-          <p:nvPr/>
-        </p:nvSpPr>
-        <p:spPr>
-          <a:xfrm>
-            <a:off x="6408638" y="4169664"/>
-            <a:ext cx="685800" cy="384048"/>
-          </a:xfrm>
-          <a:prstGeom prst="rect">
-            <a:avLst/>
-          </a:prstGeom>
-          <a:noFill/>
-          <a:ln/>
-        </p:spPr>
-        <p:txBody>
-          <a:bodyPr wrap="square" lIns="0" tIns="0" rIns="0" bIns="0" rtlCol="0" anchor="ctr"/>
-          <a:lstStyle/>
-          <a:p>
-            <a:pPr algn="ctr" indent="0" marL="0">
-              <a:buNone/>
-            </a:pPr>
-            <a:r>
-              <a:rPr lang="en-US" sz="900" b="1" dirty="0">
-                <a:solidFill>
-                  <a:srgbClr val="9D174D"/>
-                </a:solidFill>
-                <a:latin typeface="Trebuchet MS" pitchFamily="34" charset="0"/>
-                <a:ea typeface="Trebuchet MS" pitchFamily="34" charset="-122"/>
-                <a:cs typeface="Trebuchet MS" pitchFamily="34" charset="-120"/>
-              </a:rPr>
-              <a:t>ch</a:t>
-            </a:r>
-            <a:endParaRPr lang="en-US" sz="900" dirty="0"/>
-          </a:p>
-        </p:txBody>
-      </p:sp>
-      <p:sp>
-        <p:nvSpPr>
-          <p:cNvPr id="50" name="Shape 48"/>
-          <p:cNvSpPr/>
-          <p:nvPr/>
-        </p:nvSpPr>
-        <p:spPr>
-          <a:xfrm>
-            <a:off x="7447135" y="4169664"/>
-            <a:ext cx="685800" cy="384048"/>
-          </a:xfrm>
-          <a:prstGeom prst="rect">
-            <a:avLst>
-              <a:gd name="adj" fmla="val 9524"/>
-            </a:avLst>
-          </a:prstGeom>
-          <a:solidFill>
-            <a:srgbClr val="FFFFFF"/>
-          </a:solidFill>
-          <a:ln w="12700">
-            <a:solidFill>
-              <a:srgbClr val="DB2777"/>
-            </a:solidFill>
-            <a:prstDash val="solid"/>
-          </a:ln>
-        </p:spPr>
-      </p:sp>
-      <p:sp>
-        <p:nvSpPr>
-          <p:cNvPr id="51" name="Text 49"/>
-          <p:cNvSpPr/>
-          <p:nvPr/>
-        </p:nvSpPr>
-        <p:spPr>
-          <a:xfrm>
-            <a:off x="7447135" y="4169664"/>
-            <a:ext cx="685800" cy="384048"/>
+            <a:off x="7031736" y="4169664"/>
+            <a:ext cx="685800" cy="475488"/>
           </a:xfrm>
           <a:prstGeom prst="rect">
             <a:avLst/>
@@ -30154,7 +28580,7 @@
                 <a:ea typeface="Calibri" pitchFamily="34" charset="-122"/>
                 <a:cs typeface="Calibri" pitchFamily="34" charset="-120"/>
               </a:rPr>
-              <a:t>to instruct or educate</a:t>
+              <a:t>to instruct</a:t>
             </a:r>
             <a:endParaRPr lang="en-US" sz="850" dirty="0"/>
           </a:p>
@@ -31139,7 +29565,7 @@
                 <a:ea typeface="Calibri" pitchFamily="34" charset="-122"/>
                 <a:cs typeface="Calibri" pitchFamily="34" charset="-120"/>
               </a:rPr>
-              <a:t>to instruct or educate</a:t>
+              <a:t>to instruct</a:t>
             </a:r>
             <a:endParaRPr lang="en-US" sz="850" dirty="0"/>
           </a:p>
@@ -32256,7 +30682,7 @@
                 <a:ea typeface="Calibri" pitchFamily="34" charset="-122"/>
                 <a:cs typeface="Calibri" pitchFamily="34" charset="-120"/>
               </a:rPr>
-              <a:t>to instruct or educate</a:t>
+              <a:t>to instruct</a:t>
             </a:r>
             <a:endParaRPr lang="en-US" sz="850" dirty="0"/>
           </a:p>
@@ -32713,11 +31139,11 @@
         <p:spPr>
           <a:xfrm>
             <a:off x="1874520" y="4096512"/>
-            <a:ext cx="6903720" cy="804672"/>
+            <a:ext cx="6903720" cy="658368"/>
           </a:xfrm>
           <a:prstGeom prst="rect">
             <a:avLst>
-              <a:gd name="adj" fmla="val 6818"/>
+              <a:gd name="adj" fmla="val 8333"/>
             </a:avLst>
           </a:prstGeom>
           <a:solidFill>
@@ -32740,11 +31166,11 @@
         <p:spPr>
           <a:xfrm>
             <a:off x="2670048" y="4169664"/>
-            <a:ext cx="685800" cy="384048"/>
+            <a:ext cx="685800" cy="475488"/>
           </a:xfrm>
           <a:prstGeom prst="rect">
             <a:avLst>
-              <a:gd name="adj" fmla="val 9524"/>
+              <a:gd name="adj" fmla="val 7692"/>
             </a:avLst>
           </a:prstGeom>
           <a:solidFill>
@@ -32767,7 +31193,7 @@
         <p:spPr>
           <a:xfrm>
             <a:off x="2670048" y="4169664"/>
-            <a:ext cx="685800" cy="384048"/>
+            <a:ext cx="685800" cy="475488"/>
           </a:xfrm>
           <a:prstGeom prst="rect">
             <a:avLst/>
@@ -32806,11 +31232,11 @@
         <p:spPr>
           <a:xfrm>
             <a:off x="4123944" y="4169664"/>
-            <a:ext cx="685800" cy="384048"/>
+            <a:ext cx="685800" cy="475488"/>
           </a:xfrm>
           <a:prstGeom prst="rect">
             <a:avLst>
-              <a:gd name="adj" fmla="val 9524"/>
+              <a:gd name="adj" fmla="val 7692"/>
             </a:avLst>
           </a:prstGeom>
           <a:solidFill>
@@ -32833,7 +31259,7 @@
         <p:spPr>
           <a:xfrm>
             <a:off x="4123944" y="4169664"/>
-            <a:ext cx="685800" cy="384048"/>
+            <a:ext cx="685800" cy="475488"/>
           </a:xfrm>
           <a:prstGeom prst="rect">
             <a:avLst/>
@@ -32865,57 +31291,18 @@
       </p:sp>
       <p:sp>
         <p:nvSpPr>
-          <p:cNvPr id="37" name="Text 35"/>
-          <p:cNvSpPr/>
-          <p:nvPr/>
-        </p:nvSpPr>
-        <p:spPr>
-          <a:xfrm>
-            <a:off x="4123944" y="4572000"/>
-            <a:ext cx="685800" cy="219456"/>
-          </a:xfrm>
-          <a:prstGeom prst="rect">
-            <a:avLst/>
-          </a:prstGeom>
-          <a:noFill/>
-          <a:ln/>
-        </p:spPr>
-        <p:txBody>
-          <a:bodyPr wrap="square" lIns="0" tIns="0" rIns="0" bIns="0" rtlCol="0" anchor="t"/>
-          <a:lstStyle/>
-          <a:p>
-            <a:pPr algn="ctr" indent="0" marL="0">
-              <a:buNone/>
-            </a:pPr>
-            <a:r>
-              <a:rPr lang="en-US" sz="750" i="1" dirty="0">
-                <a:solidFill>
-                  <a:srgbClr val="94A3B8"/>
-                </a:solidFill>
-                <a:latin typeface="Calibri" pitchFamily="34" charset="0"/>
-                <a:ea typeface="Calibri" pitchFamily="34" charset="-122"/>
-                <a:cs typeface="Calibri" pitchFamily="34" charset="-120"/>
-              </a:rPr>
-              <a:t>/ee/</a:t>
-            </a:r>
-            <a:endParaRPr lang="en-US" sz="750" dirty="0"/>
-          </a:p>
-        </p:txBody>
-      </p:sp>
-      <p:sp>
-        <p:nvSpPr>
-          <p:cNvPr id="38" name="Shape 36"/>
+          <p:cNvPr id="37" name="Shape 35"/>
           <p:cNvSpPr/>
           <p:nvPr/>
         </p:nvSpPr>
         <p:spPr>
           <a:xfrm>
             <a:off x="5577840" y="4169664"/>
-            <a:ext cx="685800" cy="384048"/>
+            <a:ext cx="685800" cy="475488"/>
           </a:xfrm>
           <a:prstGeom prst="rect">
             <a:avLst>
-              <a:gd name="adj" fmla="val 9524"/>
+              <a:gd name="adj" fmla="val 7692"/>
             </a:avLst>
           </a:prstGeom>
           <a:solidFill>
@@ -32931,14 +31318,14 @@
       </p:sp>
       <p:sp>
         <p:nvSpPr>
-          <p:cNvPr id="39" name="Text 37"/>
+          <p:cNvPr id="38" name="Text 36"/>
           <p:cNvSpPr/>
           <p:nvPr/>
         </p:nvSpPr>
         <p:spPr>
           <a:xfrm>
             <a:off x="5577840" y="4169664"/>
-            <a:ext cx="685800" cy="384048"/>
+            <a:ext cx="685800" cy="475488"/>
           </a:xfrm>
           <a:prstGeom prst="rect">
             <a:avLst/>
@@ -32970,18 +31357,18 @@
       </p:sp>
       <p:sp>
         <p:nvSpPr>
-          <p:cNvPr id="40" name="Shape 38"/>
+          <p:cNvPr id="39" name="Shape 37"/>
           <p:cNvSpPr/>
           <p:nvPr/>
         </p:nvSpPr>
         <p:spPr>
           <a:xfrm>
             <a:off x="7031736" y="4169664"/>
-            <a:ext cx="685800" cy="384048"/>
+            <a:ext cx="685800" cy="475488"/>
           </a:xfrm>
           <a:prstGeom prst="rect">
             <a:avLst>
-              <a:gd name="adj" fmla="val 9524"/>
+              <a:gd name="adj" fmla="val 7692"/>
             </a:avLst>
           </a:prstGeom>
           <a:solidFill>
@@ -32997,14 +31384,14 @@
       </p:sp>
       <p:sp>
         <p:nvSpPr>
-          <p:cNvPr id="41" name="Text 39"/>
+          <p:cNvPr id="40" name="Text 38"/>
           <p:cNvSpPr/>
           <p:nvPr/>
         </p:nvSpPr>
         <p:spPr>
           <a:xfrm>
             <a:off x="7031736" y="4169664"/>
-            <a:ext cx="685800" cy="384048"/>
+            <a:ext cx="685800" cy="475488"/>
           </a:xfrm>
           <a:prstGeom prst="rect">
             <a:avLst/>
@@ -34982,7 +33369,7 @@
                 <a:ea typeface="Trebuchet MS" pitchFamily="34" charset="-122"/>
                 <a:cs typeface="Trebuchet MS" pitchFamily="34" charset="-120"/>
               </a:rPr>
-              <a:t>over-</a:t>
+              <a:t>un-</a:t>
             </a:r>
             <a:endParaRPr lang="en-US" sz="1300" dirty="0"/>
           </a:p>
@@ -35046,7 +33433,7 @@
                 <a:ea typeface="Trebuchet MS" pitchFamily="34" charset="-122"/>
                 <a:cs typeface="Trebuchet MS" pitchFamily="34" charset="-120"/>
               </a:rPr>
-              <a:t>build</a:t>
+              <a:t>play</a:t>
             </a:r>
             <a:endParaRPr lang="en-US" sz="1300" dirty="0"/>
           </a:p>
@@ -35135,7 +33522,7 @@
                 <a:ea typeface="Trebuchet MS" pitchFamily="34" charset="-122"/>
                 <a:cs typeface="Trebuchet MS" pitchFamily="34" charset="-120"/>
               </a:rPr>
-              <a:t>un-</a:t>
+              <a:t>over-</a:t>
             </a:r>
             <a:endParaRPr lang="en-US" sz="1300" dirty="0"/>
           </a:p>
@@ -35199,7 +33586,7 @@
                 <a:ea typeface="Trebuchet MS" pitchFamily="34" charset="-122"/>
                 <a:cs typeface="Trebuchet MS" pitchFamily="34" charset="-120"/>
               </a:rPr>
-              <a:t>lead</a:t>
+              <a:t>farm</a:t>
             </a:r>
             <a:endParaRPr lang="en-US" sz="1300" dirty="0"/>
           </a:p>
@@ -35288,7 +33675,7 @@
                 <a:ea typeface="Trebuchet MS" pitchFamily="34" charset="-122"/>
                 <a:cs typeface="Trebuchet MS" pitchFamily="34" charset="-120"/>
               </a:rPr>
-              <a:t>dis-</a:t>
+              <a:t>re-</a:t>
             </a:r>
             <a:endParaRPr lang="en-US" sz="1300" dirty="0"/>
           </a:p>
@@ -35352,7 +33739,7 @@
                 <a:ea typeface="Trebuchet MS" pitchFamily="34" charset="-122"/>
                 <a:cs typeface="Trebuchet MS" pitchFamily="34" charset="-120"/>
               </a:rPr>
-              <a:t>play</a:t>
+              <a:t>read</a:t>
             </a:r>
             <a:endParaRPr lang="en-US" sz="1300" dirty="0"/>
           </a:p>
@@ -35441,7 +33828,7 @@
                 <a:ea typeface="Trebuchet MS" pitchFamily="34" charset="-122"/>
                 <a:cs typeface="Trebuchet MS" pitchFamily="34" charset="-120"/>
               </a:rPr>
-              <a:t>pre-</a:t>
+              <a:t>dis-</a:t>
             </a:r>
             <a:endParaRPr lang="en-US" sz="1300" dirty="0"/>
           </a:p>
@@ -35505,7 +33892,7 @@
                 <a:ea typeface="Trebuchet MS" pitchFamily="34" charset="-122"/>
                 <a:cs typeface="Trebuchet MS" pitchFamily="34" charset="-120"/>
               </a:rPr>
-              <a:t>farm</a:t>
+              <a:t>build</a:t>
             </a:r>
             <a:endParaRPr lang="en-US" sz="1300" dirty="0"/>
           </a:p>
@@ -35767,7 +34154,7 @@
                 <a:ea typeface="Trebuchet MS" pitchFamily="34" charset="-122"/>
                 <a:cs typeface="Trebuchet MS" pitchFamily="34" charset="-120"/>
               </a:rPr>
-              <a:t>leader</a:t>
+              <a:t>stronger</a:t>
             </a:r>
             <a:endParaRPr lang="en-US" sz="1200" dirty="0"/>
           </a:p>
@@ -35899,7 +34286,7 @@
                 <a:ea typeface="Trebuchet MS" pitchFamily="34" charset="-122"/>
                 <a:cs typeface="Trebuchet MS" pitchFamily="34" charset="-120"/>
               </a:rPr>
-              <a:t>discover</a:t>
+              <a:t>reader</a:t>
             </a:r>
             <a:endParaRPr lang="en-US" sz="1200" dirty="0"/>
           </a:p>
@@ -35965,7 +34352,7 @@
                 <a:ea typeface="Trebuchet MS" pitchFamily="34" charset="-122"/>
                 <a:cs typeface="Trebuchet MS" pitchFamily="34" charset="-120"/>
               </a:rPr>
-              <a:t>runner</a:t>
+              <a:t>player</a:t>
             </a:r>
             <a:endParaRPr lang="en-US" sz="1200" dirty="0"/>
           </a:p>
@@ -36031,7 +34418,7 @@
                 <a:ea typeface="Trebuchet MS" pitchFamily="34" charset="-122"/>
                 <a:cs typeface="Trebuchet MS" pitchFamily="34" charset="-120"/>
               </a:rPr>
-              <a:t>reporter</a:t>
+              <a:t>explorer</a:t>
             </a:r>
             <a:endParaRPr lang="en-US" sz="1200" dirty="0"/>
           </a:p>
@@ -36097,7 +34484,7 @@
                 <a:ea typeface="Trebuchet MS" pitchFamily="34" charset="-122"/>
                 <a:cs typeface="Trebuchet MS" pitchFamily="34" charset="-120"/>
               </a:rPr>
-              <a:t>stronger</a:t>
+              <a:t>reporter</a:t>
             </a:r>
             <a:endParaRPr lang="en-US" sz="1200" dirty="0"/>
           </a:p>
@@ -37424,7 +35811,7 @@
                 <a:ea typeface="Calibri" pitchFamily="34" charset="-122"/>
                 <a:cs typeface="Calibri" pitchFamily="34" charset="-120"/>
               </a:rPr>
-              <a:t>2.  The suffix '-er' always makes a word mean the opposite of the base word.</a:t>
+              <a:t>2.  The suffix '-er' only ever comes from Greek and cannot be added to English base words.</a:t>
             </a:r>
             <a:endParaRPr lang="en-US" sz="1300" dirty="0"/>
           </a:p>
@@ -37563,7 +35950,7 @@
                 <a:ea typeface="Calibri" pitchFamily="34" charset="-122"/>
                 <a:cs typeface="Calibri" pitchFamily="34" charset="-120"/>
               </a:rPr>
-              <a:t>3.  Adding '-er' to a verb like 'teach' creates a noun meaning 'one who teaches'.</a:t>
+              <a:t>3.  The suffix '-er' always makes a word mean the opposite of what it meant before.</a:t>
             </a:r>
             <a:endParaRPr lang="en-US" sz="1300" dirty="0"/>
           </a:p>
@@ -37586,11 +35973,11 @@
             </a:avLst>
           </a:prstGeom>
           <a:solidFill>
-            <a:srgbClr val="DCFCE7"/>
-          </a:solidFill>
-          <a:ln w="12700">
-            <a:solidFill>
-              <a:srgbClr val="16A34A"/>
+            <a:srgbClr val="FEE2E2"/>
+          </a:solidFill>
+          <a:ln w="12700">
+            <a:solidFill>
+              <a:srgbClr val="DC2626"/>
             </a:solidFill>
             <a:prstDash val="solid"/>
           </a:ln>
@@ -37623,13 +36010,13 @@
             <a:r>
               <a:rPr lang="en-US" sz="1100" b="1" dirty="0">
                 <a:solidFill>
-                  <a:srgbClr val="16A34A"/>
+                  <a:srgbClr val="DC2626"/>
                 </a:solidFill>
                 <a:latin typeface="Trebuchet MS" pitchFamily="34" charset="0"/>
                 <a:ea typeface="Trebuchet MS" pitchFamily="34" charset="-122"/>
                 <a:cs typeface="Trebuchet MS" pitchFamily="34" charset="-120"/>
               </a:rPr>
-              <a:t>TRUE</a:t>
+              <a:t>FALSE</a:t>
             </a:r>
             <a:endParaRPr lang="en-US" sz="1100" dirty="0"/>
           </a:p>
@@ -37702,7 +36089,7 @@
                 <a:ea typeface="Calibri" pitchFamily="34" charset="-122"/>
                 <a:cs typeface="Calibri" pitchFamily="34" charset="-120"/>
               </a:rPr>
-              <a:t>4.  The suffix '-er' can be used to compare two things, as in 'taller' or 'stronger'.</a:t>
+              <a:t>4.  Adding '-er' to a verb like 'farm' creates a noun meaning 'one who farms'.</a:t>
             </a:r>
             <a:endParaRPr lang="en-US" sz="1300" dirty="0"/>
           </a:p>
@@ -37841,7 +36228,7 @@
                 <a:ea typeface="Calibri" pitchFamily="34" charset="-122"/>
                 <a:cs typeface="Calibri" pitchFamily="34" charset="-120"/>
               </a:rPr>
-              <a:t>5.  The suffix '-er' only comes from Greek and was used in ancient science words.</a:t>
+              <a:t>5.  The word 'stronger' uses '-er' to compare two things, meaning 'more strong'.</a:t>
             </a:r>
             <a:endParaRPr lang="en-US" sz="1300" dirty="0"/>
           </a:p>
@@ -37864,11 +36251,11 @@
             </a:avLst>
           </a:prstGeom>
           <a:solidFill>
-            <a:srgbClr val="FEE2E2"/>
-          </a:solidFill>
-          <a:ln w="12700">
-            <a:solidFill>
-              <a:srgbClr val="DC2626"/>
+            <a:srgbClr val="DCFCE7"/>
+          </a:solidFill>
+          <a:ln w="12700">
+            <a:solidFill>
+              <a:srgbClr val="16A34A"/>
             </a:solidFill>
             <a:prstDash val="solid"/>
           </a:ln>
@@ -37901,13 +36288,13 @@
             <a:r>
               <a:rPr lang="en-US" sz="1100" b="1" dirty="0">
                 <a:solidFill>
-                  <a:srgbClr val="DC2626"/>
+                  <a:srgbClr val="16A34A"/>
                 </a:solidFill>
                 <a:latin typeface="Trebuchet MS" pitchFamily="34" charset="0"/>
                 <a:ea typeface="Trebuchet MS" pitchFamily="34" charset="-122"/>
                 <a:cs typeface="Trebuchet MS" pitchFamily="34" charset="-120"/>
               </a:rPr>
-              <a:t>FALSE</a:t>
+              <a:t>TRUE</a:t>
             </a:r>
             <a:endParaRPr lang="en-US" sz="1100" dirty="0"/>
           </a:p>
@@ -38612,7 +36999,7 @@
                 <a:ea typeface="Trebuchet MS" pitchFamily="34" charset="-122"/>
                 <a:cs typeface="Trebuchet MS" pitchFamily="34" charset="-120"/>
               </a:rPr>
-              <a:t>leader</a:t>
+              <a:t>stronger</a:t>
             </a:r>
             <a:endParaRPr lang="en-US" sz="1300" dirty="0"/>
           </a:p>
@@ -38744,7 +37131,7 @@
                 <a:ea typeface="Trebuchet MS" pitchFamily="34" charset="-122"/>
                 <a:cs typeface="Trebuchet MS" pitchFamily="34" charset="-120"/>
               </a:rPr>
-              <a:t>discover</a:t>
+              <a:t>reader</a:t>
             </a:r>
             <a:endParaRPr lang="en-US" sz="1300" dirty="0"/>
           </a:p>
@@ -38810,7 +37197,7 @@
                 <a:ea typeface="Trebuchet MS" pitchFamily="34" charset="-122"/>
                 <a:cs typeface="Trebuchet MS" pitchFamily="34" charset="-120"/>
               </a:rPr>
-              <a:t>runner</a:t>
+              <a:t>player</a:t>
             </a:r>
             <a:endParaRPr lang="en-US" sz="1300" dirty="0"/>
           </a:p>
@@ -38876,7 +37263,7 @@
                 <a:ea typeface="Trebuchet MS" pitchFamily="34" charset="-122"/>
                 <a:cs typeface="Trebuchet MS" pitchFamily="34" charset="-120"/>
               </a:rPr>
-              <a:t>reporter</a:t>
+              <a:t>explorer</a:t>
             </a:r>
             <a:endParaRPr lang="en-US" sz="1300" dirty="0"/>
           </a:p>
@@ -39661,7 +38048,7 @@
                 <a:ea typeface="Trebuchet MS" pitchFamily="34" charset="-122"/>
                 <a:cs typeface="Trebuchet MS" pitchFamily="34" charset="-120"/>
               </a:rPr>
-              <a:t>over-</a:t>
+              <a:t>un-</a:t>
             </a:r>
             <a:endParaRPr lang="en-US" sz="1300" dirty="0"/>
           </a:p>
@@ -39725,7 +38112,7 @@
                 <a:ea typeface="Trebuchet MS" pitchFamily="34" charset="-122"/>
                 <a:cs typeface="Trebuchet MS" pitchFamily="34" charset="-120"/>
               </a:rPr>
-              <a:t>build</a:t>
+              <a:t>play</a:t>
             </a:r>
             <a:endParaRPr lang="en-US" sz="1300" dirty="0"/>
           </a:p>
@@ -39814,7 +38201,7 @@
                 <a:ea typeface="Trebuchet MS" pitchFamily="34" charset="-122"/>
                 <a:cs typeface="Trebuchet MS" pitchFamily="34" charset="-120"/>
               </a:rPr>
-              <a:t>un-</a:t>
+              <a:t>over-</a:t>
             </a:r>
             <a:endParaRPr lang="en-US" sz="1300" dirty="0"/>
           </a:p>
@@ -39878,7 +38265,7 @@
                 <a:ea typeface="Trebuchet MS" pitchFamily="34" charset="-122"/>
                 <a:cs typeface="Trebuchet MS" pitchFamily="34" charset="-120"/>
               </a:rPr>
-              <a:t>lead</a:t>
+              <a:t>farm</a:t>
             </a:r>
             <a:endParaRPr lang="en-US" sz="1300" dirty="0"/>
           </a:p>
@@ -39967,7 +38354,7 @@
                 <a:ea typeface="Trebuchet MS" pitchFamily="34" charset="-122"/>
                 <a:cs typeface="Trebuchet MS" pitchFamily="34" charset="-120"/>
               </a:rPr>
-              <a:t>dis-</a:t>
+              <a:t>re-</a:t>
             </a:r>
             <a:endParaRPr lang="en-US" sz="1300" dirty="0"/>
           </a:p>
@@ -40031,7 +38418,7 @@
                 <a:ea typeface="Trebuchet MS" pitchFamily="34" charset="-122"/>
                 <a:cs typeface="Trebuchet MS" pitchFamily="34" charset="-120"/>
               </a:rPr>
-              <a:t>play</a:t>
+              <a:t>read</a:t>
             </a:r>
             <a:endParaRPr lang="en-US" sz="1300" dirty="0"/>
           </a:p>
@@ -40120,7 +38507,7 @@
                 <a:ea typeface="Trebuchet MS" pitchFamily="34" charset="-122"/>
                 <a:cs typeface="Trebuchet MS" pitchFamily="34" charset="-120"/>
               </a:rPr>
-              <a:t>pre-</a:t>
+              <a:t>dis-</a:t>
             </a:r>
             <a:endParaRPr lang="en-US" sz="1300" dirty="0"/>
           </a:p>
@@ -40184,7 +38571,7 @@
                 <a:ea typeface="Trebuchet MS" pitchFamily="34" charset="-122"/>
                 <a:cs typeface="Trebuchet MS" pitchFamily="34" charset="-120"/>
               </a:rPr>
-              <a:t>farm</a:t>
+              <a:t>build</a:t>
             </a:r>
             <a:endParaRPr lang="en-US" sz="1300" dirty="0"/>
           </a:p>
@@ -41259,7 +39646,7 @@
                 <a:ea typeface="Calibri" pitchFamily="34" charset="-122"/>
                 <a:cs typeface="Calibri" pitchFamily="34" charset="-120"/>
               </a:rPr>
-              <a:t>A person who helps others learn new things.</a:t>
+              <a:t>A person whose job is to help others learn new things at school.</a:t>
             </a:r>
             <a:endParaRPr lang="en-US" sz="1200" dirty="0"/>
           </a:p>
@@ -41332,7 +39719,7 @@
                 <a:ea typeface="Trebuchet MS" pitchFamily="34" charset="-122"/>
                 <a:cs typeface="Trebuchet MS" pitchFamily="34" charset="-120"/>
               </a:rPr>
-              <a:t>leader</a:t>
+              <a:t>stronger</a:t>
             </a:r>
             <a:endParaRPr lang="en-US" sz="1200" dirty="0"/>
           </a:p>
@@ -41398,7 +39785,7 @@
                 <a:ea typeface="Calibri" pitchFamily="34" charset="-122"/>
                 <a:cs typeface="Calibri" pitchFamily="34" charset="-120"/>
               </a:rPr>
-              <a:t>A person who gathers and shares news stories.</a:t>
+              <a:t>A person who travels to new or unknown places to discover things.</a:t>
             </a:r>
             <a:endParaRPr lang="en-US" sz="1200" dirty="0"/>
           </a:p>
@@ -41537,7 +39924,7 @@
                 <a:ea typeface="Calibri" pitchFamily="34" charset="-122"/>
                 <a:cs typeface="Calibri" pitchFamily="34" charset="-120"/>
               </a:rPr>
-              <a:t>A person who guides or is in charge of a group.</a:t>
+              <a:t>Having more strength or power than something else.</a:t>
             </a:r>
             <a:endParaRPr lang="en-US" sz="1200" dirty="0"/>
           </a:p>
@@ -41610,7 +39997,7 @@
                 <a:ea typeface="Trebuchet MS" pitchFamily="34" charset="-122"/>
                 <a:cs typeface="Trebuchet MS" pitchFamily="34" charset="-120"/>
               </a:rPr>
-              <a:t>discover</a:t>
+              <a:t>reader</a:t>
             </a:r>
             <a:endParaRPr lang="en-US" sz="1200" dirty="0"/>
           </a:p>
@@ -41676,7 +40063,7 @@
                 <a:ea typeface="Calibri" pitchFamily="34" charset="-122"/>
                 <a:cs typeface="Calibri" pitchFamily="34" charset="-120"/>
               </a:rPr>
-              <a:t>A person who runs, especially in a race.</a:t>
+              <a:t>Someone who takes part in a game or sport.</a:t>
             </a:r>
             <a:endParaRPr lang="en-US" sz="1200" dirty="0"/>
           </a:p>
@@ -41749,7 +40136,7 @@
                 <a:ea typeface="Trebuchet MS" pitchFamily="34" charset="-122"/>
                 <a:cs typeface="Trebuchet MS" pitchFamily="34" charset="-120"/>
               </a:rPr>
-              <a:t>runner</a:t>
+              <a:t>player</a:t>
             </a:r>
             <a:endParaRPr lang="en-US" sz="1200" dirty="0"/>
           </a:p>
@@ -41815,7 +40202,7 @@
                 <a:ea typeface="Calibri" pitchFamily="34" charset="-122"/>
                 <a:cs typeface="Calibri" pitchFamily="34" charset="-120"/>
               </a:rPr>
-              <a:t>To find or learn something for the first time.</a:t>
+              <a:t>A person who reads books or other written materials.</a:t>
             </a:r>
             <a:endParaRPr lang="en-US" sz="1200" dirty="0"/>
           </a:p>
@@ -41888,7 +40275,7 @@
                 <a:ea typeface="Trebuchet MS" pitchFamily="34" charset="-122"/>
                 <a:cs typeface="Trebuchet MS" pitchFamily="34" charset="-120"/>
               </a:rPr>
-              <a:t>reporter</a:t>
+              <a:t>explorer</a:t>
             </a:r>
             <a:endParaRPr lang="en-US" sz="1200" dirty="0"/>
           </a:p>
@@ -41954,7 +40341,7 @@
                 <a:ea typeface="Calibri" pitchFamily="34" charset="-122"/>
                 <a:cs typeface="Calibri" pitchFamily="34" charset="-120"/>
               </a:rPr>
-              <a:t>A person who constructs buildings and structures.</a:t>
+              <a:t>Someone who constructs buildings, houses, or other structures.</a:t>
             </a:r>
             <a:endParaRPr lang="en-US" sz="1200" dirty="0"/>
           </a:p>
@@ -42449,7 +40836,7 @@
                 <a:ea typeface="Calibri" pitchFamily="34" charset="-122"/>
                 <a:cs typeface="Calibri" pitchFamily="34" charset="-120"/>
               </a:rPr>
-              <a:t>Our teacher asked us to write a story about an explorer who discovered a hidden valley.</a:t>
+              <a:t>The farmer woke up early to water the vegetable garden before school started.</a:t>
             </a:r>
             <a:endParaRPr lang="en-US" sz="1500" dirty="0"/>
           </a:p>
@@ -42613,7 +41000,7 @@
                 <a:ea typeface="Calibri" pitchFamily="34" charset="-122"/>
                 <a:cs typeface="Calibri" pitchFamily="34" charset="-120"/>
               </a:rPr>
-              <a:t>The builder worked faster than expected to finish the new playground before winter.</a:t>
+              <a:t>She is a faster runner than anyone else in our class this year.</a:t>
             </a:r>
             <a:endParaRPr lang="en-US" sz="1500" dirty="0"/>
           </a:p>
@@ -42777,7 +41164,7 @@
                 <a:ea typeface="Calibri" pitchFamily="34" charset="-122"/>
                 <a:cs typeface="Calibri" pitchFamily="34" charset="-120"/>
               </a:rPr>
-              <a:t>She became a talented runner after training harder each week at the athletics club.</a:t>
+              <a:t>Our teacher asked us to write a story about an explorer who discovered a hidden island.</a:t>
             </a:r>
             <a:endParaRPr lang="en-US" sz="1500" dirty="0"/>
           </a:p>
